--- a/Defensa_TFG_Las_estatuas_tambien_mueren.pptx
+++ b/Defensa_TFG_Las_estatuas_tambien_mueren.pptx
@@ -3206,7 +3206,7 @@
         </p:nvSpPr>
         <p:spPr>
           <a:xfrm>
-            <a:off x="822960" y="1874519"/>
+            <a:off x="822960" y="1828800"/>
             <a:ext cx="2011680" cy="31750"/>
           </a:xfrm>
           <a:prstGeom prst="rect">
@@ -3250,7 +3250,7 @@
         </p:nvSpPr>
         <p:spPr>
           <a:xfrm>
-            <a:off x="822960" y="914400"/>
+            <a:off x="822960" y="868680"/>
             <a:ext cx="10515600" cy="457200"/>
           </a:xfrm>
           <a:prstGeom prst="rect">
@@ -3285,7 +3285,7 @@
         </p:nvSpPr>
         <p:spPr>
           <a:xfrm>
-            <a:off x="822960" y="2148840"/>
+            <a:off x="822960" y="2103120"/>
             <a:ext cx="10607040" cy="2011680"/>
           </a:xfrm>
           <a:prstGeom prst="rect">
@@ -3327,7 +3327,7 @@
               </a:spcAft>
             </a:pPr>
             <a:r>
-              <a:rPr sz="2600" b="0" i="1">
+              <a:rPr sz="2500" b="0" i="1">
                 <a:solidFill>
                   <a:srgbClr val="F4F0E9"/>
                 </a:solidFill>
@@ -3358,8 +3358,8 @@
         </p:nvSpPr>
         <p:spPr>
           <a:xfrm>
-            <a:off x="822960" y="4800600"/>
-            <a:ext cx="10607040" cy="1554480"/>
+            <a:off x="822960" y="4709160"/>
+            <a:ext cx="10607040" cy="1737360"/>
           </a:xfrm>
           <a:prstGeom prst="rect">
             <a:avLst/>
@@ -3374,7 +3374,7 @@
           <a:p>
             <a:pPr algn="l">
               <a:spcAft>
-                <a:spcPts val="800"/>
+                <a:spcPts val="900"/>
               </a:spcAft>
             </a:pPr>
             <a:r>
@@ -3400,7 +3400,7 @@
                 </a:solidFill>
                 <a:latin typeface="Calibri"/>
               </a:rPr>
-              <a:t>Bajo la dirección de  </a:t>
+              <a:t>Bajo la dirección de   </a:t>
             </a:r>
             <a:r>
               <a:rPr sz="1300" b="0" i="0">
@@ -3409,28 +3409,44 @@
                 </a:solidFill>
                 <a:latin typeface="Calibri"/>
               </a:rPr>
-              <a:t>Dr. José Javier Aliaga Cárceles  ·  D. José Ramón García Cañizares</a:t>
+              <a:t>Dr. José Javier Aliaga Cárceles   ·   D. José Ramón García Cañizares</a:t>
+            </a:r>
+          </a:p>
+          <a:p>
+            <a:pPr algn="l">
+              <a:spcAft>
+                <a:spcPts val="400"/>
+              </a:spcAft>
+            </a:pPr>
+            <a:r>
+              <a:rPr sz="1200" b="0" i="0">
+                <a:solidFill>
+                  <a:srgbClr val="F4F0E9"/>
+                </a:solidFill>
+                <a:latin typeface="Calibri"/>
+              </a:rPr>
+              <a:t>Universidad de Murcia · Facultad de Letras</a:t>
+            </a:r>
+            <a:r>
+              <a:rPr sz="1200" b="0" i="0">
+                <a:solidFill>
+                  <a:srgbClr val="6B645C"/>
+                </a:solidFill>
+                <a:latin typeface="Calibri"/>
+              </a:rPr>
+              <a:t>      Curso 2025-2026 · Convocatoria de junio-julio</a:t>
             </a:r>
           </a:p>
           <a:p>
             <a:pPr algn="l"/>
             <a:r>
-              <a:rPr sz="1200" b="0" i="0">
-                <a:solidFill>
-                  <a:srgbClr val="F4F0E9"/>
-                </a:solidFill>
-                <a:latin typeface="Calibri"/>
-              </a:rPr>
-              <a:t>Universidad de Murcia · Facultad de Letras</a:t>
-            </a:r>
-            <a:r>
-              <a:rPr sz="1200" b="0" i="0">
-                <a:solidFill>
-                  <a:srgbClr val="6B645C"/>
-                </a:solidFill>
-                <a:latin typeface="Calibri"/>
-              </a:rPr>
-              <a:t>      Curso 2025-2026 · Convocatoria de junio-julio</a:t>
+              <a:rPr sz="1100" b="0" i="0">
+                <a:solidFill>
+                  <a:srgbClr val="C08A3E"/>
+                </a:solidFill>
+                <a:latin typeface="Calibri"/>
+              </a:rPr>
+              <a:t>Departamento de Historia del Arte</a:t>
             </a:r>
           </a:p>
         </p:txBody>
@@ -3463,14 +3479,53 @@
       <p:grpSpPr/>
       <p:sp>
         <p:nvSpPr>
-          <p:cNvPr id="2" name="Rectangle 1"/>
+          <p:cNvPr id="2" name="TextBox 1"/>
+          <p:cNvSpPr txBox="1"/>
+          <p:nvPr/>
+        </p:nvSpPr>
+        <p:spPr>
+          <a:xfrm>
+            <a:off x="4206240" y="219456"/>
+            <a:ext cx="7479792" cy="502920"/>
+          </a:xfrm>
+          <a:prstGeom prst="rect">
+            <a:avLst/>
+          </a:prstGeom>
+          <a:noFill/>
+        </p:spPr>
+        <p:txBody>
+          <a:bodyPr wrap="square" anchor="t" lIns="0" rIns="0" tIns="0" bIns="0">
+            <a:spAutoFit/>
+          </a:bodyPr>
+          <a:lstStyle/>
+          <a:p>
+            <a:pPr algn="r">
+              <a:lnSpc>
+                <a:spcPct val="100000"/>
+              </a:lnSpc>
+            </a:pPr>
+            <a:r>
+              <a:rPr sz="850" b="0" i="1">
+                <a:solidFill>
+                  <a:srgbClr val="6B645C"/>
+                </a:solidFill>
+                <a:latin typeface="Georgia"/>
+              </a:rPr>
+              <a:t>Más allá del documental de arte: ensayo fílmico y crítica anticolonial en Las estatuas también mueren</a:t>
+            </a:r>
+          </a:p>
+        </p:txBody>
+      </p:sp>
+      <p:sp>
+        <p:nvSpPr>
+          <p:cNvPr id="3" name="Rectangle 2"/>
           <p:cNvSpPr/>
           <p:nvPr/>
         </p:nvSpPr>
         <p:spPr>
           <a:xfrm>
-            <a:off x="502920" y="548640"/>
-            <a:ext cx="128016" cy="1051560"/>
+            <a:off x="502920" y="566928"/>
+            <a:ext cx="128016" cy="960120"/>
           </a:xfrm>
           <a:prstGeom prst="rect">
             <a:avLst/>
@@ -3507,14 +3562,14 @@
       </p:sp>
       <p:sp>
         <p:nvSpPr>
-          <p:cNvPr id="3" name="TextBox 2"/>
+          <p:cNvPr id="4" name="TextBox 3"/>
           <p:cNvSpPr txBox="1"/>
           <p:nvPr/>
         </p:nvSpPr>
         <p:spPr>
           <a:xfrm>
             <a:off x="777240" y="502920"/>
-            <a:ext cx="10698480" cy="320040"/>
+            <a:ext cx="6400800" cy="292608"/>
           </a:xfrm>
           <a:prstGeom prst="rect">
             <a:avLst/>
@@ -3535,21 +3590,21 @@
                 </a:solidFill>
                 <a:latin typeface="Calibri"/>
               </a:rPr>
-              <a:t>CONTENIDO · 4</a:t>
-            </a:r>
-          </a:p>
-        </p:txBody>
-      </p:sp>
-      <p:sp>
-        <p:nvSpPr>
-          <p:cNvPr id="4" name="TextBox 3"/>
+              <a:t>CONTENIDO · 3</a:t>
+            </a:r>
+          </a:p>
+        </p:txBody>
+      </p:sp>
+      <p:sp>
+        <p:nvSpPr>
+          <p:cNvPr id="5" name="TextBox 4"/>
           <p:cNvSpPr txBox="1"/>
           <p:nvPr/>
         </p:nvSpPr>
         <p:spPr>
           <a:xfrm>
             <a:off x="777240" y="786384"/>
-            <a:ext cx="10881360" cy="868680"/>
+            <a:ext cx="10881360" cy="822960"/>
           </a:xfrm>
           <a:prstGeom prst="rect">
             <a:avLst/>
@@ -3564,11 +3619,11 @@
           <a:p>
             <a:pPr algn="l">
               <a:lnSpc>
-                <a:spcPct val="100000"/>
+                <a:spcPct val="98000"/>
               </a:lnSpc>
             </a:pPr>
             <a:r>
-              <a:rPr sz="3000" b="0" i="0">
+              <a:rPr sz="2700" b="1" i="0">
                 <a:solidFill>
                   <a:srgbClr val="2A2724"/>
                 </a:solidFill>
@@ -3581,14 +3636,14 @@
       </p:sp>
       <p:sp>
         <p:nvSpPr>
-          <p:cNvPr id="5" name="TextBox 4"/>
+          <p:cNvPr id="6" name="TextBox 5"/>
           <p:cNvSpPr txBox="1"/>
           <p:nvPr/>
         </p:nvSpPr>
         <p:spPr>
           <a:xfrm>
-            <a:off x="777240" y="1828800"/>
-            <a:ext cx="6400800" cy="4023360"/>
+            <a:off x="777240" y="1600200"/>
+            <a:ext cx="6400800" cy="4297680"/>
           </a:xfrm>
           <a:prstGeom prst="rect">
             <a:avLst/>
@@ -3606,11 +3661,11 @@
                 <a:spcPct val="105000"/>
               </a:lnSpc>
               <a:spcAft>
-                <a:spcPts val="1200"/>
+                <a:spcPts val="1100"/>
               </a:spcAft>
             </a:pPr>
             <a:r>
-              <a:rPr sz="1550" b="1">
+              <a:rPr sz="1500" b="1">
                 <a:solidFill>
                   <a:srgbClr val="C08A3E"/>
                 </a:solidFill>
@@ -3619,7 +3674,7 @@
               <a:t>—  </a:t>
             </a:r>
             <a:r>
-              <a:rPr sz="1550" b="1">
+              <a:rPr sz="1500" b="1">
                 <a:solidFill>
                   <a:srgbClr val="2A2724"/>
                 </a:solidFill>
@@ -3628,13 +3683,13 @@
               <a:t>Directores: </a:t>
             </a:r>
             <a:r>
-              <a:rPr sz="1550">
+              <a:rPr sz="1500">
                 <a:solidFill>
                   <a:srgbClr val="2A2724"/>
                 </a:solidFill>
                 <a:latin typeface="Calibri"/>
               </a:rPr>
-              <a:t>Chris Marker y Alain Resnais, vinculados a la Rive Gauche (junto a Agnès Varda).</a:t>
+              <a:t>Chris Marker y Alain Resnais, del grupo de la Rive Gauche (junto a Agnès Varda).</a:t>
             </a:r>
           </a:p>
           <a:p>
@@ -3643,11 +3698,11 @@
                 <a:spcPct val="105000"/>
               </a:lnSpc>
               <a:spcAft>
-                <a:spcPts val="1200"/>
+                <a:spcPts val="1100"/>
               </a:spcAft>
             </a:pPr>
             <a:r>
-              <a:rPr sz="1550" b="1">
+              <a:rPr sz="1500" b="1">
                 <a:solidFill>
                   <a:srgbClr val="C08A3E"/>
                 </a:solidFill>
@@ -3656,7 +3711,7 @@
               <a:t>—  </a:t>
             </a:r>
             <a:r>
-              <a:rPr sz="1550" b="1">
+              <a:rPr sz="1500" b="1">
                 <a:solidFill>
                   <a:srgbClr val="2A2724"/>
                 </a:solidFill>
@@ -3665,13 +3720,13 @@
               <a:t>Encargo: </a:t>
             </a:r>
             <a:r>
-              <a:rPr sz="1550">
+              <a:rPr sz="1500">
                 <a:solidFill>
                   <a:srgbClr val="2A2724"/>
                 </a:solidFill>
                 <a:latin typeface="Calibri"/>
               </a:rPr>
-              <a:t>el intelectual senegalés Alioune Diop, a través de la revista Présence Africaine (1950).</a:t>
+              <a:t>del intelectual senegalés Alioune Diop, a través de la revista Présence Africaine (1950).</a:t>
             </a:r>
           </a:p>
           <a:p>
@@ -3680,11 +3735,11 @@
                 <a:spcPct val="105000"/>
               </a:lnSpc>
               <a:spcAft>
-                <a:spcPts val="1200"/>
+                <a:spcPts val="1100"/>
               </a:spcAft>
             </a:pPr>
             <a:r>
-              <a:rPr sz="1550" b="1">
+              <a:rPr sz="1500" b="1">
                 <a:solidFill>
                   <a:srgbClr val="C08A3E"/>
                 </a:solidFill>
@@ -3693,7 +3748,7 @@
               <a:t>—  </a:t>
             </a:r>
             <a:r>
-              <a:rPr sz="1550" b="1">
+              <a:rPr sz="1500" b="1">
                 <a:solidFill>
                   <a:srgbClr val="2A2724"/>
                 </a:solidFill>
@@ -3702,7 +3757,7 @@
               <a:t>Ensayo cinematográfico: </a:t>
             </a:r>
             <a:r>
-              <a:rPr sz="1550">
+              <a:rPr sz="1500">
                 <a:solidFill>
                   <a:srgbClr val="2A2724"/>
                 </a:solidFill>
@@ -3717,11 +3772,11 @@
                 <a:spcPct val="105000"/>
               </a:lnSpc>
               <a:spcAft>
-                <a:spcPts val="1200"/>
+                <a:spcPts val="1100"/>
               </a:spcAft>
             </a:pPr>
             <a:r>
-              <a:rPr sz="1550" b="1">
+              <a:rPr sz="1500" b="1">
                 <a:solidFill>
                   <a:srgbClr val="C08A3E"/>
                 </a:solidFill>
@@ -3730,22 +3785,22 @@
               <a:t>—  </a:t>
             </a:r>
             <a:r>
-              <a:rPr sz="1550" b="1">
+              <a:rPr sz="1500" b="1">
                 <a:solidFill>
                   <a:srgbClr val="2A2724"/>
                 </a:solidFill>
                 <a:latin typeface="Calibri"/>
               </a:rPr>
-              <a:t>Recepción: </a:t>
-            </a:r>
-            <a:r>
-              <a:rPr sz="1550">
+              <a:t>Censura: </a:t>
+            </a:r>
+            <a:r>
+              <a:rPr sz="1500">
                 <a:solidFill>
                   <a:srgbClr val="2A2724"/>
                 </a:solidFill>
                 <a:latin typeface="Calibri"/>
               </a:rPr>
-              <a:t>censurado en Francia durante 12 años por su lectura anticolonial.</a:t>
+              <a:t>prohibido en Francia durante 12 años por su lectura anticolonial.</a:t>
             </a:r>
           </a:p>
           <a:p>
@@ -3754,11 +3809,11 @@
                 <a:spcPct val="105000"/>
               </a:lnSpc>
               <a:spcAft>
-                <a:spcPts val="1200"/>
+                <a:spcPts val="1100"/>
               </a:spcAft>
             </a:pPr>
             <a:r>
-              <a:rPr sz="1550" b="1">
+              <a:rPr sz="1500" b="1">
                 <a:solidFill>
                   <a:srgbClr val="C08A3E"/>
                 </a:solidFill>
@@ -3767,36 +3822,36 @@
               <a:t>—  </a:t>
             </a:r>
             <a:r>
-              <a:rPr sz="1550" b="1">
+              <a:rPr sz="1500" b="1">
                 <a:solidFill>
                   <a:srgbClr val="2A2724"/>
                 </a:solidFill>
                 <a:latin typeface="Calibri"/>
               </a:rPr>
-              <a:t>Continuidad: </a:t>
-            </a:r>
-            <a:r>
-              <a:rPr sz="1550">
+              <a:t>Vigencia: </a:t>
+            </a:r>
+            <a:r>
+              <a:rPr sz="1500">
                 <a:solidFill>
                   <a:srgbClr val="2A2724"/>
                 </a:solidFill>
                 <a:latin typeface="Calibri"/>
               </a:rPr>
-              <a:t>su huella llega hasta Dahomey (Mati Diop) y el debate actual sobre la restitución.</a:t>
-            </a:r>
-          </a:p>
-        </p:txBody>
-      </p:sp>
-      <p:sp>
-        <p:nvSpPr>
-          <p:cNvPr id="6" name="Rectangle 5"/>
+              <a:t>su huella llega a Dahomey (Mati Diop) y al debate sobre la restitución (solo 26 de +7000 piezas).</a:t>
+            </a:r>
+          </a:p>
+        </p:txBody>
+      </p:sp>
+      <p:sp>
+        <p:nvSpPr>
+          <p:cNvPr id="7" name="Rectangle 6"/>
           <p:cNvSpPr/>
           <p:nvPr/>
         </p:nvSpPr>
         <p:spPr>
           <a:xfrm>
-            <a:off x="7498079" y="1828800"/>
-            <a:ext cx="4160520" cy="1920240"/>
+            <a:off x="7498079" y="1600200"/>
+            <a:ext cx="4160520" cy="1965960"/>
           </a:xfrm>
           <a:prstGeom prst="rect">
             <a:avLst/>
@@ -3835,14 +3890,14 @@
       </p:sp>
       <p:sp>
         <p:nvSpPr>
-          <p:cNvPr id="7" name="Rectangle 6"/>
+          <p:cNvPr id="8" name="Rectangle 7"/>
           <p:cNvSpPr/>
           <p:nvPr/>
         </p:nvSpPr>
         <p:spPr>
           <a:xfrm>
-            <a:off x="7498079" y="1828800"/>
-            <a:ext cx="91440" cy="1920240"/>
+            <a:off x="7498079" y="1600200"/>
+            <a:ext cx="91440" cy="1965960"/>
           </a:xfrm>
           <a:prstGeom prst="rect">
             <a:avLst/>
@@ -3879,13 +3934,13 @@
       </p:sp>
       <p:sp>
         <p:nvSpPr>
-          <p:cNvPr id="8" name="TextBox 7"/>
+          <p:cNvPr id="9" name="TextBox 8"/>
           <p:cNvSpPr txBox="1"/>
           <p:nvPr/>
         </p:nvSpPr>
         <p:spPr>
           <a:xfrm>
-            <a:off x="7754111" y="1965960"/>
+            <a:off x="7754112" y="1746504"/>
             <a:ext cx="3749039" cy="1737360"/>
           </a:xfrm>
           <a:prstGeom prst="rect">
@@ -3921,7 +3976,7 @@
               </a:spcAft>
             </a:pPr>
             <a:r>
-              <a:rPr sz="1200" b="0" i="1">
+              <a:rPr sz="1150" b="0" i="1">
                 <a:solidFill>
                   <a:srgbClr val="7A5236"/>
                 </a:solidFill>
@@ -3937,27 +3992,27 @@
               </a:lnSpc>
             </a:pPr>
             <a:r>
-              <a:rPr sz="1300" b="0" i="0">
+              <a:rPr sz="1250" b="0" i="0">
                 <a:solidFill>
                   <a:srgbClr val="6B645C"/>
                 </a:solidFill>
                 <a:latin typeface="Calibri"/>
               </a:rPr>
-              <a:t>«Soy un ensayista... y a mí hacer ensayos.» Encargado del proyecto por su afinidad con Présence Africaine.</a:t>
-            </a:r>
-          </a:p>
-        </p:txBody>
-      </p:sp>
-      <p:sp>
-        <p:nvSpPr>
-          <p:cNvPr id="9" name="Rectangle 8"/>
+              <a:t>«Soy un ensayista... y a mí hacer ensayos.» Comprometido con los ideales de Présence Africaine.</a:t>
+            </a:r>
+          </a:p>
+        </p:txBody>
+      </p:sp>
+      <p:sp>
+        <p:nvSpPr>
+          <p:cNvPr id="10" name="Rectangle 9"/>
           <p:cNvSpPr/>
           <p:nvPr/>
         </p:nvSpPr>
         <p:spPr>
           <a:xfrm>
-            <a:off x="7498079" y="3977639"/>
-            <a:ext cx="4160520" cy="1920240"/>
+            <a:off x="7498079" y="3931920"/>
+            <a:ext cx="4160520" cy="1965960"/>
           </a:xfrm>
           <a:prstGeom prst="rect">
             <a:avLst/>
@@ -3996,14 +4051,14 @@
       </p:sp>
       <p:sp>
         <p:nvSpPr>
-          <p:cNvPr id="10" name="Rectangle 9"/>
+          <p:cNvPr id="11" name="Rectangle 10"/>
           <p:cNvSpPr/>
           <p:nvPr/>
         </p:nvSpPr>
         <p:spPr>
           <a:xfrm>
-            <a:off x="7498079" y="3977639"/>
-            <a:ext cx="91440" cy="1920240"/>
+            <a:off x="7498079" y="3931920"/>
+            <a:ext cx="91440" cy="1965960"/>
           </a:xfrm>
           <a:prstGeom prst="rect">
             <a:avLst/>
@@ -4040,13 +4095,13 @@
       </p:sp>
       <p:sp>
         <p:nvSpPr>
-          <p:cNvPr id="11" name="TextBox 10"/>
+          <p:cNvPr id="12" name="TextBox 11"/>
           <p:cNvSpPr txBox="1"/>
           <p:nvPr/>
         </p:nvSpPr>
         <p:spPr>
           <a:xfrm>
-            <a:off x="7754112" y="4114800"/>
+            <a:off x="7754112" y="4078224"/>
             <a:ext cx="3749039" cy="1737360"/>
           </a:xfrm>
           <a:prstGeom prst="rect">
@@ -4082,7 +4137,7 @@
               </a:spcAft>
             </a:pPr>
             <a:r>
-              <a:rPr sz="1200" b="0" i="1">
+              <a:rPr sz="1150" b="0" i="1">
                 <a:solidFill>
                   <a:srgbClr val="7A5236"/>
                 </a:solidFill>
@@ -4098,27 +4153,27 @@
               </a:lnSpc>
             </a:pPr>
             <a:r>
-              <a:rPr sz="1300" b="0" i="0">
+              <a:rPr sz="1250" b="0" i="0">
                 <a:solidFill>
                   <a:srgbClr val="6B645C"/>
                 </a:solidFill>
                 <a:latin typeface="Calibri"/>
               </a:rPr>
-              <a:t>Óscar por Van Gogh (1950). Composiciones dinámicas, travellings y montaje para explorar las obras.</a:t>
-            </a:r>
-          </a:p>
-        </p:txBody>
-      </p:sp>
-      <p:sp>
-        <p:nvSpPr>
-          <p:cNvPr id="12" name="Rectangle 11"/>
+              <a:t>Óscar por Van Gogh (1950). Aporta composiciones dinámicas, travellings y montaje para explorar las obras.</a:t>
+            </a:r>
+          </a:p>
+        </p:txBody>
+      </p:sp>
+      <p:sp>
+        <p:nvSpPr>
+          <p:cNvPr id="13" name="Rectangle 12"/>
           <p:cNvSpPr/>
           <p:nvPr/>
         </p:nvSpPr>
         <p:spPr>
           <a:xfrm>
-            <a:off x="502920" y="6327648"/>
-            <a:ext cx="11183112" cy="17780"/>
+            <a:off x="502920" y="6355080"/>
+            <a:ext cx="11183112" cy="15240"/>
           </a:xfrm>
           <a:prstGeom prst="rect">
             <a:avLst/>
@@ -4155,14 +4210,14 @@
       </p:sp>
       <p:sp>
         <p:nvSpPr>
-          <p:cNvPr id="13" name="TextBox 12"/>
+          <p:cNvPr id="14" name="TextBox 13"/>
           <p:cNvSpPr txBox="1"/>
           <p:nvPr/>
         </p:nvSpPr>
         <p:spPr>
           <a:xfrm>
-            <a:off x="502920" y="6400800"/>
-            <a:ext cx="9601200" cy="365760"/>
+            <a:off x="502920" y="6428232"/>
+            <a:ext cx="9601200" cy="320040"/>
           </a:xfrm>
           <a:prstGeom prst="rect">
             <a:avLst/>
@@ -4190,14 +4245,14 @@
       </p:sp>
       <p:sp>
         <p:nvSpPr>
-          <p:cNvPr id="14" name="TextBox 13"/>
+          <p:cNvPr id="15" name="TextBox 14"/>
           <p:cNvSpPr txBox="1"/>
           <p:nvPr/>
         </p:nvSpPr>
         <p:spPr>
           <a:xfrm>
-            <a:off x="10515600" y="6400800"/>
-            <a:ext cx="1170432" cy="365760"/>
+            <a:off x="10515600" y="6428232"/>
+            <a:ext cx="1170432" cy="320040"/>
           </a:xfrm>
           <a:prstGeom prst="rect">
             <a:avLst/>
@@ -4251,14 +4306,53 @@
       <p:grpSpPr/>
       <p:sp>
         <p:nvSpPr>
-          <p:cNvPr id="2" name="Rectangle 1"/>
+          <p:cNvPr id="2" name="TextBox 1"/>
+          <p:cNvSpPr txBox="1"/>
+          <p:nvPr/>
+        </p:nvSpPr>
+        <p:spPr>
+          <a:xfrm>
+            <a:off x="4206240" y="219456"/>
+            <a:ext cx="7479792" cy="502920"/>
+          </a:xfrm>
+          <a:prstGeom prst="rect">
+            <a:avLst/>
+          </a:prstGeom>
+          <a:noFill/>
+        </p:spPr>
+        <p:txBody>
+          <a:bodyPr wrap="square" anchor="t" lIns="0" rIns="0" tIns="0" bIns="0">
+            <a:spAutoFit/>
+          </a:bodyPr>
+          <a:lstStyle/>
+          <a:p>
+            <a:pPr algn="r">
+              <a:lnSpc>
+                <a:spcPct val="100000"/>
+              </a:lnSpc>
+            </a:pPr>
+            <a:r>
+              <a:rPr sz="850" b="0" i="1">
+                <a:solidFill>
+                  <a:srgbClr val="6B645C"/>
+                </a:solidFill>
+                <a:latin typeface="Georgia"/>
+              </a:rPr>
+              <a:t>Más allá del documental de arte: ensayo fílmico y crítica anticolonial en Las estatuas también mueren</a:t>
+            </a:r>
+          </a:p>
+        </p:txBody>
+      </p:sp>
+      <p:sp>
+        <p:nvSpPr>
+          <p:cNvPr id="3" name="Rectangle 2"/>
           <p:cNvSpPr/>
           <p:nvPr/>
         </p:nvSpPr>
         <p:spPr>
           <a:xfrm>
-            <a:off x="502920" y="548640"/>
-            <a:ext cx="128016" cy="1051560"/>
+            <a:off x="502920" y="566928"/>
+            <a:ext cx="128016" cy="960120"/>
           </a:xfrm>
           <a:prstGeom prst="rect">
             <a:avLst/>
@@ -4295,14 +4389,14 @@
       </p:sp>
       <p:sp>
         <p:nvSpPr>
-          <p:cNvPr id="3" name="TextBox 2"/>
+          <p:cNvPr id="4" name="TextBox 3"/>
           <p:cNvSpPr txBox="1"/>
           <p:nvPr/>
         </p:nvSpPr>
         <p:spPr>
           <a:xfrm>
             <a:off x="777240" y="502920"/>
-            <a:ext cx="10698480" cy="320040"/>
+            <a:ext cx="6400800" cy="292608"/>
           </a:xfrm>
           <a:prstGeom prst="rect">
             <a:avLst/>
@@ -4323,21 +4417,21 @@
                 </a:solidFill>
                 <a:latin typeface="Calibri"/>
               </a:rPr>
-              <a:t>CONTENIDO · 5</a:t>
-            </a:r>
-          </a:p>
-        </p:txBody>
-      </p:sp>
-      <p:sp>
-        <p:nvSpPr>
-          <p:cNvPr id="4" name="TextBox 3"/>
+              <a:t>CONTENIDO · 3</a:t>
+            </a:r>
+          </a:p>
+        </p:txBody>
+      </p:sp>
+      <p:sp>
+        <p:nvSpPr>
+          <p:cNvPr id="5" name="TextBox 4"/>
           <p:cNvSpPr txBox="1"/>
           <p:nvPr/>
         </p:nvSpPr>
         <p:spPr>
           <a:xfrm>
             <a:off x="777240" y="786384"/>
-            <a:ext cx="10881360" cy="868680"/>
+            <a:ext cx="10881360" cy="822960"/>
           </a:xfrm>
           <a:prstGeom prst="rect">
             <a:avLst/>
@@ -4352,31 +4446,31 @@
           <a:p>
             <a:pPr algn="l">
               <a:lnSpc>
-                <a:spcPct val="100000"/>
+                <a:spcPct val="98000"/>
               </a:lnSpc>
             </a:pPr>
             <a:r>
-              <a:rPr sz="3000" b="0" i="0">
+              <a:rPr sz="2600" b="1" i="0">
                 <a:solidFill>
                   <a:srgbClr val="2A2724"/>
                 </a:solidFill>
                 <a:latin typeface="Georgia"/>
               </a:rPr>
-              <a:t>El film: dos bloques de obras descontextualizadas</a:t>
-            </a:r>
-          </a:p>
-        </p:txBody>
-      </p:sp>
-      <p:sp>
-        <p:nvSpPr>
-          <p:cNvPr id="5" name="Rectangle 4"/>
+              <a:t>Contenido del film: dos bloques de obras</a:t>
+            </a:r>
+          </a:p>
+        </p:txBody>
+      </p:sp>
+      <p:sp>
+        <p:nvSpPr>
+          <p:cNvPr id="6" name="Rectangle 5"/>
           <p:cNvSpPr/>
           <p:nvPr/>
         </p:nvSpPr>
         <p:spPr>
           <a:xfrm>
-            <a:off x="777240" y="1783080"/>
-            <a:ext cx="10881360" cy="640080"/>
+            <a:off x="777240" y="1828800"/>
+            <a:ext cx="10881360" cy="621792"/>
           </a:xfrm>
           <a:prstGeom prst="rect">
             <a:avLst/>
@@ -4413,14 +4507,14 @@
       </p:sp>
       <p:sp>
         <p:nvSpPr>
-          <p:cNvPr id="6" name="TextBox 5"/>
+          <p:cNvPr id="7" name="TextBox 6"/>
           <p:cNvSpPr txBox="1"/>
           <p:nvPr/>
         </p:nvSpPr>
         <p:spPr>
           <a:xfrm>
-            <a:off x="1005840" y="1783080"/>
-            <a:ext cx="10424160" cy="640080"/>
+            <a:off x="1005840" y="1828800"/>
+            <a:ext cx="10424160" cy="621792"/>
           </a:xfrm>
           <a:prstGeom prst="rect">
             <a:avLst/>
@@ -4448,13 +4542,13 @@
       </p:sp>
       <p:sp>
         <p:nvSpPr>
-          <p:cNvPr id="7" name="Rectangle 6"/>
+          <p:cNvPr id="8" name="Rectangle 7"/>
           <p:cNvSpPr/>
           <p:nvPr/>
         </p:nvSpPr>
         <p:spPr>
           <a:xfrm>
-            <a:off x="777240" y="2606040"/>
+            <a:off x="777240" y="2670048"/>
             <a:ext cx="5349240" cy="502920"/>
           </a:xfrm>
           <a:prstGeom prst="rect">
@@ -4492,13 +4586,13 @@
       </p:sp>
       <p:sp>
         <p:nvSpPr>
-          <p:cNvPr id="8" name="TextBox 7"/>
+          <p:cNvPr id="9" name="TextBox 8"/>
           <p:cNvSpPr txBox="1"/>
           <p:nvPr/>
         </p:nvSpPr>
         <p:spPr>
           <a:xfrm>
-            <a:off x="777240" y="2606040"/>
+            <a:off x="777240" y="2670048"/>
             <a:ext cx="5349240" cy="502920"/>
           </a:xfrm>
           <a:prstGeom prst="rect">
@@ -4527,14 +4621,14 @@
       </p:sp>
       <p:sp>
         <p:nvSpPr>
-          <p:cNvPr id="9" name="TextBox 8"/>
+          <p:cNvPr id="10" name="TextBox 9"/>
           <p:cNvSpPr txBox="1"/>
           <p:nvPr/>
         </p:nvSpPr>
         <p:spPr>
           <a:xfrm>
-            <a:off x="960120" y="3246120"/>
-            <a:ext cx="5029200" cy="2651760"/>
+            <a:off x="960120" y="3310128"/>
+            <a:ext cx="5029200" cy="2560320"/>
           </a:xfrm>
           <a:prstGeom prst="rect">
             <a:avLst/>
@@ -4556,7 +4650,7 @@
               </a:spcAft>
             </a:pPr>
             <a:r>
-              <a:rPr sz="1400" b="1">
+              <a:rPr sz="1350" b="1">
                 <a:solidFill>
                   <a:srgbClr val="C08A3E"/>
                 </a:solidFill>
@@ -4565,7 +4659,7 @@
               <a:t>—  </a:t>
             </a:r>
             <a:r>
-              <a:rPr sz="1400">
+              <a:rPr sz="1350">
                 <a:solidFill>
                   <a:srgbClr val="2A2724"/>
                 </a:solidFill>
@@ -4584,7 +4678,7 @@
               </a:spcAft>
             </a:pPr>
             <a:r>
-              <a:rPr sz="1400" b="1">
+              <a:rPr sz="1350" b="1">
                 <a:solidFill>
                   <a:srgbClr val="C08A3E"/>
                 </a:solidFill>
@@ -4593,13 +4687,13 @@
               <a:t>—  </a:t>
             </a:r>
             <a:r>
-              <a:rPr sz="1400">
+              <a:rPr sz="1350">
                 <a:solidFill>
                   <a:srgbClr val="2A2724"/>
                 </a:solidFill>
                 <a:latin typeface="Calibri"/>
               </a:rPr>
-              <a:t>Guerreros y leopardos de bronce de Benín.</a:t>
+              <a:t>Guerreros y leopardos de bronce de Benín (British Museum).</a:t>
             </a:r>
           </a:p>
           <a:p>
@@ -4612,7 +4706,7 @@
               </a:spcAft>
             </a:pPr>
             <a:r>
-              <a:rPr sz="1400" b="1">
+              <a:rPr sz="1350" b="1">
                 <a:solidFill>
                   <a:srgbClr val="C08A3E"/>
                 </a:solidFill>
@@ -4621,7 +4715,7 @@
               <a:t>—  </a:t>
             </a:r>
             <a:r>
-              <a:rPr sz="1400">
+              <a:rPr sz="1350">
                 <a:solidFill>
                   <a:srgbClr val="2A2724"/>
                 </a:solidFill>
@@ -4634,13 +4728,13 @@
       </p:sp>
       <p:sp>
         <p:nvSpPr>
-          <p:cNvPr id="10" name="Rectangle 9"/>
+          <p:cNvPr id="11" name="Rectangle 10"/>
           <p:cNvSpPr/>
           <p:nvPr/>
         </p:nvSpPr>
         <p:spPr>
           <a:xfrm>
-            <a:off x="6400800" y="2606040"/>
+            <a:off x="6400800" y="2670048"/>
             <a:ext cx="5257800" cy="502920"/>
           </a:xfrm>
           <a:prstGeom prst="rect">
@@ -4678,13 +4772,13 @@
       </p:sp>
       <p:sp>
         <p:nvSpPr>
-          <p:cNvPr id="11" name="TextBox 10"/>
+          <p:cNvPr id="12" name="TextBox 11"/>
           <p:cNvSpPr txBox="1"/>
           <p:nvPr/>
         </p:nvSpPr>
         <p:spPr>
           <a:xfrm>
-            <a:off x="6400800" y="2606040"/>
+            <a:off x="6400800" y="2670048"/>
             <a:ext cx="5257800" cy="502920"/>
           </a:xfrm>
           <a:prstGeom prst="rect">
@@ -4713,14 +4807,14 @@
       </p:sp>
       <p:sp>
         <p:nvSpPr>
-          <p:cNvPr id="12" name="TextBox 11"/>
+          <p:cNvPr id="13" name="TextBox 12"/>
           <p:cNvSpPr txBox="1"/>
           <p:nvPr/>
         </p:nvSpPr>
         <p:spPr>
           <a:xfrm>
-            <a:off x="6583680" y="3246120"/>
-            <a:ext cx="4937760" cy="2651760"/>
+            <a:off x="6583680" y="3310128"/>
+            <a:ext cx="4937760" cy="2560320"/>
           </a:xfrm>
           <a:prstGeom prst="rect">
             <a:avLst/>
@@ -4742,7 +4836,7 @@
               </a:spcAft>
             </a:pPr>
             <a:r>
-              <a:rPr sz="1400" b="1">
+              <a:rPr sz="1350" b="1">
                 <a:solidFill>
                   <a:srgbClr val="C08A3E"/>
                 </a:solidFill>
@@ -4751,7 +4845,7 @@
               <a:t>—  </a:t>
             </a:r>
             <a:r>
-              <a:rPr sz="1400">
+              <a:rPr sz="1350">
                 <a:solidFill>
                   <a:srgbClr val="2A2724"/>
                 </a:solidFill>
@@ -4770,7 +4864,7 @@
               </a:spcAft>
             </a:pPr>
             <a:r>
-              <a:rPr sz="1400" b="1">
+              <a:rPr sz="1350" b="1">
                 <a:solidFill>
                   <a:srgbClr val="C08A3E"/>
                 </a:solidFill>
@@ -4779,7 +4873,7 @@
               <a:t>—  </a:t>
             </a:r>
             <a:r>
-              <a:rPr sz="1400">
+              <a:rPr sz="1350">
                 <a:solidFill>
                   <a:srgbClr val="2A2724"/>
                 </a:solidFill>
@@ -4798,7 +4892,7 @@
               </a:spcAft>
             </a:pPr>
             <a:r>
-              <a:rPr sz="1400" b="1">
+              <a:rPr sz="1350" b="1">
                 <a:solidFill>
                   <a:srgbClr val="C08A3E"/>
                 </a:solidFill>
@@ -4807,27 +4901,27 @@
               <a:t>—  </a:t>
             </a:r>
             <a:r>
-              <a:rPr sz="1400">
+              <a:rPr sz="1350">
                 <a:solidFill>
                   <a:srgbClr val="2A2724"/>
                 </a:solidFill>
                 <a:latin typeface="Calibri"/>
               </a:rPr>
-              <a:t>Culto animista y a los ancestros; piezas sin contexto identificativo.</a:t>
-            </a:r>
-          </a:p>
-        </p:txBody>
-      </p:sp>
-      <p:sp>
-        <p:nvSpPr>
-          <p:cNvPr id="13" name="Rectangle 12"/>
+              <a:t>Culto animista y a los ancestros; piezas deliberadamente sin contexto.</a:t>
+            </a:r>
+          </a:p>
+        </p:txBody>
+      </p:sp>
+      <p:sp>
+        <p:nvSpPr>
+          <p:cNvPr id="14" name="Rectangle 13"/>
           <p:cNvSpPr/>
           <p:nvPr/>
         </p:nvSpPr>
         <p:spPr>
           <a:xfrm>
-            <a:off x="502920" y="6327648"/>
-            <a:ext cx="11183112" cy="17780"/>
+            <a:off x="502920" y="6355080"/>
+            <a:ext cx="11183112" cy="15240"/>
           </a:xfrm>
           <a:prstGeom prst="rect">
             <a:avLst/>
@@ -4864,14 +4958,14 @@
       </p:sp>
       <p:sp>
         <p:nvSpPr>
-          <p:cNvPr id="14" name="TextBox 13"/>
+          <p:cNvPr id="15" name="TextBox 14"/>
           <p:cNvSpPr txBox="1"/>
           <p:nvPr/>
         </p:nvSpPr>
         <p:spPr>
           <a:xfrm>
-            <a:off x="502920" y="6400800"/>
-            <a:ext cx="9601200" cy="365760"/>
+            <a:off x="502920" y="6428232"/>
+            <a:ext cx="9601200" cy="320040"/>
           </a:xfrm>
           <a:prstGeom prst="rect">
             <a:avLst/>
@@ -4899,14 +4993,14 @@
       </p:sp>
       <p:sp>
         <p:nvSpPr>
-          <p:cNvPr id="15" name="TextBox 14"/>
+          <p:cNvPr id="16" name="TextBox 15"/>
           <p:cNvSpPr txBox="1"/>
           <p:nvPr/>
         </p:nvSpPr>
         <p:spPr>
           <a:xfrm>
-            <a:off x="10515600" y="6400800"/>
-            <a:ext cx="1170432" cy="365760"/>
+            <a:off x="10515600" y="6428232"/>
+            <a:ext cx="1170432" cy="320040"/>
           </a:xfrm>
           <a:prstGeom prst="rect">
             <a:avLst/>
@@ -4960,14 +5054,53 @@
       <p:grpSpPr/>
       <p:sp>
         <p:nvSpPr>
-          <p:cNvPr id="2" name="Rectangle 1"/>
+          <p:cNvPr id="2" name="TextBox 1"/>
+          <p:cNvSpPr txBox="1"/>
+          <p:nvPr/>
+        </p:nvSpPr>
+        <p:spPr>
+          <a:xfrm>
+            <a:off x="4206240" y="219456"/>
+            <a:ext cx="7479792" cy="502920"/>
+          </a:xfrm>
+          <a:prstGeom prst="rect">
+            <a:avLst/>
+          </a:prstGeom>
+          <a:noFill/>
+        </p:spPr>
+        <p:txBody>
+          <a:bodyPr wrap="square" anchor="t" lIns="0" rIns="0" tIns="0" bIns="0">
+            <a:spAutoFit/>
+          </a:bodyPr>
+          <a:lstStyle/>
+          <a:p>
+            <a:pPr algn="r">
+              <a:lnSpc>
+                <a:spcPct val="100000"/>
+              </a:lnSpc>
+            </a:pPr>
+            <a:r>
+              <a:rPr sz="850" b="0" i="1">
+                <a:solidFill>
+                  <a:srgbClr val="6B645C"/>
+                </a:solidFill>
+                <a:latin typeface="Georgia"/>
+              </a:rPr>
+              <a:t>Más allá del documental de arte: ensayo fílmico y crítica anticolonial en Las estatuas también mueren</a:t>
+            </a:r>
+          </a:p>
+        </p:txBody>
+      </p:sp>
+      <p:sp>
+        <p:nvSpPr>
+          <p:cNvPr id="3" name="Rectangle 2"/>
           <p:cNvSpPr/>
           <p:nvPr/>
         </p:nvSpPr>
         <p:spPr>
           <a:xfrm>
-            <a:off x="502920" y="548640"/>
-            <a:ext cx="128016" cy="1051560"/>
+            <a:off x="502920" y="566928"/>
+            <a:ext cx="128016" cy="960120"/>
           </a:xfrm>
           <a:prstGeom prst="rect">
             <a:avLst/>
@@ -5004,14 +5137,14 @@
       </p:sp>
       <p:sp>
         <p:nvSpPr>
-          <p:cNvPr id="3" name="TextBox 2"/>
+          <p:cNvPr id="4" name="TextBox 3"/>
           <p:cNvSpPr txBox="1"/>
           <p:nvPr/>
         </p:nvSpPr>
         <p:spPr>
           <a:xfrm>
             <a:off x="777240" y="502920"/>
-            <a:ext cx="10698480" cy="320040"/>
+            <a:ext cx="6400800" cy="292608"/>
           </a:xfrm>
           <a:prstGeom prst="rect">
             <a:avLst/>
@@ -5032,21 +5165,21 @@
                 </a:solidFill>
                 <a:latin typeface="Calibri"/>
               </a:rPr>
-              <a:t>CONTENIDO · 6</a:t>
-            </a:r>
-          </a:p>
-        </p:txBody>
-      </p:sp>
-      <p:sp>
-        <p:nvSpPr>
-          <p:cNvPr id="4" name="TextBox 3"/>
+              <a:t>CONTENIDO · 3</a:t>
+            </a:r>
+          </a:p>
+        </p:txBody>
+      </p:sp>
+      <p:sp>
+        <p:nvSpPr>
+          <p:cNvPr id="5" name="TextBox 4"/>
           <p:cNvSpPr txBox="1"/>
           <p:nvPr/>
         </p:nvSpPr>
         <p:spPr>
           <a:xfrm>
             <a:off x="777240" y="786384"/>
-            <a:ext cx="10881360" cy="868680"/>
+            <a:ext cx="10881360" cy="822960"/>
           </a:xfrm>
           <a:prstGeom prst="rect">
             <a:avLst/>
@@ -5061,30 +5194,30 @@
           <a:p>
             <a:pPr algn="l">
               <a:lnSpc>
-                <a:spcPct val="100000"/>
+                <a:spcPct val="98000"/>
               </a:lnSpc>
             </a:pPr>
             <a:r>
-              <a:rPr sz="3000" b="0" i="0">
+              <a:rPr sz="2600" b="1" i="0">
                 <a:solidFill>
                   <a:srgbClr val="2A2724"/>
                 </a:solidFill>
                 <a:latin typeface="Georgia"/>
               </a:rPr>
-              <a:t>Forma fílmica: del documental de arte al ensayo</a:t>
-            </a:r>
-          </a:p>
-        </p:txBody>
-      </p:sp>
-      <p:sp>
-        <p:nvSpPr>
-          <p:cNvPr id="5" name="Rectangle 4"/>
+              <a:t>Forma fílmica y problemática de género</a:t>
+            </a:r>
+          </a:p>
+        </p:txBody>
+      </p:sp>
+      <p:sp>
+        <p:nvSpPr>
+          <p:cNvPr id="6" name="Rectangle 5"/>
           <p:cNvSpPr/>
           <p:nvPr/>
         </p:nvSpPr>
         <p:spPr>
           <a:xfrm>
-            <a:off x="777240" y="1828800"/>
+            <a:off x="777240" y="1737360"/>
             <a:ext cx="3520440" cy="2286000"/>
           </a:xfrm>
           <a:prstGeom prst="rect">
@@ -5124,13 +5257,13 @@
       </p:sp>
       <p:sp>
         <p:nvSpPr>
-          <p:cNvPr id="6" name="Rectangle 5"/>
+          <p:cNvPr id="7" name="Rectangle 6"/>
           <p:cNvSpPr/>
           <p:nvPr/>
         </p:nvSpPr>
         <p:spPr>
           <a:xfrm>
-            <a:off x="777240" y="1828800"/>
+            <a:off x="777240" y="1737360"/>
             <a:ext cx="3520440" cy="457200"/>
           </a:xfrm>
           <a:prstGeom prst="rect">
@@ -5168,13 +5301,13 @@
       </p:sp>
       <p:sp>
         <p:nvSpPr>
-          <p:cNvPr id="7" name="TextBox 6"/>
+          <p:cNvPr id="8" name="TextBox 7"/>
           <p:cNvSpPr txBox="1"/>
           <p:nvPr/>
         </p:nvSpPr>
         <p:spPr>
           <a:xfrm>
-            <a:off x="777240" y="1828800"/>
+            <a:off x="777240" y="1737360"/>
             <a:ext cx="3520440" cy="457200"/>
           </a:xfrm>
           <a:prstGeom prst="rect">
@@ -5203,13 +5336,13 @@
       </p:sp>
       <p:sp>
         <p:nvSpPr>
-          <p:cNvPr id="8" name="TextBox 7"/>
+          <p:cNvPr id="9" name="TextBox 8"/>
           <p:cNvSpPr txBox="1"/>
           <p:nvPr/>
         </p:nvSpPr>
         <p:spPr>
           <a:xfrm>
-            <a:off x="1005840" y="2468880"/>
+            <a:off x="1005840" y="2377440"/>
             <a:ext cx="3063240" cy="1554480"/>
           </a:xfrm>
           <a:prstGeom prst="rect">
@@ -5229,7 +5362,7 @@
               </a:lnSpc>
             </a:pPr>
             <a:r>
-              <a:rPr sz="1350" b="0" i="0">
+              <a:rPr sz="1300" b="0" i="0">
                 <a:solidFill>
                   <a:srgbClr val="2A2724"/>
                 </a:solidFill>
@@ -5242,13 +5375,13 @@
       </p:sp>
       <p:sp>
         <p:nvSpPr>
-          <p:cNvPr id="9" name="Rectangle 8"/>
+          <p:cNvPr id="10" name="Rectangle 9"/>
           <p:cNvSpPr/>
           <p:nvPr/>
         </p:nvSpPr>
         <p:spPr>
           <a:xfrm>
-            <a:off x="4480559" y="1828800"/>
+            <a:off x="4480559" y="1737360"/>
             <a:ext cx="3520440" cy="2286000"/>
           </a:xfrm>
           <a:prstGeom prst="rect">
@@ -5288,13 +5421,13 @@
       </p:sp>
       <p:sp>
         <p:nvSpPr>
-          <p:cNvPr id="10" name="Rectangle 9"/>
+          <p:cNvPr id="11" name="Rectangle 10"/>
           <p:cNvSpPr/>
           <p:nvPr/>
         </p:nvSpPr>
         <p:spPr>
           <a:xfrm>
-            <a:off x="4480559" y="1828800"/>
+            <a:off x="4480559" y="1737360"/>
             <a:ext cx="3520440" cy="457200"/>
           </a:xfrm>
           <a:prstGeom prst="rect">
@@ -5332,13 +5465,13 @@
       </p:sp>
       <p:sp>
         <p:nvSpPr>
-          <p:cNvPr id="11" name="TextBox 10"/>
+          <p:cNvPr id="12" name="TextBox 11"/>
           <p:cNvSpPr txBox="1"/>
           <p:nvPr/>
         </p:nvSpPr>
         <p:spPr>
           <a:xfrm>
-            <a:off x="4480559" y="1828800"/>
+            <a:off x="4480559" y="1737360"/>
             <a:ext cx="3520440" cy="457200"/>
           </a:xfrm>
           <a:prstGeom prst="rect">
@@ -5367,13 +5500,13 @@
       </p:sp>
       <p:sp>
         <p:nvSpPr>
-          <p:cNvPr id="12" name="TextBox 11"/>
+          <p:cNvPr id="13" name="TextBox 12"/>
           <p:cNvSpPr txBox="1"/>
           <p:nvPr/>
         </p:nvSpPr>
         <p:spPr>
           <a:xfrm>
-            <a:off x="4709159" y="2468880"/>
+            <a:off x="4709159" y="2377440"/>
             <a:ext cx="3063240" cy="1554480"/>
           </a:xfrm>
           <a:prstGeom prst="rect">
@@ -5393,7 +5526,7 @@
               </a:lnSpc>
             </a:pPr>
             <a:r>
-              <a:rPr sz="1350" b="0" i="0">
+              <a:rPr sz="1300" b="0" i="0">
                 <a:solidFill>
                   <a:srgbClr val="2A2724"/>
                 </a:solidFill>
@@ -5406,13 +5539,13 @@
       </p:sp>
       <p:sp>
         <p:nvSpPr>
-          <p:cNvPr id="13" name="Rectangle 12"/>
+          <p:cNvPr id="14" name="Rectangle 13"/>
           <p:cNvSpPr/>
           <p:nvPr/>
         </p:nvSpPr>
         <p:spPr>
           <a:xfrm>
-            <a:off x="8183879" y="1828800"/>
+            <a:off x="8183879" y="1737360"/>
             <a:ext cx="3520440" cy="2286000"/>
           </a:xfrm>
           <a:prstGeom prst="rect">
@@ -5452,13 +5585,13 @@
       </p:sp>
       <p:sp>
         <p:nvSpPr>
-          <p:cNvPr id="14" name="Rectangle 13"/>
+          <p:cNvPr id="15" name="Rectangle 14"/>
           <p:cNvSpPr/>
           <p:nvPr/>
         </p:nvSpPr>
         <p:spPr>
           <a:xfrm>
-            <a:off x="8183879" y="1828800"/>
+            <a:off x="8183879" y="1737360"/>
             <a:ext cx="3520440" cy="457200"/>
           </a:xfrm>
           <a:prstGeom prst="rect">
@@ -5496,13 +5629,13 @@
       </p:sp>
       <p:sp>
         <p:nvSpPr>
-          <p:cNvPr id="15" name="TextBox 14"/>
+          <p:cNvPr id="16" name="TextBox 15"/>
           <p:cNvSpPr txBox="1"/>
           <p:nvPr/>
         </p:nvSpPr>
         <p:spPr>
           <a:xfrm>
-            <a:off x="8183879" y="1828800"/>
+            <a:off x="8183879" y="1737360"/>
             <a:ext cx="3520440" cy="457200"/>
           </a:xfrm>
           <a:prstGeom prst="rect">
@@ -5531,13 +5664,13 @@
       </p:sp>
       <p:sp>
         <p:nvSpPr>
-          <p:cNvPr id="16" name="TextBox 15"/>
+          <p:cNvPr id="17" name="TextBox 16"/>
           <p:cNvSpPr txBox="1"/>
           <p:nvPr/>
         </p:nvSpPr>
         <p:spPr>
           <a:xfrm>
-            <a:off x="8412479" y="2468880"/>
+            <a:off x="8412479" y="2377440"/>
             <a:ext cx="3063240" cy="1554480"/>
           </a:xfrm>
           <a:prstGeom prst="rect">
@@ -5557,7 +5690,7 @@
               </a:lnSpc>
             </a:pPr>
             <a:r>
-              <a:rPr sz="1350" b="0" i="0">
+              <a:rPr sz="1300" b="0" i="0">
                 <a:solidFill>
                   <a:srgbClr val="2A2724"/>
                 </a:solidFill>
@@ -5570,14 +5703,14 @@
       </p:sp>
       <p:sp>
         <p:nvSpPr>
-          <p:cNvPr id="17" name="Rectangle 16"/>
+          <p:cNvPr id="18" name="Rectangle 17"/>
           <p:cNvSpPr/>
           <p:nvPr/>
         </p:nvSpPr>
         <p:spPr>
           <a:xfrm>
-            <a:off x="777240" y="4434840"/>
-            <a:ext cx="10881360" cy="1417320"/>
+            <a:off x="777240" y="4297680"/>
+            <a:ext cx="10881360" cy="1508760"/>
           </a:xfrm>
           <a:prstGeom prst="rect">
             <a:avLst/>
@@ -5614,14 +5747,14 @@
       </p:sp>
       <p:sp>
         <p:nvSpPr>
-          <p:cNvPr id="18" name="Rectangle 17"/>
+          <p:cNvPr id="19" name="Rectangle 18"/>
           <p:cNvSpPr/>
           <p:nvPr/>
         </p:nvSpPr>
         <p:spPr>
           <a:xfrm>
-            <a:off x="777240" y="4434840"/>
-            <a:ext cx="128016" cy="1417320"/>
+            <a:off x="777240" y="4297680"/>
+            <a:ext cx="128016" cy="1508760"/>
           </a:xfrm>
           <a:prstGeom prst="rect">
             <a:avLst/>
@@ -5658,14 +5791,14 @@
       </p:sp>
       <p:sp>
         <p:nvSpPr>
-          <p:cNvPr id="19" name="TextBox 18"/>
+          <p:cNvPr id="20" name="TextBox 19"/>
           <p:cNvSpPr txBox="1"/>
           <p:nvPr/>
         </p:nvSpPr>
         <p:spPr>
           <a:xfrm>
-            <a:off x="1097280" y="4572000"/>
-            <a:ext cx="10332720" cy="1188720"/>
+            <a:off x="1097280" y="4434840"/>
+            <a:ext cx="10332720" cy="1280160"/>
           </a:xfrm>
           <a:prstGeom prst="rect">
             <a:avLst/>
@@ -5696,7 +5829,7 @@
           <a:p>
             <a:pPr algn="l">
               <a:lnSpc>
-                <a:spcPct val="108000"/>
+                <a:spcPct val="110000"/>
               </a:lnSpc>
             </a:pPr>
             <a:r>
@@ -5706,21 +5839,21 @@
                 </a:solidFill>
                 <a:latin typeface="Calibri"/>
               </a:rPr>
-              <a:t>Aunque por su forma parezca un documental de arte, Resnais y Marker lo exceden: la Rive Gauche desarrolla el ciné-essai, que aborda con ironía y firmeza la problemática colonial y la mirada racista aún vigente.</a:t>
-            </a:r>
-          </a:p>
-        </p:txBody>
-      </p:sp>
-      <p:sp>
-        <p:nvSpPr>
-          <p:cNvPr id="20" name="Rectangle 19"/>
+              <a:t>Aunque por su forma parezca un documental de arte, Resnais y Marker lo exceden: la Rive Gauche desarrolla el ciné-essai, que aborda con ironía y firmeza la problemática colonial y la mirada racista aún imperante.</a:t>
+            </a:r>
+          </a:p>
+        </p:txBody>
+      </p:sp>
+      <p:sp>
+        <p:nvSpPr>
+          <p:cNvPr id="21" name="Rectangle 20"/>
           <p:cNvSpPr/>
           <p:nvPr/>
         </p:nvSpPr>
         <p:spPr>
           <a:xfrm>
-            <a:off x="502920" y="6327648"/>
-            <a:ext cx="11183112" cy="17780"/>
+            <a:off x="502920" y="6355080"/>
+            <a:ext cx="11183112" cy="15240"/>
           </a:xfrm>
           <a:prstGeom prst="rect">
             <a:avLst/>
@@ -5757,14 +5890,14 @@
       </p:sp>
       <p:sp>
         <p:nvSpPr>
-          <p:cNvPr id="21" name="TextBox 20"/>
+          <p:cNvPr id="22" name="TextBox 21"/>
           <p:cNvSpPr txBox="1"/>
           <p:nvPr/>
         </p:nvSpPr>
         <p:spPr>
           <a:xfrm>
-            <a:off x="502920" y="6400800"/>
-            <a:ext cx="9601200" cy="365760"/>
+            <a:off x="502920" y="6428232"/>
+            <a:ext cx="9601200" cy="320040"/>
           </a:xfrm>
           <a:prstGeom prst="rect">
             <a:avLst/>
@@ -5792,14 +5925,14 @@
       </p:sp>
       <p:sp>
         <p:nvSpPr>
-          <p:cNvPr id="22" name="TextBox 21"/>
+          <p:cNvPr id="23" name="TextBox 22"/>
           <p:cNvSpPr txBox="1"/>
           <p:nvPr/>
         </p:nvSpPr>
         <p:spPr>
           <a:xfrm>
-            <a:off x="10515600" y="6400800"/>
-            <a:ext cx="1170432" cy="365760"/>
+            <a:off x="10515600" y="6428232"/>
+            <a:ext cx="1170432" cy="320040"/>
           </a:xfrm>
           <a:prstGeom prst="rect">
             <a:avLst/>
@@ -5853,14 +5986,53 @@
       <p:grpSpPr/>
       <p:sp>
         <p:nvSpPr>
-          <p:cNvPr id="2" name="Rectangle 1"/>
+          <p:cNvPr id="2" name="TextBox 1"/>
+          <p:cNvSpPr txBox="1"/>
+          <p:nvPr/>
+        </p:nvSpPr>
+        <p:spPr>
+          <a:xfrm>
+            <a:off x="4206240" y="219456"/>
+            <a:ext cx="7479792" cy="502920"/>
+          </a:xfrm>
+          <a:prstGeom prst="rect">
+            <a:avLst/>
+          </a:prstGeom>
+          <a:noFill/>
+        </p:spPr>
+        <p:txBody>
+          <a:bodyPr wrap="square" anchor="t" lIns="0" rIns="0" tIns="0" bIns="0">
+            <a:spAutoFit/>
+          </a:bodyPr>
+          <a:lstStyle/>
+          <a:p>
+            <a:pPr algn="r">
+              <a:lnSpc>
+                <a:spcPct val="100000"/>
+              </a:lnSpc>
+            </a:pPr>
+            <a:r>
+              <a:rPr sz="850" b="0" i="1">
+                <a:solidFill>
+                  <a:srgbClr val="6B645C"/>
+                </a:solidFill>
+                <a:latin typeface="Georgia"/>
+              </a:rPr>
+              <a:t>Más allá del documental de arte: ensayo fílmico y crítica anticolonial en Las estatuas también mueren</a:t>
+            </a:r>
+          </a:p>
+        </p:txBody>
+      </p:sp>
+      <p:sp>
+        <p:nvSpPr>
+          <p:cNvPr id="3" name="Rectangle 2"/>
           <p:cNvSpPr/>
           <p:nvPr/>
         </p:nvSpPr>
         <p:spPr>
           <a:xfrm>
-            <a:off x="502920" y="548640"/>
-            <a:ext cx="128016" cy="1051560"/>
+            <a:off x="502920" y="566928"/>
+            <a:ext cx="128016" cy="960120"/>
           </a:xfrm>
           <a:prstGeom prst="rect">
             <a:avLst/>
@@ -5897,14 +6069,14 @@
       </p:sp>
       <p:sp>
         <p:nvSpPr>
-          <p:cNvPr id="3" name="TextBox 2"/>
+          <p:cNvPr id="4" name="TextBox 3"/>
           <p:cNvSpPr txBox="1"/>
           <p:nvPr/>
         </p:nvSpPr>
         <p:spPr>
           <a:xfrm>
             <a:off x="777240" y="502920"/>
-            <a:ext cx="10698480" cy="320040"/>
+            <a:ext cx="6400800" cy="292608"/>
           </a:xfrm>
           <a:prstGeom prst="rect">
             <a:avLst/>
@@ -5925,21 +6097,21 @@
                 </a:solidFill>
                 <a:latin typeface="Calibri"/>
               </a:rPr>
-              <a:t>CONCLUSIONES</a:t>
-            </a:r>
-          </a:p>
-        </p:txBody>
-      </p:sp>
-      <p:sp>
-        <p:nvSpPr>
-          <p:cNvPr id="4" name="TextBox 3"/>
+              <a:t>5</a:t>
+            </a:r>
+          </a:p>
+        </p:txBody>
+      </p:sp>
+      <p:sp>
+        <p:nvSpPr>
+          <p:cNvPr id="5" name="TextBox 4"/>
           <p:cNvSpPr txBox="1"/>
           <p:nvPr/>
         </p:nvSpPr>
         <p:spPr>
           <a:xfrm>
             <a:off x="777240" y="786384"/>
-            <a:ext cx="10881360" cy="868680"/>
+            <a:ext cx="10881360" cy="822960"/>
           </a:xfrm>
           <a:prstGeom prst="rect">
             <a:avLst/>
@@ -5954,11 +6126,11 @@
           <a:p>
             <a:pPr algn="l">
               <a:lnSpc>
-                <a:spcPct val="100000"/>
+                <a:spcPct val="98000"/>
               </a:lnSpc>
             </a:pPr>
             <a:r>
-              <a:rPr sz="3000" b="0" i="0">
+              <a:rPr sz="2700" b="1" i="0">
                 <a:solidFill>
                   <a:srgbClr val="2A2724"/>
                 </a:solidFill>
@@ -5971,14 +6143,14 @@
       </p:sp>
       <p:sp>
         <p:nvSpPr>
-          <p:cNvPr id="5" name="TextBox 4"/>
+          <p:cNvPr id="6" name="TextBox 5"/>
           <p:cNvSpPr txBox="1"/>
           <p:nvPr/>
         </p:nvSpPr>
         <p:spPr>
           <a:xfrm>
-            <a:off x="777240" y="1828800"/>
-            <a:ext cx="6583680" cy="4023360"/>
+            <a:off x="777240" y="1600200"/>
+            <a:ext cx="6583680" cy="4297680"/>
           </a:xfrm>
           <a:prstGeom prst="rect">
             <a:avLst/>
@@ -5996,11 +6168,11 @@
                 <a:spcPct val="105000"/>
               </a:lnSpc>
               <a:spcAft>
-                <a:spcPts val="1300"/>
+                <a:spcPts val="1200"/>
               </a:spcAft>
             </a:pPr>
             <a:r>
-              <a:rPr sz="1550" b="1">
+              <a:rPr sz="1500" b="1">
                 <a:solidFill>
                   <a:srgbClr val="C08A3E"/>
                 </a:solidFill>
@@ -6009,7 +6181,7 @@
               <a:t>—  </a:t>
             </a:r>
             <a:r>
-              <a:rPr sz="1550" b="1">
+              <a:rPr sz="1500" b="1">
                 <a:solidFill>
                   <a:srgbClr val="2A2724"/>
                 </a:solidFill>
@@ -6018,7 +6190,7 @@
               <a:t>Punto de inflexión: </a:t>
             </a:r>
             <a:r>
-              <a:rPr sz="1550">
+              <a:rPr sz="1500">
                 <a:solidFill>
                   <a:srgbClr val="2A2724"/>
                 </a:solidFill>
@@ -6033,11 +6205,11 @@
                 <a:spcPct val="105000"/>
               </a:lnSpc>
               <a:spcAft>
-                <a:spcPts val="1300"/>
+                <a:spcPts val="1200"/>
               </a:spcAft>
             </a:pPr>
             <a:r>
-              <a:rPr sz="1550" b="1">
+              <a:rPr sz="1500" b="1">
                 <a:solidFill>
                   <a:srgbClr val="C08A3E"/>
                 </a:solidFill>
@@ -6046,7 +6218,7 @@
               <a:t>—  </a:t>
             </a:r>
             <a:r>
-              <a:rPr sz="1550" b="1">
+              <a:rPr sz="1500" b="1">
                 <a:solidFill>
                   <a:srgbClr val="2A2724"/>
                 </a:solidFill>
@@ -6055,13 +6227,13 @@
               <a:t>Tratamiento ontológico: </a:t>
             </a:r>
             <a:r>
-              <a:rPr sz="1550">
+              <a:rPr sz="1500">
                 <a:solidFill>
                   <a:srgbClr val="2A2724"/>
                 </a:solidFill>
                 <a:latin typeface="Calibri"/>
               </a:rPr>
-              <a:t>frente al cine etnográfico-expositivo, da voz a las historias reprimidas tras cada pieza.</a:t>
+              <a:t>frente al cine etnográfico-expositivo (p. ej. Mangbetu, 1954), da voz a las historias reprimidas tras cada pieza.</a:t>
             </a:r>
           </a:p>
           <a:p>
@@ -6070,11 +6242,11 @@
                 <a:spcPct val="105000"/>
               </a:lnSpc>
               <a:spcAft>
-                <a:spcPts val="1300"/>
+                <a:spcPts val="1200"/>
               </a:spcAft>
             </a:pPr>
             <a:r>
-              <a:rPr sz="1550" b="1">
+              <a:rPr sz="1500" b="1">
                 <a:solidFill>
                   <a:srgbClr val="C08A3E"/>
                 </a:solidFill>
@@ -6083,7 +6255,7 @@
               <a:t>—  </a:t>
             </a:r>
             <a:r>
-              <a:rPr sz="1550" b="1">
+              <a:rPr sz="1500" b="1">
                 <a:solidFill>
                   <a:srgbClr val="2A2724"/>
                 </a:solidFill>
@@ -6092,13 +6264,13 @@
               <a:t>Ensayo fílmico-crítico: </a:t>
             </a:r>
             <a:r>
-              <a:rPr sz="1550">
+              <a:rPr sz="1500">
                 <a:solidFill>
                   <a:srgbClr val="2A2724"/>
                 </a:solidFill>
                 <a:latin typeface="Calibri"/>
               </a:rPr>
-              <a:t>se confirma la hipótesis; la obra se alinea con la ensayística más que con la exposición.</a:t>
+              <a:t>se confirma la hipótesis; la obra se alinea con la ensayística más que con la mera exposición.</a:t>
             </a:r>
           </a:p>
           <a:p>
@@ -6107,11 +6279,11 @@
                 <a:spcPct val="105000"/>
               </a:lnSpc>
               <a:spcAft>
-                <a:spcPts val="1300"/>
+                <a:spcPts val="1200"/>
               </a:spcAft>
             </a:pPr>
             <a:r>
-              <a:rPr sz="1550" b="1">
+              <a:rPr sz="1500" b="1">
                 <a:solidFill>
                   <a:srgbClr val="C08A3E"/>
                 </a:solidFill>
@@ -6120,7 +6292,7 @@
               <a:t>—  </a:t>
             </a:r>
             <a:r>
-              <a:rPr sz="1550" b="1">
+              <a:rPr sz="1500" b="1">
                 <a:solidFill>
                   <a:srgbClr val="2A2724"/>
                 </a:solidFill>
@@ -6129,7 +6301,7 @@
               <a:t>Preguntas abiertas: </a:t>
             </a:r>
             <a:r>
-              <a:rPr sz="1550">
+              <a:rPr sz="1500">
                 <a:solidFill>
                   <a:srgbClr val="2A2724"/>
                 </a:solidFill>
@@ -6142,14 +6314,14 @@
       </p:sp>
       <p:sp>
         <p:nvSpPr>
-          <p:cNvPr id="6" name="Rectangle 5"/>
+          <p:cNvPr id="7" name="Rectangle 6"/>
           <p:cNvSpPr/>
           <p:nvPr/>
         </p:nvSpPr>
         <p:spPr>
           <a:xfrm>
-            <a:off x="7589520" y="1828800"/>
-            <a:ext cx="4069080" cy="4069080"/>
+            <a:off x="7589520" y="1600200"/>
+            <a:ext cx="4069080" cy="4251960"/>
           </a:xfrm>
           <a:prstGeom prst="rect">
             <a:avLst/>
@@ -6186,13 +6358,13 @@
       </p:sp>
       <p:sp>
         <p:nvSpPr>
-          <p:cNvPr id="7" name="Rectangle 6"/>
+          <p:cNvPr id="8" name="Rectangle 7"/>
           <p:cNvSpPr/>
           <p:nvPr/>
         </p:nvSpPr>
         <p:spPr>
           <a:xfrm>
-            <a:off x="7589520" y="1828800"/>
+            <a:off x="7589520" y="1600200"/>
             <a:ext cx="4069080" cy="128016"/>
           </a:xfrm>
           <a:prstGeom prst="rect">
@@ -6230,14 +6402,14 @@
       </p:sp>
       <p:sp>
         <p:nvSpPr>
-          <p:cNvPr id="8" name="TextBox 7"/>
+          <p:cNvPr id="9" name="TextBox 8"/>
           <p:cNvSpPr txBox="1"/>
           <p:nvPr/>
         </p:nvSpPr>
         <p:spPr>
           <a:xfrm>
-            <a:off x="7909560" y="2240280"/>
-            <a:ext cx="3474720" cy="3474720"/>
+            <a:off x="7909560" y="2011680"/>
+            <a:ext cx="3474720" cy="3657600"/>
           </a:xfrm>
           <a:prstGeom prst="rect">
             <a:avLst/>
@@ -6252,7 +6424,7 @@
           <a:p>
             <a:pPr algn="l">
               <a:lnSpc>
-                <a:spcPct val="118000"/>
+                <a:spcPct val="120000"/>
               </a:lnSpc>
             </a:pPr>
             <a:r>
@@ -6269,14 +6441,14 @@
       </p:sp>
       <p:sp>
         <p:nvSpPr>
-          <p:cNvPr id="9" name="Rectangle 8"/>
+          <p:cNvPr id="10" name="Rectangle 9"/>
           <p:cNvSpPr/>
           <p:nvPr/>
         </p:nvSpPr>
         <p:spPr>
           <a:xfrm>
-            <a:off x="502920" y="6327648"/>
-            <a:ext cx="11183112" cy="17780"/>
+            <a:off x="502920" y="6355080"/>
+            <a:ext cx="11183112" cy="15240"/>
           </a:xfrm>
           <a:prstGeom prst="rect">
             <a:avLst/>
@@ -6313,14 +6485,14 @@
       </p:sp>
       <p:sp>
         <p:nvSpPr>
-          <p:cNvPr id="10" name="TextBox 9"/>
+          <p:cNvPr id="11" name="TextBox 10"/>
           <p:cNvSpPr txBox="1"/>
           <p:nvPr/>
         </p:nvSpPr>
         <p:spPr>
           <a:xfrm>
-            <a:off x="502920" y="6400800"/>
-            <a:ext cx="9601200" cy="365760"/>
+            <a:off x="502920" y="6428232"/>
+            <a:ext cx="9601200" cy="320040"/>
           </a:xfrm>
           <a:prstGeom prst="rect">
             <a:avLst/>
@@ -6348,14 +6520,14 @@
       </p:sp>
       <p:sp>
         <p:nvSpPr>
-          <p:cNvPr id="11" name="TextBox 10"/>
+          <p:cNvPr id="12" name="TextBox 11"/>
           <p:cNvSpPr txBox="1"/>
           <p:nvPr/>
         </p:nvSpPr>
         <p:spPr>
           <a:xfrm>
-            <a:off x="10515600" y="6400800"/>
-            <a:ext cx="1170432" cy="365760"/>
+            <a:off x="10515600" y="6428232"/>
+            <a:ext cx="1170432" cy="320040"/>
           </a:xfrm>
           <a:prstGeom prst="rect">
             <a:avLst/>
@@ -6409,14 +6581,53 @@
       <p:grpSpPr/>
       <p:sp>
         <p:nvSpPr>
-          <p:cNvPr id="2" name="Rectangle 1"/>
+          <p:cNvPr id="2" name="TextBox 1"/>
+          <p:cNvSpPr txBox="1"/>
+          <p:nvPr/>
+        </p:nvSpPr>
+        <p:spPr>
+          <a:xfrm>
+            <a:off x="4206240" y="219456"/>
+            <a:ext cx="7479792" cy="502920"/>
+          </a:xfrm>
+          <a:prstGeom prst="rect">
+            <a:avLst/>
+          </a:prstGeom>
+          <a:noFill/>
+        </p:spPr>
+        <p:txBody>
+          <a:bodyPr wrap="square" anchor="t" lIns="0" rIns="0" tIns="0" bIns="0">
+            <a:spAutoFit/>
+          </a:bodyPr>
+          <a:lstStyle/>
+          <a:p>
+            <a:pPr algn="r">
+              <a:lnSpc>
+                <a:spcPct val="100000"/>
+              </a:lnSpc>
+            </a:pPr>
+            <a:r>
+              <a:rPr sz="850" b="0" i="1">
+                <a:solidFill>
+                  <a:srgbClr val="6B645C"/>
+                </a:solidFill>
+                <a:latin typeface="Georgia"/>
+              </a:rPr>
+              <a:t>Más allá del documental de arte: ensayo fílmico y crítica anticolonial en Las estatuas también mueren</a:t>
+            </a:r>
+          </a:p>
+        </p:txBody>
+      </p:sp>
+      <p:sp>
+        <p:nvSpPr>
+          <p:cNvPr id="3" name="Rectangle 2"/>
           <p:cNvSpPr/>
           <p:nvPr/>
         </p:nvSpPr>
         <p:spPr>
           <a:xfrm>
-            <a:off x="502920" y="548640"/>
-            <a:ext cx="128016" cy="1051560"/>
+            <a:off x="502920" y="566928"/>
+            <a:ext cx="128016" cy="960120"/>
           </a:xfrm>
           <a:prstGeom prst="rect">
             <a:avLst/>
@@ -6453,14 +6664,14 @@
       </p:sp>
       <p:sp>
         <p:nvSpPr>
-          <p:cNvPr id="3" name="TextBox 2"/>
+          <p:cNvPr id="4" name="TextBox 3"/>
           <p:cNvSpPr txBox="1"/>
           <p:nvPr/>
         </p:nvSpPr>
         <p:spPr>
           <a:xfrm>
             <a:off x="777240" y="502920"/>
-            <a:ext cx="10698480" cy="320040"/>
+            <a:ext cx="6400800" cy="292608"/>
           </a:xfrm>
           <a:prstGeom prst="rect">
             <a:avLst/>
@@ -6481,21 +6692,21 @@
                 </a:solidFill>
                 <a:latin typeface="Calibri"/>
               </a:rPr>
-              <a:t>REFERENCIAS BIBLIOGRÁFICAS</a:t>
-            </a:r>
-          </a:p>
-        </p:txBody>
-      </p:sp>
-      <p:sp>
-        <p:nvSpPr>
-          <p:cNvPr id="4" name="TextBox 3"/>
+              <a:t>6</a:t>
+            </a:r>
+          </a:p>
+        </p:txBody>
+      </p:sp>
+      <p:sp>
+        <p:nvSpPr>
+          <p:cNvPr id="5" name="TextBox 4"/>
           <p:cNvSpPr txBox="1"/>
           <p:nvPr/>
         </p:nvSpPr>
         <p:spPr>
           <a:xfrm>
             <a:off x="777240" y="786384"/>
-            <a:ext cx="10881360" cy="868680"/>
+            <a:ext cx="10881360" cy="822960"/>
           </a:xfrm>
           <a:prstGeom prst="rect">
             <a:avLst/>
@@ -6510,31 +6721,31 @@
           <a:p>
             <a:pPr algn="l">
               <a:lnSpc>
-                <a:spcPct val="100000"/>
+                <a:spcPct val="98000"/>
               </a:lnSpc>
             </a:pPr>
             <a:r>
-              <a:rPr sz="3000" b="0" i="0">
+              <a:rPr sz="2600" b="1" i="0">
                 <a:solidFill>
                   <a:srgbClr val="2A2724"/>
                 </a:solidFill>
                 <a:latin typeface="Georgia"/>
               </a:rPr>
-              <a:t>Referencias (selección)</a:t>
-            </a:r>
-          </a:p>
-        </p:txBody>
-      </p:sp>
-      <p:sp>
-        <p:nvSpPr>
-          <p:cNvPr id="5" name="TextBox 4"/>
+              <a:t>Referencias bibliográficas y documentales</a:t>
+            </a:r>
+          </a:p>
+        </p:txBody>
+      </p:sp>
+      <p:sp>
+        <p:nvSpPr>
+          <p:cNvPr id="6" name="TextBox 5"/>
           <p:cNvSpPr txBox="1"/>
           <p:nvPr/>
         </p:nvSpPr>
         <p:spPr>
           <a:xfrm>
-            <a:off x="777240" y="1874519"/>
-            <a:ext cx="5303520" cy="4206240"/>
+            <a:off x="777240" y="1783080"/>
+            <a:ext cx="5349240" cy="4480560"/>
           </a:xfrm>
           <a:prstGeom prst="rect">
             <a:avLst/>
@@ -6552,11 +6763,11 @@
                 <a:spcPct val="100000"/>
               </a:lnSpc>
               <a:spcAft>
-                <a:spcPts val="1100"/>
+                <a:spcPts val="900"/>
               </a:spcAft>
             </a:pPr>
             <a:r>
-              <a:rPr b="1" sz="1200">
+              <a:rPr b="1" sz="1100">
                 <a:solidFill>
                   <a:srgbClr val="C08A3E"/>
                 </a:solidFill>
@@ -6564,13 +6775,13 @@
               <a:t>•  </a:t>
             </a:r>
             <a:r>
-              <a:rPr sz="1150">
+              <a:rPr sz="1050">
                 <a:solidFill>
                   <a:srgbClr val="2A2724"/>
                 </a:solidFill>
                 <a:latin typeface="Calibri"/>
               </a:rPr>
-              <a:t>Aliaga Cárceles, J. J. La revista Imágenes y la visión documental de NO-DO. Tesis doctoral, 2022.</a:t>
+              <a:t>Aliaga Cárceles, J. J. La revista Imágenes y la visión documental de NO-DO. Tesis doctoral, Univ. di Bologna, 2022.</a:t>
             </a:r>
           </a:p>
           <a:p>
@@ -6579,11 +6790,11 @@
                 <a:spcPct val="100000"/>
               </a:lnSpc>
               <a:spcAft>
-                <a:spcPts val="1100"/>
+                <a:spcPts val="900"/>
               </a:spcAft>
             </a:pPr>
             <a:r>
-              <a:rPr b="1" sz="1200">
+              <a:rPr b="1" sz="1100">
                 <a:solidFill>
                   <a:srgbClr val="C08A3E"/>
                 </a:solidFill>
@@ -6591,7 +6802,7 @@
               <a:t>•  </a:t>
             </a:r>
             <a:r>
-              <a:rPr sz="1150">
+              <a:rPr sz="1050">
                 <a:solidFill>
                   <a:srgbClr val="2A2724"/>
                 </a:solidFill>
@@ -6606,11 +6817,11 @@
                 <a:spcPct val="100000"/>
               </a:lnSpc>
               <a:spcAft>
-                <a:spcPts val="1100"/>
+                <a:spcPts val="900"/>
               </a:spcAft>
             </a:pPr>
             <a:r>
-              <a:rPr b="1" sz="1200">
+              <a:rPr b="1" sz="1100">
                 <a:solidFill>
                   <a:srgbClr val="C08A3E"/>
                 </a:solidFill>
@@ -6618,7 +6829,7 @@
               <a:t>•  </a:t>
             </a:r>
             <a:r>
-              <a:rPr sz="1150">
+              <a:rPr sz="1050">
                 <a:solidFill>
                   <a:srgbClr val="2A2724"/>
                 </a:solidFill>
@@ -6633,11 +6844,11 @@
                 <a:spcPct val="100000"/>
               </a:lnSpc>
               <a:spcAft>
-                <a:spcPts val="1100"/>
+                <a:spcPts val="900"/>
               </a:spcAft>
             </a:pPr>
             <a:r>
-              <a:rPr b="1" sz="1200">
+              <a:rPr b="1" sz="1100">
                 <a:solidFill>
                   <a:srgbClr val="C08A3E"/>
                 </a:solidFill>
@@ -6645,13 +6856,13 @@
               <a:t>•  </a:t>
             </a:r>
             <a:r>
-              <a:rPr sz="1150">
+              <a:rPr sz="1050">
                 <a:solidFill>
                   <a:srgbClr val="2A2724"/>
                 </a:solidFill>
                 <a:latin typeface="Calibri"/>
               </a:rPr>
-              <a:t>Fernández Cuenca, C. 30 años de documental de arte en España. Madrid: EOC, 1967.</a:t>
+              <a:t>Cortijo Talavera, A. «Los documentales restitutivos y poéticos de Alain Resnais». IC, 21, 2024.</a:t>
             </a:r>
           </a:p>
           <a:p>
@@ -6660,11 +6871,11 @@
                 <a:spcPct val="100000"/>
               </a:lnSpc>
               <a:spcAft>
-                <a:spcPts val="1100"/>
+                <a:spcPts val="900"/>
               </a:spcAft>
             </a:pPr>
             <a:r>
-              <a:rPr b="1" sz="1200">
+              <a:rPr b="1" sz="1100">
                 <a:solidFill>
                   <a:srgbClr val="C08A3E"/>
                 </a:solidFill>
@@ -6672,13 +6883,13 @@
               <a:t>•  </a:t>
             </a:r>
             <a:r>
-              <a:rPr sz="1150">
+              <a:rPr sz="1050">
                 <a:solidFill>
                   <a:srgbClr val="2A2724"/>
                 </a:solidFill>
                 <a:latin typeface="Calibri"/>
               </a:rPr>
-              <a:t>Forni, S. y Steiner, C. B. «The African Art Market as Ego-System». Critical Interventions, 2018.</a:t>
+              <a:t>Fernández Cuenca, C. 30 años de documental de arte en España. Madrid: EOC, 1967.</a:t>
             </a:r>
           </a:p>
           <a:p>
@@ -6687,11 +6898,11 @@
                 <a:spcPct val="100000"/>
               </a:lnSpc>
               <a:spcAft>
-                <a:spcPts val="1100"/>
+                <a:spcPts val="900"/>
               </a:spcAft>
             </a:pPr>
             <a:r>
-              <a:rPr b="1" sz="1200">
+              <a:rPr b="1" sz="1100">
                 <a:solidFill>
                   <a:srgbClr val="C08A3E"/>
                 </a:solidFill>
@@ -6699,49 +6910,26 @@
               <a:t>•  </a:t>
             </a:r>
             <a:r>
-              <a:rPr sz="1150">
+              <a:rPr sz="1050">
                 <a:solidFill>
                   <a:srgbClr val="2A2724"/>
                 </a:solidFill>
                 <a:latin typeface="Calibri"/>
               </a:rPr>
-              <a:t>García Fernández, G. «La piel bajo las máscaras. Arte, política y ensayo en Les Statues meurent aussi», 2010.</a:t>
-            </a:r>
-          </a:p>
-        </p:txBody>
-      </p:sp>
-      <p:sp>
-        <p:nvSpPr>
-          <p:cNvPr id="6" name="TextBox 5"/>
-          <p:cNvSpPr txBox="1"/>
-          <p:nvPr/>
-        </p:nvSpPr>
-        <p:spPr>
-          <a:xfrm>
-            <a:off x="6400800" y="1874519"/>
-            <a:ext cx="5303520" cy="4206240"/>
-          </a:xfrm>
-          <a:prstGeom prst="rect">
-            <a:avLst/>
-          </a:prstGeom>
-          <a:noFill/>
-        </p:spPr>
-        <p:txBody>
-          <a:bodyPr wrap="square">
-            <a:spAutoFit/>
-          </a:bodyPr>
-          <a:lstStyle/>
+              <a:t>Forni, S. y Steiner, C. B. «The African Art Market as Ego-System». Critical Interventions, 12, 2018.</a:t>
+            </a:r>
+          </a:p>
           <a:p>
             <a:pPr>
               <a:lnSpc>
                 <a:spcPct val="100000"/>
               </a:lnSpc>
               <a:spcAft>
-                <a:spcPts val="1100"/>
+                <a:spcPts val="900"/>
               </a:spcAft>
             </a:pPr>
             <a:r>
-              <a:rPr b="1" sz="1200">
+              <a:rPr b="1" sz="1100">
                 <a:solidFill>
                   <a:srgbClr val="C08A3E"/>
                 </a:solidFill>
@@ -6749,26 +6937,49 @@
               <a:t>•  </a:t>
             </a:r>
             <a:r>
-              <a:rPr sz="1150">
+              <a:rPr sz="1050">
                 <a:solidFill>
                   <a:srgbClr val="2A2724"/>
                 </a:solidFill>
                 <a:latin typeface="Calibri"/>
               </a:rPr>
-              <a:t>García Peydró, G. El cine sobre arte. Santander: Shangrila, 2019.</a:t>
-            </a:r>
-          </a:p>
+              <a:t>Fraiture, P.-Ph. «Statues Also Die». Journal of French and Francophone Philosophy, XXIV, 1, 2016.</a:t>
+            </a:r>
+          </a:p>
+        </p:txBody>
+      </p:sp>
+      <p:sp>
+        <p:nvSpPr>
+          <p:cNvPr id="7" name="TextBox 6"/>
+          <p:cNvSpPr txBox="1"/>
+          <p:nvPr/>
+        </p:nvSpPr>
+        <p:spPr>
+          <a:xfrm>
+            <a:off x="6400800" y="1783080"/>
+            <a:ext cx="5349240" cy="4480560"/>
+          </a:xfrm>
+          <a:prstGeom prst="rect">
+            <a:avLst/>
+          </a:prstGeom>
+          <a:noFill/>
+        </p:spPr>
+        <p:txBody>
+          <a:bodyPr wrap="square">
+            <a:spAutoFit/>
+          </a:bodyPr>
+          <a:lstStyle/>
           <a:p>
             <a:pPr>
               <a:lnSpc>
                 <a:spcPct val="100000"/>
               </a:lnSpc>
               <a:spcAft>
-                <a:spcPts val="1100"/>
+                <a:spcPts val="900"/>
               </a:spcAft>
             </a:pPr>
             <a:r>
-              <a:rPr b="1" sz="1200">
+              <a:rPr b="1" sz="1100">
                 <a:solidFill>
                   <a:srgbClr val="C08A3E"/>
                 </a:solidFill>
@@ -6776,13 +6987,13 @@
               <a:t>•  </a:t>
             </a:r>
             <a:r>
-              <a:rPr sz="1150">
+              <a:rPr sz="1050">
                 <a:solidFill>
                   <a:srgbClr val="2A2724"/>
                 </a:solidFill>
                 <a:latin typeface="Calibri"/>
               </a:rPr>
-              <a:t>Hamery, R. «Les films sur l'art d'Afrique noire (1945-1961)», en Le film sur l'art, 2015.</a:t>
+              <a:t>García Fernández, G. «La piel bajo las máscaras... Les Statues meurent aussi». Mirando a Clío, 2010.</a:t>
             </a:r>
           </a:p>
           <a:p>
@@ -6791,11 +7002,11 @@
                 <a:spcPct val="100000"/>
               </a:lnSpc>
               <a:spcAft>
-                <a:spcPts val="1100"/>
+                <a:spcPts val="900"/>
               </a:spcAft>
             </a:pPr>
             <a:r>
-              <a:rPr b="1" sz="1200">
+              <a:rPr b="1" sz="1100">
                 <a:solidFill>
                   <a:srgbClr val="C08A3E"/>
                 </a:solidFill>
@@ -6803,13 +7014,13 @@
               <a:t>•  </a:t>
             </a:r>
             <a:r>
-              <a:rPr sz="1150">
+              <a:rPr sz="1050">
                 <a:solidFill>
                   <a:srgbClr val="2A2724"/>
                 </a:solidFill>
                 <a:latin typeface="Calibri"/>
               </a:rPr>
-              <a:t>Lupton, C. Chris Marker, memories of the future. Londres: Reaktion, 2005.</a:t>
+              <a:t>García Peydró, G. El cine sobre arte. Santander: Shangrila, 2019.</a:t>
             </a:r>
           </a:p>
           <a:p>
@@ -6818,11 +7029,11 @@
                 <a:spcPct val="100000"/>
               </a:lnSpc>
               <a:spcAft>
-                <a:spcPts val="1100"/>
+                <a:spcPts val="900"/>
               </a:spcAft>
             </a:pPr>
             <a:r>
-              <a:rPr b="1" sz="1200">
+              <a:rPr b="1" sz="1100">
                 <a:solidFill>
                   <a:srgbClr val="C08A3E"/>
                 </a:solidFill>
@@ -6830,13 +7041,13 @@
               <a:t>•  </a:t>
             </a:r>
             <a:r>
-              <a:rPr sz="1150">
+              <a:rPr sz="1050">
                 <a:solidFill>
                   <a:srgbClr val="2A2724"/>
                 </a:solidFill>
                 <a:latin typeface="Calibri"/>
               </a:rPr>
-              <a:t>Sarr, F. y Savoy, B. The Restitution of African Cultural Heritage. París, 2018.</a:t>
+              <a:t>Hamery, R. «Les films sur l'art d'Afrique noire (1945-1961)», en Le film sur l'art. Rennes: PUR, 2015.</a:t>
             </a:r>
           </a:p>
           <a:p>
@@ -6845,11 +7056,11 @@
                 <a:spcPct val="100000"/>
               </a:lnSpc>
               <a:spcAft>
-                <a:spcPts val="1100"/>
+                <a:spcPts val="900"/>
               </a:spcAft>
             </a:pPr>
             <a:r>
-              <a:rPr b="1" sz="1200">
+              <a:rPr b="1" sz="1100">
                 <a:solidFill>
                   <a:srgbClr val="C08A3E"/>
                 </a:solidFill>
@@ -6857,13 +7068,13 @@
               <a:t>•  </a:t>
             </a:r>
             <a:r>
-              <a:rPr sz="1150">
+              <a:rPr sz="1050">
                 <a:solidFill>
                   <a:srgbClr val="2A2724"/>
                 </a:solidFill>
                 <a:latin typeface="Calibri"/>
               </a:rPr>
-              <a:t>Schäuble, M. «The Adventure of the Real. Jean Rouch...». Zeitschrift für Ethnologie, 2011.</a:t>
+              <a:t>Lupton, C. Chris Marker, memories of the future. Londres: Reaktion Books, 2005.</a:t>
             </a:r>
           </a:p>
           <a:p>
@@ -6872,11 +7083,11 @@
                 <a:spcPct val="100000"/>
               </a:lnSpc>
               <a:spcAft>
-                <a:spcPts val="1100"/>
+                <a:spcPts val="900"/>
               </a:spcAft>
             </a:pPr>
             <a:r>
-              <a:rPr b="1" sz="1200">
+              <a:rPr b="1" sz="1100">
                 <a:solidFill>
                   <a:srgbClr val="C08A3E"/>
                 </a:solidFill>
@@ -6884,12 +7095,66 @@
               <a:t>•  </a:t>
             </a:r>
             <a:r>
-              <a:rPr sz="1150">
+              <a:rPr sz="1050">
                 <a:solidFill>
                   <a:srgbClr val="2A2724"/>
                 </a:solidFill>
                 <a:latin typeface="Calibri"/>
               </a:rPr>
+              <a:t>Sarr, F. y Savoy, B. The Restitution of African Cultural Heritage. París, 2018.</a:t>
+            </a:r>
+          </a:p>
+          <a:p>
+            <a:pPr>
+              <a:lnSpc>
+                <a:spcPct val="100000"/>
+              </a:lnSpc>
+              <a:spcAft>
+                <a:spcPts val="900"/>
+              </a:spcAft>
+            </a:pPr>
+            <a:r>
+              <a:rPr b="1" sz="1100">
+                <a:solidFill>
+                  <a:srgbClr val="C08A3E"/>
+                </a:solidFill>
+              </a:rPr>
+              <a:t>•  </a:t>
+            </a:r>
+            <a:r>
+              <a:rPr sz="1050">
+                <a:solidFill>
+                  <a:srgbClr val="2A2724"/>
+                </a:solidFill>
+                <a:latin typeface="Calibri"/>
+              </a:rPr>
+              <a:t>Schäuble, M. «The Adventure of the Real. Jean Rouch...». Zeitschrift für Ethnologie, 136, 2011.</a:t>
+            </a:r>
+          </a:p>
+          <a:p>
+            <a:pPr>
+              <a:lnSpc>
+                <a:spcPct val="100000"/>
+              </a:lnSpc>
+              <a:spcAft>
+                <a:spcPts val="900"/>
+              </a:spcAft>
+            </a:pPr>
+            <a:r>
+              <a:rPr b="1" sz="1100">
+                <a:solidFill>
+                  <a:srgbClr val="C08A3E"/>
+                </a:solidFill>
+              </a:rPr>
+              <a:t>•  </a:t>
+            </a:r>
+            <a:r>
+              <a:rPr sz="1050">
+                <a:solidFill>
+                  <a:srgbClr val="2A2724"/>
+                </a:solidFill>
+                <a:latin typeface="Calibri"/>
+              </a:rPr>
               <a:t>Robert, V., Le Forestier, L. y Albera, F. Le film sur l'art. Rennes: PUR, 2015.</a:t>
             </a:r>
           </a:p>
@@ -6897,14 +7162,14 @@
       </p:sp>
       <p:sp>
         <p:nvSpPr>
-          <p:cNvPr id="7" name="Rectangle 6"/>
+          <p:cNvPr id="8" name="Rectangle 7"/>
           <p:cNvSpPr/>
           <p:nvPr/>
         </p:nvSpPr>
         <p:spPr>
           <a:xfrm>
-            <a:off x="502920" y="6327648"/>
-            <a:ext cx="11183112" cy="17780"/>
+            <a:off x="502920" y="6355080"/>
+            <a:ext cx="11183112" cy="15240"/>
           </a:xfrm>
           <a:prstGeom prst="rect">
             <a:avLst/>
@@ -6941,14 +7206,14 @@
       </p:sp>
       <p:sp>
         <p:nvSpPr>
-          <p:cNvPr id="8" name="TextBox 7"/>
+          <p:cNvPr id="9" name="TextBox 8"/>
           <p:cNvSpPr txBox="1"/>
           <p:nvPr/>
         </p:nvSpPr>
         <p:spPr>
           <a:xfrm>
-            <a:off x="502920" y="6400800"/>
-            <a:ext cx="9601200" cy="365760"/>
+            <a:off x="502920" y="6428232"/>
+            <a:ext cx="9601200" cy="320040"/>
           </a:xfrm>
           <a:prstGeom prst="rect">
             <a:avLst/>
@@ -6976,14 +7241,14 @@
       </p:sp>
       <p:sp>
         <p:nvSpPr>
-          <p:cNvPr id="9" name="TextBox 8"/>
+          <p:cNvPr id="10" name="TextBox 9"/>
           <p:cNvSpPr txBox="1"/>
           <p:nvPr/>
         </p:nvSpPr>
         <p:spPr>
           <a:xfrm>
-            <a:off x="10515600" y="6400800"/>
-            <a:ext cx="1170432" cy="365760"/>
+            <a:off x="10515600" y="6428232"/>
+            <a:ext cx="1170432" cy="320040"/>
           </a:xfrm>
           <a:prstGeom prst="rect">
             <a:avLst/>
@@ -7131,7 +7396,7 @@
         </p:nvSpPr>
         <p:spPr>
           <a:xfrm>
-            <a:off x="914400" y="2468880"/>
+            <a:off x="914400" y="2423160"/>
             <a:ext cx="10332720" cy="1097280"/>
           </a:xfrm>
           <a:prstGeom prst="rect">
@@ -7166,7 +7431,7 @@
         </p:nvSpPr>
         <p:spPr>
           <a:xfrm>
-            <a:off x="5175504" y="3703320"/>
+            <a:off x="5175504" y="3657600"/>
             <a:ext cx="1828800" cy="31750"/>
           </a:xfrm>
           <a:prstGeom prst="rect">
@@ -7210,8 +7475,8 @@
         </p:nvSpPr>
         <p:spPr>
           <a:xfrm>
-            <a:off x="914400" y="3931920"/>
-            <a:ext cx="10332720" cy="1097280"/>
+            <a:off x="914400" y="3886200"/>
+            <a:ext cx="10332720" cy="1371600"/>
           </a:xfrm>
           <a:prstGeom prst="rect">
             <a:avLst/>
@@ -7244,6 +7509,9 @@
               <a:lnSpc>
                 <a:spcPct val="110000"/>
               </a:lnSpc>
+              <a:spcAft>
+                <a:spcPts val="600"/>
+              </a:spcAft>
             </a:pPr>
             <a:r>
               <a:rPr sz="1300" b="0" i="1">
@@ -7256,11 +7524,7 @@
             </a:r>
           </a:p>
           <a:p>
-            <a:pPr algn="ctr">
-              <a:spcBef>
-                <a:spcPts val="600"/>
-              </a:spcBef>
-            </a:pPr>
+            <a:pPr algn="ctr"/>
             <a:r>
               <a:rPr sz="1100" b="0" i="0">
                 <a:solidFill>
@@ -7301,14 +7565,53 @@
       <p:grpSpPr/>
       <p:sp>
         <p:nvSpPr>
-          <p:cNvPr id="2" name="Rectangle 1"/>
+          <p:cNvPr id="2" name="TextBox 1"/>
+          <p:cNvSpPr txBox="1"/>
+          <p:nvPr/>
+        </p:nvSpPr>
+        <p:spPr>
+          <a:xfrm>
+            <a:off x="4206240" y="219456"/>
+            <a:ext cx="7479792" cy="502920"/>
+          </a:xfrm>
+          <a:prstGeom prst="rect">
+            <a:avLst/>
+          </a:prstGeom>
+          <a:noFill/>
+        </p:spPr>
+        <p:txBody>
+          <a:bodyPr wrap="square" anchor="t" lIns="0" rIns="0" tIns="0" bIns="0">
+            <a:spAutoFit/>
+          </a:bodyPr>
+          <a:lstStyle/>
+          <a:p>
+            <a:pPr algn="r">
+              <a:lnSpc>
+                <a:spcPct val="100000"/>
+              </a:lnSpc>
+            </a:pPr>
+            <a:r>
+              <a:rPr sz="850" b="0" i="1">
+                <a:solidFill>
+                  <a:srgbClr val="6B645C"/>
+                </a:solidFill>
+                <a:latin typeface="Georgia"/>
+              </a:rPr>
+              <a:t>Más allá del documental de arte: ensayo fílmico y crítica anticolonial en Las estatuas también mueren</a:t>
+            </a:r>
+          </a:p>
+        </p:txBody>
+      </p:sp>
+      <p:sp>
+        <p:nvSpPr>
+          <p:cNvPr id="3" name="Rectangle 2"/>
           <p:cNvSpPr/>
           <p:nvPr/>
         </p:nvSpPr>
         <p:spPr>
           <a:xfrm>
-            <a:off x="502920" y="548640"/>
-            <a:ext cx="128016" cy="1051560"/>
+            <a:off x="502920" y="566928"/>
+            <a:ext cx="128016" cy="960120"/>
           </a:xfrm>
           <a:prstGeom prst="rect">
             <a:avLst/>
@@ -7345,14 +7648,14 @@
       </p:sp>
       <p:sp>
         <p:nvSpPr>
-          <p:cNvPr id="3" name="TextBox 2"/>
+          <p:cNvPr id="4" name="TextBox 3"/>
           <p:cNvSpPr txBox="1"/>
           <p:nvPr/>
         </p:nvSpPr>
         <p:spPr>
           <a:xfrm>
-            <a:off x="777240" y="502920"/>
-            <a:ext cx="10698480" cy="320040"/>
+            <a:off x="777240" y="530352"/>
+            <a:ext cx="10881360" cy="822960"/>
           </a:xfrm>
           <a:prstGeom prst="rect">
             <a:avLst/>
@@ -7365,48 +7668,13 @@
           </a:bodyPr>
           <a:lstStyle/>
           <a:p>
-            <a:pPr algn="l"/>
-            <a:r>
-              <a:rPr sz="1200" b="1" i="0">
-                <a:solidFill>
-                  <a:srgbClr val="7A5236"/>
-                </a:solidFill>
-                <a:latin typeface="Calibri"/>
-              </a:rPr>
-              <a:t>ESTRUCTURA DE LA PRESENTACIÓN</a:t>
-            </a:r>
-          </a:p>
-        </p:txBody>
-      </p:sp>
-      <p:sp>
-        <p:nvSpPr>
-          <p:cNvPr id="4" name="TextBox 3"/>
-          <p:cNvSpPr txBox="1"/>
-          <p:nvPr/>
-        </p:nvSpPr>
-        <p:spPr>
-          <a:xfrm>
-            <a:off x="777240" y="786384"/>
-            <a:ext cx="10881360" cy="868680"/>
-          </a:xfrm>
-          <a:prstGeom prst="rect">
-            <a:avLst/>
-          </a:prstGeom>
-          <a:noFill/>
-        </p:spPr>
-        <p:txBody>
-          <a:bodyPr wrap="square" anchor="t" lIns="0" rIns="0" tIns="0" bIns="0">
-            <a:spAutoFit/>
-          </a:bodyPr>
-          <a:lstStyle/>
-          <a:p>
             <a:pPr algn="l">
               <a:lnSpc>
-                <a:spcPct val="100000"/>
+                <a:spcPct val="98000"/>
               </a:lnSpc>
             </a:pPr>
             <a:r>
-              <a:rPr sz="3000" b="0" i="0">
+              <a:rPr sz="2700" b="1" i="0">
                 <a:solidFill>
                   <a:srgbClr val="2A2724"/>
                 </a:solidFill>
@@ -7425,8 +7693,8 @@
         </p:nvSpPr>
         <p:spPr>
           <a:xfrm>
-            <a:off x="777240" y="2057400"/>
-            <a:ext cx="5212080" cy="3840480"/>
+            <a:off x="1005840" y="1691640"/>
+            <a:ext cx="10058400" cy="4572000"/>
           </a:xfrm>
           <a:prstGeom prst="rect">
             <a:avLst/>
@@ -7440,239 +7708,253 @@
           <a:lstStyle/>
           <a:p>
             <a:pPr>
+              <a:spcBef>
+                <a:spcPts val="0"/>
+              </a:spcBef>
               <a:spcAft>
-                <a:spcPts val="2000"/>
+                <a:spcPts val="1300"/>
               </a:spcAft>
             </a:pPr>
             <a:r>
-              <a:rPr sz="2200" b="1">
+              <a:rPr sz="1700" b="1">
                 <a:solidFill>
                   <a:srgbClr val="C08A3E"/>
                 </a:solidFill>
-                <a:latin typeface="Georgia"/>
-              </a:rPr>
-              <a:t>1.  </a:t>
-            </a:r>
-            <a:r>
-              <a:rPr sz="1800">
+              </a:rPr>
+              <a:t>▪  </a:t>
+            </a:r>
+            <a:r>
+              <a:rPr sz="1900" b="1">
                 <a:solidFill>
                   <a:srgbClr val="2A2724"/>
                 </a:solidFill>
                 <a:latin typeface="Calibri"/>
               </a:rPr>
-              <a:t>Introducción, justificación e hipótesis</a:t>
+              <a:t>INTRODUCCIÓN</a:t>
             </a:r>
           </a:p>
           <a:p>
             <a:pPr>
+              <a:spcBef>
+                <a:spcPts val="0"/>
+              </a:spcBef>
               <a:spcAft>
-                <a:spcPts val="2000"/>
+                <a:spcPts val="1300"/>
               </a:spcAft>
             </a:pPr>
             <a:r>
-              <a:rPr sz="2200" b="1">
+              <a:rPr sz="1700" b="1">
                 <a:solidFill>
                   <a:srgbClr val="C08A3E"/>
                 </a:solidFill>
-                <a:latin typeface="Georgia"/>
-              </a:rPr>
-              <a:t>2.  </a:t>
-            </a:r>
-            <a:r>
-              <a:rPr sz="1800">
+              </a:rPr>
+              <a:t>▪  </a:t>
+            </a:r>
+            <a:r>
+              <a:rPr sz="1900" b="1">
                 <a:solidFill>
                   <a:srgbClr val="2A2724"/>
                 </a:solidFill>
                 <a:latin typeface="Calibri"/>
               </a:rPr>
-              <a:t>Estado de la cuestión</a:t>
+              <a:t>ESTADO DE LA CUESTIÓN Y JUSTIFICACIÓN</a:t>
             </a:r>
           </a:p>
           <a:p>
             <a:pPr>
+              <a:spcBef>
+                <a:spcPts val="0"/>
+              </a:spcBef>
               <a:spcAft>
-                <a:spcPts val="2000"/>
+                <a:spcPts val="1300"/>
               </a:spcAft>
             </a:pPr>
             <a:r>
-              <a:rPr sz="2200" b="1">
+              <a:rPr sz="1700" b="1">
                 <a:solidFill>
                   <a:srgbClr val="C08A3E"/>
                 </a:solidFill>
-                <a:latin typeface="Georgia"/>
-              </a:rPr>
-              <a:t>3.  </a:t>
-            </a:r>
-            <a:r>
-              <a:rPr sz="1800">
+              </a:rPr>
+              <a:t>▪  </a:t>
+            </a:r>
+            <a:r>
+              <a:rPr sz="1900" b="1">
                 <a:solidFill>
                   <a:srgbClr val="2A2724"/>
                 </a:solidFill>
                 <a:latin typeface="Calibri"/>
               </a:rPr>
-              <a:t>Objetivos</a:t>
+              <a:t>OBJETIVOS</a:t>
             </a:r>
           </a:p>
           <a:p>
             <a:pPr>
+              <a:spcBef>
+                <a:spcPts val="0"/>
+              </a:spcBef>
               <a:spcAft>
-                <a:spcPts val="2000"/>
+                <a:spcPts val="1300"/>
               </a:spcAft>
             </a:pPr>
             <a:r>
-              <a:rPr sz="2200" b="1">
+              <a:rPr sz="1700" b="1">
                 <a:solidFill>
                   <a:srgbClr val="C08A3E"/>
                 </a:solidFill>
-                <a:latin typeface="Georgia"/>
-              </a:rPr>
-              <a:t>4.  </a:t>
-            </a:r>
-            <a:r>
-              <a:rPr sz="1800">
+              </a:rPr>
+              <a:t>▪  </a:t>
+            </a:r>
+            <a:r>
+              <a:rPr sz="1900" b="1">
                 <a:solidFill>
                   <a:srgbClr val="2A2724"/>
                 </a:solidFill>
                 <a:latin typeface="Calibri"/>
               </a:rPr>
-              <a:t>Metodología y fuentes</a:t>
-            </a:r>
-          </a:p>
-        </p:txBody>
-      </p:sp>
-      <p:sp>
-        <p:nvSpPr>
-          <p:cNvPr id="6" name="TextBox 5"/>
-          <p:cNvSpPr txBox="1"/>
-          <p:nvPr/>
-        </p:nvSpPr>
-        <p:spPr>
-          <a:xfrm>
-            <a:off x="6400800" y="2057400"/>
-            <a:ext cx="5212080" cy="3840480"/>
-          </a:xfrm>
-          <a:prstGeom prst="rect">
-            <a:avLst/>
-          </a:prstGeom>
-          <a:noFill/>
-        </p:spPr>
-        <p:txBody>
-          <a:bodyPr wrap="square">
-            <a:spAutoFit/>
-          </a:bodyPr>
-          <a:lstStyle/>
+              <a:t>METODOLOGÍA APLICADA</a:t>
+            </a:r>
+          </a:p>
           <a:p>
             <a:pPr>
+              <a:spcBef>
+                <a:spcPts val="0"/>
+              </a:spcBef>
               <a:spcAft>
-                <a:spcPts val="2000"/>
+                <a:spcPts val="600"/>
               </a:spcAft>
             </a:pPr>
             <a:r>
-              <a:rPr sz="2200" b="1">
+              <a:rPr sz="1700" b="1">
                 <a:solidFill>
                   <a:srgbClr val="C08A3E"/>
                 </a:solidFill>
-                <a:latin typeface="Georgia"/>
-              </a:rPr>
-              <a:t>5.  </a:t>
-            </a:r>
-            <a:r>
-              <a:rPr sz="1800">
+              </a:rPr>
+              <a:t>▪  </a:t>
+            </a:r>
+            <a:r>
+              <a:rPr sz="1900" b="1">
                 <a:solidFill>
                   <a:srgbClr val="2A2724"/>
                 </a:solidFill>
                 <a:latin typeface="Calibri"/>
               </a:rPr>
-              <a:t>El documental de arte y su institucionalización</a:t>
-            </a:r>
-          </a:p>
-          <a:p>
-            <a:pPr>
+              <a:t>CONTENIDO</a:t>
+            </a:r>
+          </a:p>
+          <a:p>
+            <a:pPr lvl="1">
               <a:spcAft>
-                <a:spcPts val="2000"/>
+                <a:spcPts val="300"/>
               </a:spcAft>
             </a:pPr>
             <a:r>
-              <a:rPr sz="2200" b="1">
-                <a:solidFill>
-                  <a:srgbClr val="C08A3E"/>
-                </a:solidFill>
-                <a:latin typeface="Georgia"/>
-              </a:rPr>
-              <a:t>6.  </a:t>
-            </a:r>
-            <a:r>
-              <a:rPr sz="1800">
-                <a:solidFill>
-                  <a:srgbClr val="2A2724"/>
-                </a:solidFill>
-                <a:latin typeface="Calibri"/>
-              </a:rPr>
-              <a:t>Colonialismo, museos y mercado del arte africano</a:t>
-            </a:r>
-          </a:p>
-          <a:p>
-            <a:pPr>
+              <a:rPr sz="1500">
+                <a:solidFill>
+                  <a:srgbClr val="6B645C"/>
+                </a:solidFill>
+                <a:latin typeface="Calibri"/>
+              </a:rPr>
+              <a:t>        1.  El documental de arte y su institucionalización</a:t>
+            </a:r>
+          </a:p>
+          <a:p>
+            <a:pPr lvl="1">
               <a:spcAft>
-                <a:spcPts val="2000"/>
+                <a:spcPts val="300"/>
               </a:spcAft>
             </a:pPr>
             <a:r>
-              <a:rPr sz="2200" b="1">
-                <a:solidFill>
-                  <a:srgbClr val="C08A3E"/>
-                </a:solidFill>
-                <a:latin typeface="Georgia"/>
-              </a:rPr>
-              <a:t>7.  </a:t>
-            </a:r>
-            <a:r>
-              <a:rPr sz="1800">
-                <a:solidFill>
-                  <a:srgbClr val="2A2724"/>
-                </a:solidFill>
-                <a:latin typeface="Calibri"/>
-              </a:rPr>
-              <a:t>Las estatuas también mueren (1953)</a:t>
-            </a:r>
-          </a:p>
-          <a:p>
-            <a:pPr>
+              <a:rPr sz="1500">
+                <a:solidFill>
+                  <a:srgbClr val="6B645C"/>
+                </a:solidFill>
+                <a:latin typeface="Calibri"/>
+              </a:rPr>
+              <a:t>        2.  El colonialismo africano y su manifiesto en el arte</a:t>
+            </a:r>
+          </a:p>
+          <a:p>
+            <a:pPr lvl="1">
               <a:spcAft>
-                <a:spcPts val="2000"/>
+                <a:spcPts val="300"/>
               </a:spcAft>
             </a:pPr>
             <a:r>
-              <a:rPr sz="2200" b="1">
+              <a:rPr sz="1500">
+                <a:solidFill>
+                  <a:srgbClr val="6B645C"/>
+                </a:solidFill>
+                <a:latin typeface="Calibri"/>
+              </a:rPr>
+              <a:t>        3.  Las estatuas también mueren (1953)</a:t>
+            </a:r>
+          </a:p>
+          <a:p>
+            <a:pPr>
+              <a:spcBef>
+                <a:spcPts val="0"/>
+              </a:spcBef>
+              <a:spcAft>
+                <a:spcPts val="1300"/>
+              </a:spcAft>
+            </a:pPr>
+            <a:r>
+              <a:rPr sz="1700" b="1">
                 <a:solidFill>
                   <a:srgbClr val="C08A3E"/>
                 </a:solidFill>
-                <a:latin typeface="Georgia"/>
-              </a:rPr>
-              <a:t>8.  </a:t>
-            </a:r>
-            <a:r>
-              <a:rPr sz="1800">
+              </a:rPr>
+              <a:t>▪  </a:t>
+            </a:r>
+            <a:r>
+              <a:rPr sz="1900" b="1">
                 <a:solidFill>
                   <a:srgbClr val="2A2724"/>
                 </a:solidFill>
                 <a:latin typeface="Calibri"/>
               </a:rPr>
-              <a:t>Conclusiones</a:t>
-            </a:r>
-          </a:p>
-        </p:txBody>
-      </p:sp>
-      <p:sp>
-        <p:nvSpPr>
-          <p:cNvPr id="7" name="Rectangle 6"/>
+              <a:t>CONCLUSIONES</a:t>
+            </a:r>
+          </a:p>
+          <a:p>
+            <a:pPr>
+              <a:spcBef>
+                <a:spcPts val="0"/>
+              </a:spcBef>
+              <a:spcAft>
+                <a:spcPts val="1300"/>
+              </a:spcAft>
+            </a:pPr>
+            <a:r>
+              <a:rPr sz="1700" b="1">
+                <a:solidFill>
+                  <a:srgbClr val="C08A3E"/>
+                </a:solidFill>
+              </a:rPr>
+              <a:t>▪  </a:t>
+            </a:r>
+            <a:r>
+              <a:rPr sz="1900" b="1">
+                <a:solidFill>
+                  <a:srgbClr val="2A2724"/>
+                </a:solidFill>
+                <a:latin typeface="Calibri"/>
+              </a:rPr>
+              <a:t>REFERENCIAS BIBLIOGRÁFICAS Y DOCUMENTALES</a:t>
+            </a:r>
+          </a:p>
+        </p:txBody>
+      </p:sp>
+      <p:sp>
+        <p:nvSpPr>
+          <p:cNvPr id="6" name="Rectangle 5"/>
           <p:cNvSpPr/>
           <p:nvPr/>
         </p:nvSpPr>
         <p:spPr>
           <a:xfrm>
-            <a:off x="502920" y="6327648"/>
-            <a:ext cx="11183112" cy="17780"/>
+            <a:off x="502920" y="6355080"/>
+            <a:ext cx="11183112" cy="15240"/>
           </a:xfrm>
           <a:prstGeom prst="rect">
             <a:avLst/>
@@ -7709,14 +7991,14 @@
       </p:sp>
       <p:sp>
         <p:nvSpPr>
-          <p:cNvPr id="8" name="TextBox 7"/>
+          <p:cNvPr id="7" name="TextBox 6"/>
           <p:cNvSpPr txBox="1"/>
           <p:nvPr/>
         </p:nvSpPr>
         <p:spPr>
           <a:xfrm>
-            <a:off x="502920" y="6400800"/>
-            <a:ext cx="9601200" cy="365760"/>
+            <a:off x="502920" y="6428232"/>
+            <a:ext cx="9601200" cy="320040"/>
           </a:xfrm>
           <a:prstGeom prst="rect">
             <a:avLst/>
@@ -7744,14 +8026,14 @@
       </p:sp>
       <p:sp>
         <p:nvSpPr>
-          <p:cNvPr id="9" name="TextBox 8"/>
+          <p:cNvPr id="8" name="TextBox 7"/>
           <p:cNvSpPr txBox="1"/>
           <p:nvPr/>
         </p:nvSpPr>
         <p:spPr>
           <a:xfrm>
-            <a:off x="10515600" y="6400800"/>
-            <a:ext cx="1170432" cy="365760"/>
+            <a:off x="10515600" y="6428232"/>
+            <a:ext cx="1170432" cy="320040"/>
           </a:xfrm>
           <a:prstGeom prst="rect">
             <a:avLst/>
@@ -7805,14 +8087,53 @@
       <p:grpSpPr/>
       <p:sp>
         <p:nvSpPr>
-          <p:cNvPr id="2" name="Rectangle 1"/>
+          <p:cNvPr id="2" name="TextBox 1"/>
+          <p:cNvSpPr txBox="1"/>
+          <p:nvPr/>
+        </p:nvSpPr>
+        <p:spPr>
+          <a:xfrm>
+            <a:off x="4206240" y="219456"/>
+            <a:ext cx="7479792" cy="502920"/>
+          </a:xfrm>
+          <a:prstGeom prst="rect">
+            <a:avLst/>
+          </a:prstGeom>
+          <a:noFill/>
+        </p:spPr>
+        <p:txBody>
+          <a:bodyPr wrap="square" anchor="t" lIns="0" rIns="0" tIns="0" bIns="0">
+            <a:spAutoFit/>
+          </a:bodyPr>
+          <a:lstStyle/>
+          <a:p>
+            <a:pPr algn="r">
+              <a:lnSpc>
+                <a:spcPct val="100000"/>
+              </a:lnSpc>
+            </a:pPr>
+            <a:r>
+              <a:rPr sz="850" b="0" i="1">
+                <a:solidFill>
+                  <a:srgbClr val="6B645C"/>
+                </a:solidFill>
+                <a:latin typeface="Georgia"/>
+              </a:rPr>
+              <a:t>Más allá del documental de arte: ensayo fílmico y crítica anticolonial en Las estatuas también mueren</a:t>
+            </a:r>
+          </a:p>
+        </p:txBody>
+      </p:sp>
+      <p:sp>
+        <p:nvSpPr>
+          <p:cNvPr id="3" name="Rectangle 2"/>
           <p:cNvSpPr/>
           <p:nvPr/>
         </p:nvSpPr>
         <p:spPr>
           <a:xfrm>
-            <a:off x="502920" y="548640"/>
-            <a:ext cx="128016" cy="1051560"/>
+            <a:off x="502920" y="566928"/>
+            <a:ext cx="128016" cy="960120"/>
           </a:xfrm>
           <a:prstGeom prst="rect">
             <a:avLst/>
@@ -7849,14 +8170,14 @@
       </p:sp>
       <p:sp>
         <p:nvSpPr>
-          <p:cNvPr id="3" name="TextBox 2"/>
+          <p:cNvPr id="4" name="TextBox 3"/>
           <p:cNvSpPr txBox="1"/>
           <p:nvPr/>
         </p:nvSpPr>
         <p:spPr>
           <a:xfrm>
             <a:off x="777240" y="502920"/>
-            <a:ext cx="10698480" cy="320040"/>
+            <a:ext cx="6400800" cy="292608"/>
           </a:xfrm>
           <a:prstGeom prst="rect">
             <a:avLst/>
@@ -7877,21 +8198,21 @@
                 </a:solidFill>
                 <a:latin typeface="Calibri"/>
               </a:rPr>
-              <a:t>INTRODUCCIÓN Y JUSTIFICACIÓN</a:t>
-            </a:r>
-          </a:p>
-        </p:txBody>
-      </p:sp>
-      <p:sp>
-        <p:nvSpPr>
-          <p:cNvPr id="4" name="TextBox 3"/>
+              <a:t>1</a:t>
+            </a:r>
+          </a:p>
+        </p:txBody>
+      </p:sp>
+      <p:sp>
+        <p:nvSpPr>
+          <p:cNvPr id="5" name="TextBox 4"/>
           <p:cNvSpPr txBox="1"/>
           <p:nvPr/>
         </p:nvSpPr>
         <p:spPr>
           <a:xfrm>
             <a:off x="777240" y="786384"/>
-            <a:ext cx="10881360" cy="868680"/>
+            <a:ext cx="10881360" cy="822960"/>
           </a:xfrm>
           <a:prstGeom prst="rect">
             <a:avLst/>
@@ -7906,31 +8227,31 @@
           <a:p>
             <a:pPr algn="l">
               <a:lnSpc>
-                <a:spcPct val="100000"/>
+                <a:spcPct val="98000"/>
               </a:lnSpc>
             </a:pPr>
             <a:r>
-              <a:rPr sz="3000" b="0" i="0">
+              <a:rPr sz="2700" b="1" i="0">
                 <a:solidFill>
                   <a:srgbClr val="2A2724"/>
                 </a:solidFill>
                 <a:latin typeface="Georgia"/>
               </a:rPr>
-              <a:t>Punto de partida e hipótesis</a:t>
-            </a:r>
-          </a:p>
-        </p:txBody>
-      </p:sp>
-      <p:sp>
-        <p:nvSpPr>
-          <p:cNvPr id="5" name="TextBox 4"/>
+              <a:t>Introducción</a:t>
+            </a:r>
+          </a:p>
+        </p:txBody>
+      </p:sp>
+      <p:sp>
+        <p:nvSpPr>
+          <p:cNvPr id="6" name="TextBox 5"/>
           <p:cNvSpPr txBox="1"/>
           <p:nvPr/>
         </p:nvSpPr>
         <p:spPr>
           <a:xfrm>
-            <a:off x="777240" y="1874519"/>
-            <a:ext cx="6400800" cy="4023360"/>
+            <a:off x="777240" y="1600200"/>
+            <a:ext cx="6400800" cy="4297680"/>
           </a:xfrm>
           <a:prstGeom prst="rect">
             <a:avLst/>
@@ -7952,7 +8273,7 @@
               </a:spcAft>
             </a:pPr>
             <a:r>
-              <a:rPr sz="1700" b="1">
+              <a:rPr sz="1600" b="1">
                 <a:solidFill>
                   <a:srgbClr val="C08A3E"/>
                 </a:solidFill>
@@ -7961,7 +8282,7 @@
               <a:t>—  </a:t>
             </a:r>
             <a:r>
-              <a:rPr sz="1700" b="1">
+              <a:rPr sz="1600" b="1">
                 <a:solidFill>
                   <a:srgbClr val="2A2724"/>
                 </a:solidFill>
@@ -7970,13 +8291,13 @@
               <a:t>El documental de arte </a:t>
             </a:r>
             <a:r>
-              <a:rPr sz="1700">
+              <a:rPr sz="1600">
                 <a:solidFill>
                   <a:srgbClr val="2A2724"/>
                 </a:solidFill>
                 <a:latin typeface="Calibri"/>
               </a:rPr>
-              <a:t>trasciende la mera documentación, catalogación y exposición de obras.</a:t>
+              <a:t>trasciende la mera documentación, catalogación y exposición de obras: es una herramienta crítica que aborda lo geográfico, lo social y lo político.</a:t>
             </a:r>
           </a:p>
           <a:p>
@@ -7989,7 +8310,7 @@
               </a:spcAft>
             </a:pPr>
             <a:r>
-              <a:rPr sz="1700" b="1">
+              <a:rPr sz="1600" b="1">
                 <a:solidFill>
                   <a:srgbClr val="C08A3E"/>
                 </a:solidFill>
@@ -7998,22 +8319,22 @@
               <a:t>—  </a:t>
             </a:r>
             <a:r>
-              <a:rPr sz="1700" b="1">
+              <a:rPr sz="1600" b="1">
                 <a:solidFill>
                   <a:srgbClr val="2A2724"/>
                 </a:solidFill>
                 <a:latin typeface="Calibri"/>
               </a:rPr>
-              <a:t>Tras la Segunda Guerra Mundial </a:t>
-            </a:r>
-            <a:r>
-              <a:rPr sz="1700">
+              <a:t>«Edad de oro» de posguerra: </a:t>
+            </a:r>
+            <a:r>
+              <a:rPr sz="1600">
                 <a:solidFill>
                   <a:srgbClr val="2A2724"/>
                 </a:solidFill>
                 <a:latin typeface="Calibri"/>
               </a:rPr>
-              <a:t>vive una auténtica «edad de oro»: conocimiento, conservación y sensibilización patrimonial.</a:t>
+              <a:t>tras la 2.ª Guerra Mundial el género apuesta por el conocimiento, la conservación y la sensibilización patrimonial.</a:t>
             </a:r>
           </a:p>
           <a:p>
@@ -8026,7 +8347,7 @@
               </a:spcAft>
             </a:pPr>
             <a:r>
-              <a:rPr sz="1700" b="1">
+              <a:rPr sz="1600" b="1">
                 <a:solidFill>
                   <a:srgbClr val="C08A3E"/>
                 </a:solidFill>
@@ -8035,22 +8356,22 @@
               <a:t>—  </a:t>
             </a:r>
             <a:r>
-              <a:rPr sz="1700" b="1">
+              <a:rPr sz="1600" b="1">
                 <a:solidFill>
                   <a:srgbClr val="2A2724"/>
                 </a:solidFill>
                 <a:latin typeface="Calibri"/>
               </a:rPr>
-              <a:t>Función educativa y ética </a:t>
-            </a:r>
-            <a:r>
-              <a:rPr sz="1700">
+              <a:t>Función educativa y ética: </a:t>
+            </a:r>
+            <a:r>
+              <a:rPr sz="1600">
                 <a:solidFill>
                   <a:srgbClr val="2A2724"/>
                 </a:solidFill>
                 <a:latin typeface="Calibri"/>
               </a:rPr>
-              <a:t>del género: divulgación y formación cultural de los públicos.</a:t>
+              <a:t>divulgación de las obras y formación cultural de los públicos.</a:t>
             </a:r>
           </a:p>
           <a:p>
@@ -8063,7 +8384,7 @@
               </a:spcAft>
             </a:pPr>
             <a:r>
-              <a:rPr sz="1700" b="1">
+              <a:rPr sz="1600" b="1">
                 <a:solidFill>
                   <a:srgbClr val="C08A3E"/>
                 </a:solidFill>
@@ -8072,7 +8393,7 @@
               <a:t>—  </a:t>
             </a:r>
             <a:r>
-              <a:rPr sz="1700" b="1">
+              <a:rPr sz="1600" b="1">
                 <a:solidFill>
                   <a:srgbClr val="2A2724"/>
                 </a:solidFill>
@@ -8081,7 +8402,7 @@
               <a:t>Caso de estudio: </a:t>
             </a:r>
             <a:r>
-              <a:rPr sz="1700">
+              <a:rPr sz="1600">
                 <a:solidFill>
                   <a:srgbClr val="2A2724"/>
                 </a:solidFill>
@@ -8094,14 +8415,14 @@
       </p:sp>
       <p:sp>
         <p:nvSpPr>
-          <p:cNvPr id="6" name="Rectangle 5"/>
+          <p:cNvPr id="7" name="Rectangle 6"/>
           <p:cNvSpPr/>
           <p:nvPr/>
         </p:nvSpPr>
         <p:spPr>
           <a:xfrm>
-            <a:off x="7452360" y="1874519"/>
-            <a:ext cx="4206240" cy="3977639"/>
+            <a:off x="7452360" y="1600200"/>
+            <a:ext cx="4206240" cy="4251960"/>
           </a:xfrm>
           <a:prstGeom prst="rect">
             <a:avLst/>
@@ -8138,14 +8459,14 @@
       </p:sp>
       <p:sp>
         <p:nvSpPr>
-          <p:cNvPr id="7" name="Rectangle 6"/>
+          <p:cNvPr id="8" name="Rectangle 7"/>
           <p:cNvSpPr/>
           <p:nvPr/>
         </p:nvSpPr>
         <p:spPr>
           <a:xfrm>
-            <a:off x="7452360" y="1874519"/>
-            <a:ext cx="128016" cy="3977639"/>
+            <a:off x="7452360" y="1600200"/>
+            <a:ext cx="128016" cy="4251960"/>
           </a:xfrm>
           <a:prstGeom prst="rect">
             <a:avLst/>
@@ -8182,13 +8503,13 @@
       </p:sp>
       <p:sp>
         <p:nvSpPr>
-          <p:cNvPr id="8" name="TextBox 7"/>
+          <p:cNvPr id="9" name="TextBox 8"/>
           <p:cNvSpPr txBox="1"/>
           <p:nvPr/>
         </p:nvSpPr>
         <p:spPr>
           <a:xfrm>
-            <a:off x="7772400" y="2103120"/>
+            <a:off x="7772400" y="1828800"/>
             <a:ext cx="3657600" cy="457200"/>
           </a:xfrm>
           <a:prstGeom prst="rect">
@@ -8217,14 +8538,14 @@
       </p:sp>
       <p:sp>
         <p:nvSpPr>
-          <p:cNvPr id="9" name="TextBox 8"/>
+          <p:cNvPr id="10" name="TextBox 9"/>
           <p:cNvSpPr txBox="1"/>
           <p:nvPr/>
         </p:nvSpPr>
         <p:spPr>
           <a:xfrm>
-            <a:off x="7772400" y="2606040"/>
-            <a:ext cx="3657600" cy="3108960"/>
+            <a:off x="7772400" y="2331720"/>
+            <a:ext cx="3657600" cy="3383280"/>
           </a:xfrm>
           <a:prstGeom prst="rect">
             <a:avLst/>
@@ -8239,31 +8560,31 @@
           <a:p>
             <a:pPr algn="l">
               <a:lnSpc>
-                <a:spcPct val="115000"/>
+                <a:spcPct val="118000"/>
               </a:lnSpc>
             </a:pPr>
             <a:r>
-              <a:rPr sz="1600" b="0" i="1">
+              <a:rPr sz="1650" b="0" i="1">
                 <a:solidFill>
                   <a:srgbClr val="F4F0E9"/>
                 </a:solidFill>
                 <a:latin typeface="Calibri"/>
               </a:rPr>
-              <a:t>El film no se limita a las convenciones del documental de arte de su tiempo: las trasciende para configurarse como un ensayo fílmico de carácter crítico, que denuncia la descontextualización y apropiación del arte africano en el marco del colonialismo.</a:t>
-            </a:r>
-          </a:p>
-        </p:txBody>
-      </p:sp>
-      <p:sp>
-        <p:nvSpPr>
-          <p:cNvPr id="10" name="Rectangle 9"/>
+              <a:t>Las estatuas también mueren no se limita a las convenciones del documental de arte de su contexto: las trasciende para configurarse como un ensayo fílmico de carácter crítico, que articula una denuncia de la descontextualización y apropiación del arte africano en el marco del colonialismo.</a:t>
+            </a:r>
+          </a:p>
+        </p:txBody>
+      </p:sp>
+      <p:sp>
+        <p:nvSpPr>
+          <p:cNvPr id="11" name="Rectangle 10"/>
           <p:cNvSpPr/>
           <p:nvPr/>
         </p:nvSpPr>
         <p:spPr>
           <a:xfrm>
-            <a:off x="502920" y="6327648"/>
-            <a:ext cx="11183112" cy="17780"/>
+            <a:off x="502920" y="6355080"/>
+            <a:ext cx="11183112" cy="15240"/>
           </a:xfrm>
           <a:prstGeom prst="rect">
             <a:avLst/>
@@ -8300,14 +8621,14 @@
       </p:sp>
       <p:sp>
         <p:nvSpPr>
-          <p:cNvPr id="11" name="TextBox 10"/>
+          <p:cNvPr id="12" name="TextBox 11"/>
           <p:cNvSpPr txBox="1"/>
           <p:nvPr/>
         </p:nvSpPr>
         <p:spPr>
           <a:xfrm>
-            <a:off x="502920" y="6400800"/>
-            <a:ext cx="9601200" cy="365760"/>
+            <a:off x="502920" y="6428232"/>
+            <a:ext cx="9601200" cy="320040"/>
           </a:xfrm>
           <a:prstGeom prst="rect">
             <a:avLst/>
@@ -8335,14 +8656,14 @@
       </p:sp>
       <p:sp>
         <p:nvSpPr>
-          <p:cNvPr id="12" name="TextBox 11"/>
+          <p:cNvPr id="13" name="TextBox 12"/>
           <p:cNvSpPr txBox="1"/>
           <p:nvPr/>
         </p:nvSpPr>
         <p:spPr>
           <a:xfrm>
-            <a:off x="10515600" y="6400800"/>
-            <a:ext cx="1170432" cy="365760"/>
+            <a:off x="10515600" y="6428232"/>
+            <a:ext cx="1170432" cy="320040"/>
           </a:xfrm>
           <a:prstGeom prst="rect">
             <a:avLst/>
@@ -8396,14 +8717,53 @@
       <p:grpSpPr/>
       <p:sp>
         <p:nvSpPr>
-          <p:cNvPr id="2" name="Rectangle 1"/>
+          <p:cNvPr id="2" name="TextBox 1"/>
+          <p:cNvSpPr txBox="1"/>
+          <p:nvPr/>
+        </p:nvSpPr>
+        <p:spPr>
+          <a:xfrm>
+            <a:off x="4206240" y="219456"/>
+            <a:ext cx="7479792" cy="502920"/>
+          </a:xfrm>
+          <a:prstGeom prst="rect">
+            <a:avLst/>
+          </a:prstGeom>
+          <a:noFill/>
+        </p:spPr>
+        <p:txBody>
+          <a:bodyPr wrap="square" anchor="t" lIns="0" rIns="0" tIns="0" bIns="0">
+            <a:spAutoFit/>
+          </a:bodyPr>
+          <a:lstStyle/>
+          <a:p>
+            <a:pPr algn="r">
+              <a:lnSpc>
+                <a:spcPct val="100000"/>
+              </a:lnSpc>
+            </a:pPr>
+            <a:r>
+              <a:rPr sz="850" b="0" i="1">
+                <a:solidFill>
+                  <a:srgbClr val="6B645C"/>
+                </a:solidFill>
+                <a:latin typeface="Georgia"/>
+              </a:rPr>
+              <a:t>Más allá del documental de arte: ensayo fílmico y crítica anticolonial en Las estatuas también mueren</a:t>
+            </a:r>
+          </a:p>
+        </p:txBody>
+      </p:sp>
+      <p:sp>
+        <p:nvSpPr>
+          <p:cNvPr id="3" name="Rectangle 2"/>
           <p:cNvSpPr/>
           <p:nvPr/>
         </p:nvSpPr>
         <p:spPr>
           <a:xfrm>
-            <a:off x="502920" y="548640"/>
-            <a:ext cx="128016" cy="1051560"/>
+            <a:off x="502920" y="566928"/>
+            <a:ext cx="128016" cy="960120"/>
           </a:xfrm>
           <a:prstGeom prst="rect">
             <a:avLst/>
@@ -8440,14 +8800,14 @@
       </p:sp>
       <p:sp>
         <p:nvSpPr>
-          <p:cNvPr id="3" name="TextBox 2"/>
+          <p:cNvPr id="4" name="TextBox 3"/>
           <p:cNvSpPr txBox="1"/>
           <p:nvPr/>
         </p:nvSpPr>
         <p:spPr>
           <a:xfrm>
             <a:off x="777240" y="502920"/>
-            <a:ext cx="10698480" cy="320040"/>
+            <a:ext cx="6400800" cy="292608"/>
           </a:xfrm>
           <a:prstGeom prst="rect">
             <a:avLst/>
@@ -8468,21 +8828,21 @@
                 </a:solidFill>
                 <a:latin typeface="Calibri"/>
               </a:rPr>
-              <a:t>ESTADO DE LA CUESTIÓN</a:t>
-            </a:r>
-          </a:p>
-        </p:txBody>
-      </p:sp>
-      <p:sp>
-        <p:nvSpPr>
-          <p:cNvPr id="4" name="TextBox 3"/>
+              <a:t>2</a:t>
+            </a:r>
+          </a:p>
+        </p:txBody>
+      </p:sp>
+      <p:sp>
+        <p:nvSpPr>
+          <p:cNvPr id="5" name="TextBox 4"/>
           <p:cNvSpPr txBox="1"/>
           <p:nvPr/>
         </p:nvSpPr>
         <p:spPr>
           <a:xfrm>
             <a:off x="777240" y="786384"/>
-            <a:ext cx="10881360" cy="868680"/>
+            <a:ext cx="10881360" cy="822960"/>
           </a:xfrm>
           <a:prstGeom prst="rect">
             <a:avLst/>
@@ -8497,31 +8857,31 @@
           <a:p>
             <a:pPr algn="l">
               <a:lnSpc>
-                <a:spcPct val="100000"/>
+                <a:spcPct val="98000"/>
               </a:lnSpc>
             </a:pPr>
             <a:r>
-              <a:rPr sz="3000" b="0" i="0">
+              <a:rPr sz="2600" b="1" i="0">
                 <a:solidFill>
                   <a:srgbClr val="2A2724"/>
                 </a:solidFill>
                 <a:latin typeface="Georgia"/>
               </a:rPr>
-              <a:t>Un tema interdisciplinar</a:t>
-            </a:r>
-          </a:p>
-        </p:txBody>
-      </p:sp>
-      <p:sp>
-        <p:nvSpPr>
-          <p:cNvPr id="5" name="TextBox 4"/>
+              <a:t>Estado de la cuestión y justificación</a:t>
+            </a:r>
+          </a:p>
+        </p:txBody>
+      </p:sp>
+      <p:sp>
+        <p:nvSpPr>
+          <p:cNvPr id="6" name="TextBox 5"/>
           <p:cNvSpPr txBox="1"/>
           <p:nvPr/>
         </p:nvSpPr>
         <p:spPr>
           <a:xfrm>
-            <a:off x="777240" y="1783080"/>
-            <a:ext cx="10881360" cy="548640"/>
+            <a:off x="777240" y="1353312"/>
+            <a:ext cx="10881360" cy="365760"/>
           </a:xfrm>
           <a:prstGeom prst="rect">
             <a:avLst/>
@@ -8536,26 +8896,26 @@
           <a:p>
             <a:pPr algn="l"/>
             <a:r>
-              <a:rPr sz="1600" b="0" i="1">
-                <a:solidFill>
-                  <a:srgbClr val="6B645C"/>
-                </a:solidFill>
-                <a:latin typeface="Calibri"/>
-              </a:rPr>
-              <a:t>Historia del arte y cultura visual en diálogo con la sociología, la etnografía, la historia y la geopolítica.</a:t>
-            </a:r>
-          </a:p>
-        </p:txBody>
-      </p:sp>
-      <p:sp>
-        <p:nvSpPr>
-          <p:cNvPr id="6" name="Rectangle 5"/>
+              <a:rPr sz="1400" b="0" i="1">
+                <a:solidFill>
+                  <a:srgbClr val="7A5236"/>
+                </a:solidFill>
+                <a:latin typeface="Calibri"/>
+              </a:rPr>
+              <a:t>Un objeto de estudio interdisciplinar: historia del arte y cultura visual, sociología, etnografía, historia y geopolítica.</a:t>
+            </a:r>
+          </a:p>
+        </p:txBody>
+      </p:sp>
+      <p:sp>
+        <p:nvSpPr>
+          <p:cNvPr id="7" name="Rectangle 6"/>
           <p:cNvSpPr/>
           <p:nvPr/>
         </p:nvSpPr>
         <p:spPr>
           <a:xfrm>
-            <a:off x="777240" y="2423160"/>
+            <a:off x="777240" y="2697480"/>
             <a:ext cx="3520440" cy="502920"/>
           </a:xfrm>
           <a:prstGeom prst="rect">
@@ -8593,13 +8953,13 @@
       </p:sp>
       <p:sp>
         <p:nvSpPr>
-          <p:cNvPr id="7" name="TextBox 6"/>
+          <p:cNvPr id="8" name="TextBox 7"/>
           <p:cNvSpPr txBox="1"/>
           <p:nvPr/>
         </p:nvSpPr>
         <p:spPr>
           <a:xfrm>
-            <a:off x="777240" y="2423160"/>
+            <a:off x="777240" y="2697480"/>
             <a:ext cx="3520440" cy="502920"/>
           </a:xfrm>
           <a:prstGeom prst="rect">
@@ -8615,27 +8975,27 @@
           <a:p>
             <a:pPr algn="ctr"/>
             <a:r>
-              <a:rPr sz="1500" b="1" i="0">
+              <a:rPr sz="1450" b="1" i="0">
                 <a:solidFill>
                   <a:srgbClr val="FFFFFF"/>
                 </a:solidFill>
                 <a:latin typeface="Calibri"/>
               </a:rPr>
-              <a:t>Documental de arte</a:t>
-            </a:r>
-          </a:p>
-        </p:txBody>
-      </p:sp>
-      <p:sp>
-        <p:nvSpPr>
-          <p:cNvPr id="8" name="Rectangle 7"/>
+              <a:t>El documental de arte</a:t>
+            </a:r>
+          </a:p>
+        </p:txBody>
+      </p:sp>
+      <p:sp>
+        <p:nvSpPr>
+          <p:cNvPr id="9" name="Rectangle 8"/>
           <p:cNvSpPr/>
           <p:nvPr/>
         </p:nvSpPr>
         <p:spPr>
           <a:xfrm>
-            <a:off x="777240" y="2926080"/>
-            <a:ext cx="3520440" cy="2971800"/>
+            <a:off x="777240" y="3200400"/>
+            <a:ext cx="3520440" cy="2697480"/>
           </a:xfrm>
           <a:prstGeom prst="rect">
             <a:avLst/>
@@ -8674,14 +9034,14 @@
       </p:sp>
       <p:sp>
         <p:nvSpPr>
-          <p:cNvPr id="9" name="TextBox 8"/>
+          <p:cNvPr id="10" name="TextBox 9"/>
           <p:cNvSpPr txBox="1"/>
           <p:nvPr/>
         </p:nvSpPr>
         <p:spPr>
           <a:xfrm>
-            <a:off x="960120" y="3154680"/>
-            <a:ext cx="3154680" cy="2560320"/>
+            <a:off x="960120" y="3401568"/>
+            <a:ext cx="3154680" cy="2377440"/>
           </a:xfrm>
           <a:prstGeom prst="rect">
             <a:avLst/>
@@ -8699,7 +9059,7 @@
                 <a:spcPct val="100000"/>
               </a:lnSpc>
               <a:spcAft>
-                <a:spcPts val="1200"/>
+                <a:spcPts val="1100"/>
               </a:spcAft>
             </a:pPr>
             <a:r>
@@ -8718,7 +9078,7 @@
                 </a:solidFill>
                 <a:latin typeface="Calibri"/>
               </a:rPr>
-              <a:t>C. Fernández Cuenca — 30 años de documental de arte en España (1967)</a:t>
+              <a:t>C. Fernández Cuenca — 30 años de documental de arte en España (1967).</a:t>
             </a:r>
           </a:p>
           <a:p>
@@ -8727,7 +9087,7 @@
                 <a:spcPct val="100000"/>
               </a:lnSpc>
               <a:spcAft>
-                <a:spcPts val="1200"/>
+                <a:spcPts val="1100"/>
               </a:spcAft>
             </a:pPr>
             <a:r>
@@ -8746,7 +9106,7 @@
                 </a:solidFill>
                 <a:latin typeface="Calibri"/>
               </a:rPr>
-              <a:t>J. J. Aliaga Cárceles — tesis sobre Imágenes y NO-DO (2022)</a:t>
+              <a:t>J. J. Aliaga Cárceles — La revista Imágenes y la visión documental de NO-DO (2022).</a:t>
             </a:r>
           </a:p>
           <a:p>
@@ -8755,7 +9115,7 @@
                 <a:spcPct val="100000"/>
               </a:lnSpc>
               <a:spcAft>
-                <a:spcPts val="1200"/>
+                <a:spcPts val="1100"/>
               </a:spcAft>
             </a:pPr>
             <a:r>
@@ -8774,20 +9134,20 @@
                 </a:solidFill>
                 <a:latin typeface="Calibri"/>
               </a:rPr>
-              <a:t>G. García Fernández / Peydró — El cine sobre arte y el cine-ensayo</a:t>
-            </a:r>
-          </a:p>
-        </p:txBody>
-      </p:sp>
-      <p:sp>
-        <p:nvSpPr>
-          <p:cNvPr id="10" name="Rectangle 9"/>
+              <a:t>G. García Fernández (Peydró) — El cine sobre arte (cine-ensayo).</a:t>
+            </a:r>
+          </a:p>
+        </p:txBody>
+      </p:sp>
+      <p:sp>
+        <p:nvSpPr>
+          <p:cNvPr id="11" name="Rectangle 10"/>
           <p:cNvSpPr/>
           <p:nvPr/>
         </p:nvSpPr>
         <p:spPr>
           <a:xfrm>
-            <a:off x="4480560" y="2423160"/>
+            <a:off x="4480559" y="2697480"/>
             <a:ext cx="3520440" cy="502920"/>
           </a:xfrm>
           <a:prstGeom prst="rect">
@@ -8825,13 +9185,13 @@
       </p:sp>
       <p:sp>
         <p:nvSpPr>
-          <p:cNvPr id="11" name="TextBox 10"/>
+          <p:cNvPr id="12" name="TextBox 11"/>
           <p:cNvSpPr txBox="1"/>
           <p:nvPr/>
         </p:nvSpPr>
         <p:spPr>
           <a:xfrm>
-            <a:off x="4480560" y="2423160"/>
+            <a:off x="4480559" y="2697480"/>
             <a:ext cx="3520440" cy="502920"/>
           </a:xfrm>
           <a:prstGeom prst="rect">
@@ -8847,7 +9207,7 @@
           <a:p>
             <a:pPr algn="ctr"/>
             <a:r>
-              <a:rPr sz="1500" b="1" i="0">
+              <a:rPr sz="1450" b="1" i="0">
                 <a:solidFill>
                   <a:srgbClr val="FFFFFF"/>
                 </a:solidFill>
@@ -8860,14 +9220,14 @@
       </p:sp>
       <p:sp>
         <p:nvSpPr>
-          <p:cNvPr id="12" name="Rectangle 11"/>
+          <p:cNvPr id="13" name="Rectangle 12"/>
           <p:cNvSpPr/>
           <p:nvPr/>
         </p:nvSpPr>
         <p:spPr>
           <a:xfrm>
-            <a:off x="4480560" y="2926080"/>
-            <a:ext cx="3520440" cy="2971800"/>
+            <a:off x="4480559" y="3200400"/>
+            <a:ext cx="3520440" cy="2697480"/>
           </a:xfrm>
           <a:prstGeom prst="rect">
             <a:avLst/>
@@ -8906,14 +9266,14 @@
       </p:sp>
       <p:sp>
         <p:nvSpPr>
-          <p:cNvPr id="13" name="TextBox 12"/>
+          <p:cNvPr id="14" name="TextBox 13"/>
           <p:cNvSpPr txBox="1"/>
           <p:nvPr/>
         </p:nvSpPr>
         <p:spPr>
           <a:xfrm>
-            <a:off x="4663440" y="3154680"/>
-            <a:ext cx="3154680" cy="2560320"/>
+            <a:off x="4663439" y="3401568"/>
+            <a:ext cx="3154680" cy="2377440"/>
           </a:xfrm>
           <a:prstGeom prst="rect">
             <a:avLst/>
@@ -8931,7 +9291,7 @@
                 <a:spcPct val="100000"/>
               </a:lnSpc>
               <a:spcAft>
-                <a:spcPts val="1200"/>
+                <a:spcPts val="1100"/>
               </a:spcAft>
             </a:pPr>
             <a:r>
@@ -8950,7 +9310,7 @@
                 </a:solidFill>
                 <a:latin typeface="Calibri"/>
               </a:rPr>
-              <a:t>R. Hamery — Les films sur l'art d'Afrique noire (1945-1961)</a:t>
+              <a:t>R. Hamery — Les films sur l'art d'Afrique noire (1945-1961).</a:t>
             </a:r>
           </a:p>
           <a:p>
@@ -8959,7 +9319,7 @@
                 <a:spcPct val="100000"/>
               </a:lnSpc>
               <a:spcAft>
-                <a:spcPts val="1200"/>
+                <a:spcPts val="1100"/>
               </a:spcAft>
             </a:pPr>
             <a:r>
@@ -8978,7 +9338,7 @@
                 </a:solidFill>
                 <a:latin typeface="Calibri"/>
               </a:rPr>
-              <a:t>Sarr &amp; Savoy — The Restitution of African Cultural Heritage (2018)</a:t>
+              <a:t>Ceamanos &amp; Kabunda — El Reparto de África.</a:t>
             </a:r>
           </a:p>
           <a:p>
@@ -8987,7 +9347,7 @@
                 <a:spcPct val="100000"/>
               </a:lnSpc>
               <a:spcAft>
-                <a:spcPts val="1200"/>
+                <a:spcPts val="1100"/>
               </a:spcAft>
             </a:pPr>
             <a:r>
@@ -9006,20 +9366,20 @@
                 </a:solidFill>
                 <a:latin typeface="Calibri"/>
               </a:rPr>
-              <a:t>Ceamanos &amp; Kabunda — El Reparto de África</a:t>
-            </a:r>
-          </a:p>
-        </p:txBody>
-      </p:sp>
-      <p:sp>
-        <p:nvSpPr>
-          <p:cNvPr id="14" name="Rectangle 13"/>
+              <a:t>Sarr &amp; Savoy — The Restitution of African Cultural Heritage (2018).</a:t>
+            </a:r>
+          </a:p>
+        </p:txBody>
+      </p:sp>
+      <p:sp>
+        <p:nvSpPr>
+          <p:cNvPr id="15" name="Rectangle 14"/>
           <p:cNvSpPr/>
           <p:nvPr/>
         </p:nvSpPr>
         <p:spPr>
           <a:xfrm>
-            <a:off x="8183880" y="2423160"/>
+            <a:off x="8183879" y="2697480"/>
             <a:ext cx="3520440" cy="502920"/>
           </a:xfrm>
           <a:prstGeom prst="rect">
@@ -9057,13 +9417,13 @@
       </p:sp>
       <p:sp>
         <p:nvSpPr>
-          <p:cNvPr id="15" name="TextBox 14"/>
+          <p:cNvPr id="16" name="TextBox 15"/>
           <p:cNvSpPr txBox="1"/>
           <p:nvPr/>
         </p:nvSpPr>
         <p:spPr>
           <a:xfrm>
-            <a:off x="8183880" y="2423160"/>
+            <a:off x="8183879" y="2697480"/>
             <a:ext cx="3520440" cy="502920"/>
           </a:xfrm>
           <a:prstGeom prst="rect">
@@ -9079,27 +9439,27 @@
           <a:p>
             <a:pPr algn="ctr"/>
             <a:r>
-              <a:rPr sz="1500" b="1" i="0">
+              <a:rPr sz="1450" b="1" i="0">
                 <a:solidFill>
                   <a:srgbClr val="FFFFFF"/>
                 </a:solidFill>
                 <a:latin typeface="Calibri"/>
               </a:rPr>
-              <a:t>El film y sus autores</a:t>
-            </a:r>
-          </a:p>
-        </p:txBody>
-      </p:sp>
-      <p:sp>
-        <p:nvSpPr>
-          <p:cNvPr id="16" name="Rectangle 15"/>
+              <a:t>El film y sus directores</a:t>
+            </a:r>
+          </a:p>
+        </p:txBody>
+      </p:sp>
+      <p:sp>
+        <p:nvSpPr>
+          <p:cNvPr id="17" name="Rectangle 16"/>
           <p:cNvSpPr/>
           <p:nvPr/>
         </p:nvSpPr>
         <p:spPr>
           <a:xfrm>
-            <a:off x="8183880" y="2926080"/>
-            <a:ext cx="3520440" cy="2971800"/>
+            <a:off x="8183879" y="3200400"/>
+            <a:ext cx="3520440" cy="2697480"/>
           </a:xfrm>
           <a:prstGeom prst="rect">
             <a:avLst/>
@@ -9138,14 +9498,14 @@
       </p:sp>
       <p:sp>
         <p:nvSpPr>
-          <p:cNvPr id="17" name="TextBox 16"/>
+          <p:cNvPr id="18" name="TextBox 17"/>
           <p:cNvSpPr txBox="1"/>
           <p:nvPr/>
         </p:nvSpPr>
         <p:spPr>
           <a:xfrm>
-            <a:off x="8366760" y="3154680"/>
-            <a:ext cx="3154680" cy="2560320"/>
+            <a:off x="8366759" y="3401568"/>
+            <a:ext cx="3154680" cy="2377440"/>
           </a:xfrm>
           <a:prstGeom prst="rect">
             <a:avLst/>
@@ -9163,7 +9523,7 @@
                 <a:spcPct val="100000"/>
               </a:lnSpc>
               <a:spcAft>
-                <a:spcPts val="1200"/>
+                <a:spcPts val="1100"/>
               </a:spcAft>
             </a:pPr>
             <a:r>
@@ -9182,7 +9542,7 @@
                 </a:solidFill>
                 <a:latin typeface="Calibri"/>
               </a:rPr>
-              <a:t>G. García Fernández — La piel bajo las máscaras (Les Statues...)</a:t>
+              <a:t>G. García Fernández — La piel bajo las máscaras (Les Statues...).</a:t>
             </a:r>
           </a:p>
           <a:p>
@@ -9191,7 +9551,7 @@
                 <a:spcPct val="100000"/>
               </a:lnSpc>
               <a:spcAft>
-                <a:spcPts val="1200"/>
+                <a:spcPts val="1100"/>
               </a:spcAft>
             </a:pPr>
             <a:r>
@@ -9210,7 +9570,7 @@
                 </a:solidFill>
                 <a:latin typeface="Calibri"/>
               </a:rPr>
-              <a:t>N. M. Alter — Chris Marker (2006)</a:t>
+              <a:t>N. M. Alter — Chris Marker (2006).</a:t>
             </a:r>
           </a:p>
           <a:p>
@@ -9219,7 +9579,7 @@
                 <a:spcPct val="100000"/>
               </a:lnSpc>
               <a:spcAft>
-                <a:spcPts val="1200"/>
+                <a:spcPts val="1100"/>
               </a:spcAft>
             </a:pPr>
             <a:r>
@@ -9238,21 +9598,21 @@
                 </a:solidFill>
                 <a:latin typeface="Calibri"/>
               </a:rPr>
-              <a:t>A. Cortijo Talavera — los documentales de Alain Resnais</a:t>
-            </a:r>
-          </a:p>
-        </p:txBody>
-      </p:sp>
-      <p:sp>
-        <p:nvSpPr>
-          <p:cNvPr id="18" name="Rectangle 17"/>
+              <a:t>A. Cortijo Talavera — los documentales de Alain Resnais.</a:t>
+            </a:r>
+          </a:p>
+        </p:txBody>
+      </p:sp>
+      <p:sp>
+        <p:nvSpPr>
+          <p:cNvPr id="19" name="Rectangle 18"/>
           <p:cNvSpPr/>
           <p:nvPr/>
         </p:nvSpPr>
         <p:spPr>
           <a:xfrm>
-            <a:off x="502920" y="6327648"/>
-            <a:ext cx="11183112" cy="17780"/>
+            <a:off x="502920" y="6355080"/>
+            <a:ext cx="11183112" cy="15240"/>
           </a:xfrm>
           <a:prstGeom prst="rect">
             <a:avLst/>
@@ -9289,14 +9649,14 @@
       </p:sp>
       <p:sp>
         <p:nvSpPr>
-          <p:cNvPr id="19" name="TextBox 18"/>
+          <p:cNvPr id="20" name="TextBox 19"/>
           <p:cNvSpPr txBox="1"/>
           <p:nvPr/>
         </p:nvSpPr>
         <p:spPr>
           <a:xfrm>
-            <a:off x="502920" y="6400800"/>
-            <a:ext cx="9601200" cy="365760"/>
+            <a:off x="502920" y="6428232"/>
+            <a:ext cx="9601200" cy="320040"/>
           </a:xfrm>
           <a:prstGeom prst="rect">
             <a:avLst/>
@@ -9324,14 +9684,14 @@
       </p:sp>
       <p:sp>
         <p:nvSpPr>
-          <p:cNvPr id="20" name="TextBox 19"/>
+          <p:cNvPr id="21" name="TextBox 20"/>
           <p:cNvSpPr txBox="1"/>
           <p:nvPr/>
         </p:nvSpPr>
         <p:spPr>
           <a:xfrm>
-            <a:off x="10515600" y="6400800"/>
-            <a:ext cx="1170432" cy="365760"/>
+            <a:off x="10515600" y="6428232"/>
+            <a:ext cx="1170432" cy="320040"/>
           </a:xfrm>
           <a:prstGeom prst="rect">
             <a:avLst/>
@@ -9385,14 +9745,53 @@
       <p:grpSpPr/>
       <p:sp>
         <p:nvSpPr>
-          <p:cNvPr id="2" name="Rectangle 1"/>
+          <p:cNvPr id="2" name="TextBox 1"/>
+          <p:cNvSpPr txBox="1"/>
+          <p:nvPr/>
+        </p:nvSpPr>
+        <p:spPr>
+          <a:xfrm>
+            <a:off x="4206240" y="219456"/>
+            <a:ext cx="7479792" cy="502920"/>
+          </a:xfrm>
+          <a:prstGeom prst="rect">
+            <a:avLst/>
+          </a:prstGeom>
+          <a:noFill/>
+        </p:spPr>
+        <p:txBody>
+          <a:bodyPr wrap="square" anchor="t" lIns="0" rIns="0" tIns="0" bIns="0">
+            <a:spAutoFit/>
+          </a:bodyPr>
+          <a:lstStyle/>
+          <a:p>
+            <a:pPr algn="r">
+              <a:lnSpc>
+                <a:spcPct val="100000"/>
+              </a:lnSpc>
+            </a:pPr>
+            <a:r>
+              <a:rPr sz="850" b="0" i="1">
+                <a:solidFill>
+                  <a:srgbClr val="6B645C"/>
+                </a:solidFill>
+                <a:latin typeface="Georgia"/>
+              </a:rPr>
+              <a:t>Más allá del documental de arte: ensayo fílmico y crítica anticolonial en Las estatuas también mueren</a:t>
+            </a:r>
+          </a:p>
+        </p:txBody>
+      </p:sp>
+      <p:sp>
+        <p:nvSpPr>
+          <p:cNvPr id="3" name="Rectangle 2"/>
           <p:cNvSpPr/>
           <p:nvPr/>
         </p:nvSpPr>
         <p:spPr>
           <a:xfrm>
-            <a:off x="502920" y="548640"/>
-            <a:ext cx="128016" cy="1051560"/>
+            <a:off x="502920" y="566928"/>
+            <a:ext cx="128016" cy="960120"/>
           </a:xfrm>
           <a:prstGeom prst="rect">
             <a:avLst/>
@@ -9429,14 +9828,14 @@
       </p:sp>
       <p:sp>
         <p:nvSpPr>
-          <p:cNvPr id="3" name="TextBox 2"/>
+          <p:cNvPr id="4" name="TextBox 3"/>
           <p:cNvSpPr txBox="1"/>
           <p:nvPr/>
         </p:nvSpPr>
         <p:spPr>
           <a:xfrm>
             <a:off x="777240" y="502920"/>
-            <a:ext cx="10698480" cy="320040"/>
+            <a:ext cx="6400800" cy="292608"/>
           </a:xfrm>
           <a:prstGeom prst="rect">
             <a:avLst/>
@@ -9457,21 +9856,21 @@
                 </a:solidFill>
                 <a:latin typeface="Calibri"/>
               </a:rPr>
-              <a:t>OBJETIVOS DE LA INVESTIGACIÓN</a:t>
-            </a:r>
-          </a:p>
-        </p:txBody>
-      </p:sp>
-      <p:sp>
-        <p:nvSpPr>
-          <p:cNvPr id="4" name="TextBox 3"/>
+              <a:t>3</a:t>
+            </a:r>
+          </a:p>
+        </p:txBody>
+      </p:sp>
+      <p:sp>
+        <p:nvSpPr>
+          <p:cNvPr id="5" name="TextBox 4"/>
           <p:cNvSpPr txBox="1"/>
           <p:nvPr/>
         </p:nvSpPr>
         <p:spPr>
           <a:xfrm>
             <a:off x="777240" y="786384"/>
-            <a:ext cx="10881360" cy="868680"/>
+            <a:ext cx="10881360" cy="822960"/>
           </a:xfrm>
           <a:prstGeom prst="rect">
             <a:avLst/>
@@ -9486,11 +9885,11 @@
           <a:p>
             <a:pPr algn="l">
               <a:lnSpc>
-                <a:spcPct val="100000"/>
+                <a:spcPct val="98000"/>
               </a:lnSpc>
             </a:pPr>
             <a:r>
-              <a:rPr sz="3000" b="0" i="0">
+              <a:rPr sz="2700" b="1" i="0">
                 <a:solidFill>
                   <a:srgbClr val="2A2724"/>
                 </a:solidFill>
@@ -9503,13 +9902,13 @@
       </p:sp>
       <p:sp>
         <p:nvSpPr>
-          <p:cNvPr id="5" name="Oval 4"/>
+          <p:cNvPr id="6" name="Oval 5"/>
           <p:cNvSpPr/>
           <p:nvPr/>
         </p:nvSpPr>
         <p:spPr>
           <a:xfrm>
-            <a:off x="777240" y="1920240"/>
+            <a:off x="777240" y="1783080"/>
             <a:ext cx="566928" cy="566928"/>
           </a:xfrm>
           <a:prstGeom prst="ellipse">
@@ -9547,13 +9946,13 @@
       </p:sp>
       <p:sp>
         <p:nvSpPr>
-          <p:cNvPr id="6" name="TextBox 5"/>
+          <p:cNvPr id="7" name="TextBox 6"/>
           <p:cNvSpPr txBox="1"/>
           <p:nvPr/>
         </p:nvSpPr>
         <p:spPr>
           <a:xfrm>
-            <a:off x="777240" y="1920240"/>
+            <a:off x="777240" y="1783080"/>
             <a:ext cx="566928" cy="566928"/>
           </a:xfrm>
           <a:prstGeom prst="rect">
@@ -9582,14 +9981,14 @@
       </p:sp>
       <p:sp>
         <p:nvSpPr>
-          <p:cNvPr id="7" name="TextBox 6"/>
+          <p:cNvPr id="8" name="TextBox 7"/>
           <p:cNvSpPr txBox="1"/>
           <p:nvPr/>
         </p:nvSpPr>
         <p:spPr>
           <a:xfrm>
-            <a:off x="1554480" y="1883664"/>
-            <a:ext cx="10058400" cy="914400"/>
+            <a:off x="1554480" y="1737360"/>
+            <a:ext cx="10058400" cy="960120"/>
           </a:xfrm>
           <a:prstGeom prst="rect">
             <a:avLst/>
@@ -9630,13 +10029,13 @@
       </p:sp>
       <p:sp>
         <p:nvSpPr>
-          <p:cNvPr id="8" name="Oval 7"/>
+          <p:cNvPr id="9" name="Oval 8"/>
           <p:cNvSpPr/>
           <p:nvPr/>
         </p:nvSpPr>
         <p:spPr>
           <a:xfrm>
-            <a:off x="777240" y="2971800"/>
+            <a:off x="777240" y="2862072"/>
             <a:ext cx="566928" cy="566928"/>
           </a:xfrm>
           <a:prstGeom prst="ellipse">
@@ -9674,13 +10073,13 @@
       </p:sp>
       <p:sp>
         <p:nvSpPr>
-          <p:cNvPr id="9" name="TextBox 8"/>
+          <p:cNvPr id="10" name="TextBox 9"/>
           <p:cNvSpPr txBox="1"/>
           <p:nvPr/>
         </p:nvSpPr>
         <p:spPr>
           <a:xfrm>
-            <a:off x="777240" y="2971800"/>
+            <a:off x="777240" y="2862072"/>
             <a:ext cx="566928" cy="566928"/>
           </a:xfrm>
           <a:prstGeom prst="rect">
@@ -9709,14 +10108,14 @@
       </p:sp>
       <p:sp>
         <p:nvSpPr>
-          <p:cNvPr id="10" name="TextBox 9"/>
+          <p:cNvPr id="11" name="TextBox 10"/>
           <p:cNvSpPr txBox="1"/>
           <p:nvPr/>
         </p:nvSpPr>
         <p:spPr>
           <a:xfrm>
-            <a:off x="1554480" y="2935224"/>
-            <a:ext cx="10058400" cy="914400"/>
+            <a:off x="1554480" y="2816352"/>
+            <a:ext cx="10058400" cy="960120"/>
           </a:xfrm>
           <a:prstGeom prst="rect">
             <a:avLst/>
@@ -9757,13 +10156,13 @@
       </p:sp>
       <p:sp>
         <p:nvSpPr>
-          <p:cNvPr id="11" name="Oval 10"/>
+          <p:cNvPr id="12" name="Oval 11"/>
           <p:cNvSpPr/>
           <p:nvPr/>
         </p:nvSpPr>
         <p:spPr>
           <a:xfrm>
-            <a:off x="777240" y="4023360"/>
+            <a:off x="777240" y="3941063"/>
             <a:ext cx="566928" cy="566928"/>
           </a:xfrm>
           <a:prstGeom prst="ellipse">
@@ -9801,13 +10200,13 @@
       </p:sp>
       <p:sp>
         <p:nvSpPr>
-          <p:cNvPr id="12" name="TextBox 11"/>
+          <p:cNvPr id="13" name="TextBox 12"/>
           <p:cNvSpPr txBox="1"/>
           <p:nvPr/>
         </p:nvSpPr>
         <p:spPr>
           <a:xfrm>
-            <a:off x="777240" y="4023360"/>
+            <a:off x="777240" y="3941063"/>
             <a:ext cx="566928" cy="566928"/>
           </a:xfrm>
           <a:prstGeom prst="rect">
@@ -9836,14 +10235,14 @@
       </p:sp>
       <p:sp>
         <p:nvSpPr>
-          <p:cNvPr id="13" name="TextBox 12"/>
+          <p:cNvPr id="14" name="TextBox 13"/>
           <p:cNvSpPr txBox="1"/>
           <p:nvPr/>
         </p:nvSpPr>
         <p:spPr>
           <a:xfrm>
-            <a:off x="1554480" y="3986784"/>
-            <a:ext cx="10058400" cy="914400"/>
+            <a:off x="1554480" y="3895343"/>
+            <a:ext cx="10058400" cy="960120"/>
           </a:xfrm>
           <a:prstGeom prst="rect">
             <a:avLst/>
@@ -9877,20 +10276,20 @@
                 </a:solidFill>
                 <a:latin typeface="Calibri"/>
               </a:rPr>
-              <a:t> los recursos formales, narrativos y discursivos con los que se construye su dimensión crítica.</a:t>
-            </a:r>
-          </a:p>
-        </p:txBody>
-      </p:sp>
-      <p:sp>
-        <p:nvSpPr>
-          <p:cNvPr id="14" name="Oval 13"/>
+              <a:t> los recursos formales, narrativos y discursivos empleados, para determinar cómo se construye su dimensión crítica.</a:t>
+            </a:r>
+          </a:p>
+        </p:txBody>
+      </p:sp>
+      <p:sp>
+        <p:nvSpPr>
+          <p:cNvPr id="15" name="Oval 14"/>
           <p:cNvSpPr/>
           <p:nvPr/>
         </p:nvSpPr>
         <p:spPr>
           <a:xfrm>
-            <a:off x="777240" y="5074920"/>
+            <a:off x="777240" y="5020055"/>
             <a:ext cx="566928" cy="566928"/>
           </a:xfrm>
           <a:prstGeom prst="ellipse">
@@ -9928,13 +10327,13 @@
       </p:sp>
       <p:sp>
         <p:nvSpPr>
-          <p:cNvPr id="15" name="TextBox 14"/>
+          <p:cNvPr id="16" name="TextBox 15"/>
           <p:cNvSpPr txBox="1"/>
           <p:nvPr/>
         </p:nvSpPr>
         <p:spPr>
           <a:xfrm>
-            <a:off x="777240" y="5074920"/>
+            <a:off x="777240" y="5020055"/>
             <a:ext cx="566928" cy="566928"/>
           </a:xfrm>
           <a:prstGeom prst="rect">
@@ -9963,14 +10362,14 @@
       </p:sp>
       <p:sp>
         <p:nvSpPr>
-          <p:cNvPr id="16" name="TextBox 15"/>
+          <p:cNvPr id="17" name="TextBox 16"/>
           <p:cNvSpPr txBox="1"/>
           <p:nvPr/>
         </p:nvSpPr>
         <p:spPr>
           <a:xfrm>
-            <a:off x="1554480" y="5038344"/>
-            <a:ext cx="10058400" cy="914400"/>
+            <a:off x="1554480" y="4974335"/>
+            <a:ext cx="10058400" cy="960120"/>
           </a:xfrm>
           <a:prstGeom prst="rect">
             <a:avLst/>
@@ -10004,21 +10403,21 @@
                 </a:solidFill>
                 <a:latin typeface="Calibri"/>
               </a:rPr>
-              <a:t> sobre la descontextualización y apropiación del arte africano: función original de las obras frente a su exhibición en museos occidentales.</a:t>
-            </a:r>
-          </a:p>
-        </p:txBody>
-      </p:sp>
-      <p:sp>
-        <p:nvSpPr>
-          <p:cNvPr id="17" name="Rectangle 16"/>
+              <a:t> sobre cómo el film articula la crítica a la descontextualización y apropiación del arte africano, atendiendo a la función y el significado original de las obras.</a:t>
+            </a:r>
+          </a:p>
+        </p:txBody>
+      </p:sp>
+      <p:sp>
+        <p:nvSpPr>
+          <p:cNvPr id="18" name="Rectangle 17"/>
           <p:cNvSpPr/>
           <p:nvPr/>
         </p:nvSpPr>
         <p:spPr>
           <a:xfrm>
-            <a:off x="502920" y="6327648"/>
-            <a:ext cx="11183112" cy="17780"/>
+            <a:off x="502920" y="6355080"/>
+            <a:ext cx="11183112" cy="15240"/>
           </a:xfrm>
           <a:prstGeom prst="rect">
             <a:avLst/>
@@ -10055,14 +10454,14 @@
       </p:sp>
       <p:sp>
         <p:nvSpPr>
-          <p:cNvPr id="18" name="TextBox 17"/>
+          <p:cNvPr id="19" name="TextBox 18"/>
           <p:cNvSpPr txBox="1"/>
           <p:nvPr/>
         </p:nvSpPr>
         <p:spPr>
           <a:xfrm>
-            <a:off x="502920" y="6400800"/>
-            <a:ext cx="9601200" cy="365760"/>
+            <a:off x="502920" y="6428232"/>
+            <a:ext cx="9601200" cy="320040"/>
           </a:xfrm>
           <a:prstGeom prst="rect">
             <a:avLst/>
@@ -10090,14 +10489,14 @@
       </p:sp>
       <p:sp>
         <p:nvSpPr>
-          <p:cNvPr id="19" name="TextBox 18"/>
+          <p:cNvPr id="20" name="TextBox 19"/>
           <p:cNvSpPr txBox="1"/>
           <p:nvPr/>
         </p:nvSpPr>
         <p:spPr>
           <a:xfrm>
-            <a:off x="10515600" y="6400800"/>
-            <a:ext cx="1170432" cy="365760"/>
+            <a:off x="10515600" y="6428232"/>
+            <a:ext cx="1170432" cy="320040"/>
           </a:xfrm>
           <a:prstGeom prst="rect">
             <a:avLst/>
@@ -10151,14 +10550,53 @@
       <p:grpSpPr/>
       <p:sp>
         <p:nvSpPr>
-          <p:cNvPr id="2" name="Rectangle 1"/>
+          <p:cNvPr id="2" name="TextBox 1"/>
+          <p:cNvSpPr txBox="1"/>
+          <p:nvPr/>
+        </p:nvSpPr>
+        <p:spPr>
+          <a:xfrm>
+            <a:off x="4206240" y="219456"/>
+            <a:ext cx="7479792" cy="502920"/>
+          </a:xfrm>
+          <a:prstGeom prst="rect">
+            <a:avLst/>
+          </a:prstGeom>
+          <a:noFill/>
+        </p:spPr>
+        <p:txBody>
+          <a:bodyPr wrap="square" anchor="t" lIns="0" rIns="0" tIns="0" bIns="0">
+            <a:spAutoFit/>
+          </a:bodyPr>
+          <a:lstStyle/>
+          <a:p>
+            <a:pPr algn="r">
+              <a:lnSpc>
+                <a:spcPct val="100000"/>
+              </a:lnSpc>
+            </a:pPr>
+            <a:r>
+              <a:rPr sz="850" b="0" i="1">
+                <a:solidFill>
+                  <a:srgbClr val="6B645C"/>
+                </a:solidFill>
+                <a:latin typeface="Georgia"/>
+              </a:rPr>
+              <a:t>Más allá del documental de arte: ensayo fílmico y crítica anticolonial en Las estatuas también mueren</a:t>
+            </a:r>
+          </a:p>
+        </p:txBody>
+      </p:sp>
+      <p:sp>
+        <p:nvSpPr>
+          <p:cNvPr id="3" name="Rectangle 2"/>
           <p:cNvSpPr/>
           <p:nvPr/>
         </p:nvSpPr>
         <p:spPr>
           <a:xfrm>
-            <a:off x="502920" y="548640"/>
-            <a:ext cx="128016" cy="1051560"/>
+            <a:off x="502920" y="566928"/>
+            <a:ext cx="128016" cy="960120"/>
           </a:xfrm>
           <a:prstGeom prst="rect">
             <a:avLst/>
@@ -10195,14 +10633,14 @@
       </p:sp>
       <p:sp>
         <p:nvSpPr>
-          <p:cNvPr id="3" name="TextBox 2"/>
+          <p:cNvPr id="4" name="TextBox 3"/>
           <p:cNvSpPr txBox="1"/>
           <p:nvPr/>
         </p:nvSpPr>
         <p:spPr>
           <a:xfrm>
             <a:off x="777240" y="502920"/>
-            <a:ext cx="10698480" cy="320040"/>
+            <a:ext cx="6400800" cy="292608"/>
           </a:xfrm>
           <a:prstGeom prst="rect">
             <a:avLst/>
@@ -10223,21 +10661,21 @@
                 </a:solidFill>
                 <a:latin typeface="Calibri"/>
               </a:rPr>
-              <a:t>METODOLOGÍA APLICADA</a:t>
-            </a:r>
-          </a:p>
-        </p:txBody>
-      </p:sp>
-      <p:sp>
-        <p:nvSpPr>
-          <p:cNvPr id="4" name="TextBox 3"/>
+              <a:t>4</a:t>
+            </a:r>
+          </a:p>
+        </p:txBody>
+      </p:sp>
+      <p:sp>
+        <p:nvSpPr>
+          <p:cNvPr id="5" name="TextBox 4"/>
           <p:cNvSpPr txBox="1"/>
           <p:nvPr/>
         </p:nvSpPr>
         <p:spPr>
           <a:xfrm>
             <a:off x="777240" y="786384"/>
-            <a:ext cx="10881360" cy="868680"/>
+            <a:ext cx="10881360" cy="822960"/>
           </a:xfrm>
           <a:prstGeom prst="rect">
             <a:avLst/>
@@ -10252,31 +10690,31 @@
           <a:p>
             <a:pPr algn="l">
               <a:lnSpc>
-                <a:spcPct val="100000"/>
+                <a:spcPct val="98000"/>
               </a:lnSpc>
             </a:pPr>
             <a:r>
-              <a:rPr sz="3000" b="0" i="0">
+              <a:rPr sz="2700" b="1" i="0">
                 <a:solidFill>
                   <a:srgbClr val="2A2724"/>
                 </a:solidFill>
                 <a:latin typeface="Georgia"/>
               </a:rPr>
-              <a:t>Enfoque y fuentes principales</a:t>
-            </a:r>
-          </a:p>
-        </p:txBody>
-      </p:sp>
-      <p:sp>
-        <p:nvSpPr>
-          <p:cNvPr id="5" name="TextBox 4"/>
+              <a:t>Metodología aplicada</a:t>
+            </a:r>
+          </a:p>
+        </p:txBody>
+      </p:sp>
+      <p:sp>
+        <p:nvSpPr>
+          <p:cNvPr id="6" name="TextBox 5"/>
           <p:cNvSpPr txBox="1"/>
           <p:nvPr/>
         </p:nvSpPr>
         <p:spPr>
           <a:xfrm>
-            <a:off x="777240" y="1783080"/>
-            <a:ext cx="10881360" cy="502920"/>
+            <a:off x="777240" y="1353312"/>
+            <a:ext cx="10881360" cy="365760"/>
           </a:xfrm>
           <a:prstGeom prst="rect">
             <a:avLst/>
@@ -10289,33 +10727,64 @@
           </a:bodyPr>
           <a:lstStyle/>
           <a:p>
-            <a:pPr algn="l">
-              <a:lnSpc>
-                <a:spcPct val="105000"/>
-              </a:lnSpc>
-            </a:pPr>
-            <a:r>
-              <a:rPr sz="1600" b="0" i="1">
-                <a:solidFill>
-                  <a:srgbClr val="6B645C"/>
-                </a:solidFill>
-                <a:latin typeface="Calibri"/>
-              </a:rPr>
-              <a:t>Análisis histórico-artístico y fílmico de un caso de estudio, con lectura crítica de fuentes interdisciplinares y análisis formal del cortometraje.</a:t>
-            </a:r>
-          </a:p>
-        </p:txBody>
-      </p:sp>
-      <p:sp>
-        <p:nvSpPr>
-          <p:cNvPr id="6" name="Rectangle 5"/>
+            <a:pPr algn="l"/>
+            <a:r>
+              <a:rPr sz="1400" b="0" i="1">
+                <a:solidFill>
+                  <a:srgbClr val="7A5236"/>
+                </a:solidFill>
+                <a:latin typeface="Calibri"/>
+              </a:rPr>
+              <a:t>Estudio de caso con enfoque cualitativo e interdisciplinar y análisis histórico-artístico y formal del cortometraje.</a:t>
+            </a:r>
+          </a:p>
+        </p:txBody>
+      </p:sp>
+      <p:sp>
+        <p:nvSpPr>
+          <p:cNvPr id="7" name="TextBox 6"/>
+          <p:cNvSpPr txBox="1"/>
+          <p:nvPr/>
+        </p:nvSpPr>
+        <p:spPr>
+          <a:xfrm>
+            <a:off x="777240" y="2212848"/>
+            <a:ext cx="10881360" cy="320040"/>
+          </a:xfrm>
+          <a:prstGeom prst="rect">
+            <a:avLst/>
+          </a:prstGeom>
+          <a:noFill/>
+        </p:spPr>
+        <p:txBody>
+          <a:bodyPr wrap="square" anchor="t" lIns="0" rIns="0" tIns="0" bIns="0">
+            <a:spAutoFit/>
+          </a:bodyPr>
+          <a:lstStyle/>
+          <a:p>
+            <a:pPr algn="l"/>
+            <a:r>
+              <a:rPr sz="1300" b="1" i="0">
+                <a:solidFill>
+                  <a:srgbClr val="7A5236"/>
+                </a:solidFill>
+                <a:latin typeface="Calibri"/>
+              </a:rPr>
+              <a:t>FUENTES MÁS DESTACADAS</a:t>
+            </a:r>
+          </a:p>
+        </p:txBody>
+      </p:sp>
+      <p:sp>
+        <p:nvSpPr>
+          <p:cNvPr id="8" name="Rectangle 7"/>
           <p:cNvSpPr/>
           <p:nvPr/>
         </p:nvSpPr>
         <p:spPr>
           <a:xfrm>
-            <a:off x="777240" y="2514600"/>
-            <a:ext cx="3520440" cy="1554480"/>
+            <a:off x="777240" y="2606040"/>
+            <a:ext cx="3520440" cy="1481328"/>
           </a:xfrm>
           <a:prstGeom prst="rect">
             <a:avLst/>
@@ -10354,14 +10823,14 @@
       </p:sp>
       <p:sp>
         <p:nvSpPr>
-          <p:cNvPr id="7" name="Rectangle 6"/>
+          <p:cNvPr id="9" name="Rectangle 8"/>
           <p:cNvSpPr/>
           <p:nvPr/>
         </p:nvSpPr>
         <p:spPr>
           <a:xfrm>
-            <a:off x="777240" y="2514600"/>
-            <a:ext cx="91440" cy="1554480"/>
+            <a:off x="777240" y="2606040"/>
+            <a:ext cx="91440" cy="1481328"/>
           </a:xfrm>
           <a:prstGeom prst="rect">
             <a:avLst/>
@@ -10398,14 +10867,14 @@
       </p:sp>
       <p:sp>
         <p:nvSpPr>
-          <p:cNvPr id="8" name="TextBox 7"/>
+          <p:cNvPr id="10" name="TextBox 9"/>
           <p:cNvSpPr txBox="1"/>
           <p:nvPr/>
         </p:nvSpPr>
         <p:spPr>
           <a:xfrm>
-            <a:off x="1033272" y="2679192"/>
-            <a:ext cx="3108960" cy="1280160"/>
+            <a:off x="1033272" y="2752344"/>
+            <a:ext cx="3108960" cy="1207008"/>
           </a:xfrm>
           <a:prstGeom prst="rect">
             <a:avLst/>
@@ -10424,7 +10893,7 @@
               </a:spcAft>
             </a:pPr>
             <a:r>
-              <a:rPr sz="1500" b="1" i="0">
+              <a:rPr sz="1450" b="1" i="0">
                 <a:solidFill>
                   <a:srgbClr val="2A2724"/>
                 </a:solidFill>
@@ -10440,7 +10909,7 @@
               </a:lnSpc>
             </a:pPr>
             <a:r>
-              <a:rPr sz="1250" b="0" i="1">
+              <a:rPr sz="1200" b="0" i="1">
                 <a:solidFill>
                   <a:srgbClr val="6B645C"/>
                 </a:solidFill>
@@ -10453,14 +10922,14 @@
       </p:sp>
       <p:sp>
         <p:nvSpPr>
-          <p:cNvPr id="9" name="Rectangle 8"/>
+          <p:cNvPr id="11" name="Rectangle 10"/>
           <p:cNvSpPr/>
           <p:nvPr/>
         </p:nvSpPr>
         <p:spPr>
           <a:xfrm>
-            <a:off x="4480559" y="2514600"/>
-            <a:ext cx="3520440" cy="1554480"/>
+            <a:off x="4480559" y="2606040"/>
+            <a:ext cx="3520440" cy="1481328"/>
           </a:xfrm>
           <a:prstGeom prst="rect">
             <a:avLst/>
@@ -10499,14 +10968,14 @@
       </p:sp>
       <p:sp>
         <p:nvSpPr>
-          <p:cNvPr id="10" name="Rectangle 9"/>
+          <p:cNvPr id="12" name="Rectangle 11"/>
           <p:cNvSpPr/>
           <p:nvPr/>
         </p:nvSpPr>
         <p:spPr>
           <a:xfrm>
-            <a:off x="4480559" y="2514600"/>
-            <a:ext cx="91440" cy="1554480"/>
+            <a:off x="4480559" y="2606040"/>
+            <a:ext cx="91440" cy="1481328"/>
           </a:xfrm>
           <a:prstGeom prst="rect">
             <a:avLst/>
@@ -10543,14 +11012,14 @@
       </p:sp>
       <p:sp>
         <p:nvSpPr>
-          <p:cNvPr id="11" name="TextBox 10"/>
+          <p:cNvPr id="13" name="TextBox 12"/>
           <p:cNvSpPr txBox="1"/>
           <p:nvPr/>
         </p:nvSpPr>
         <p:spPr>
           <a:xfrm>
-            <a:off x="4736591" y="2679192"/>
-            <a:ext cx="3108960" cy="1280160"/>
+            <a:off x="4736591" y="2752344"/>
+            <a:ext cx="3108960" cy="1207008"/>
           </a:xfrm>
           <a:prstGeom prst="rect">
             <a:avLst/>
@@ -10569,7 +11038,7 @@
               </a:spcAft>
             </a:pPr>
             <a:r>
-              <a:rPr sz="1500" b="1" i="0">
+              <a:rPr sz="1450" b="1" i="0">
                 <a:solidFill>
                   <a:srgbClr val="2A2724"/>
                 </a:solidFill>
@@ -10585,7 +11054,7 @@
               </a:lnSpc>
             </a:pPr>
             <a:r>
-              <a:rPr sz="1250" b="0" i="1">
+              <a:rPr sz="1200" b="0" i="1">
                 <a:solidFill>
                   <a:srgbClr val="6B645C"/>
                 </a:solidFill>
@@ -10598,14 +11067,14 @@
       </p:sp>
       <p:sp>
         <p:nvSpPr>
-          <p:cNvPr id="12" name="Rectangle 11"/>
+          <p:cNvPr id="14" name="Rectangle 13"/>
           <p:cNvSpPr/>
           <p:nvPr/>
         </p:nvSpPr>
         <p:spPr>
           <a:xfrm>
-            <a:off x="8183879" y="2514600"/>
-            <a:ext cx="3520440" cy="1554480"/>
+            <a:off x="8183879" y="2606040"/>
+            <a:ext cx="3520440" cy="1481328"/>
           </a:xfrm>
           <a:prstGeom prst="rect">
             <a:avLst/>
@@ -10644,14 +11113,14 @@
       </p:sp>
       <p:sp>
         <p:nvSpPr>
-          <p:cNvPr id="13" name="Rectangle 12"/>
+          <p:cNvPr id="15" name="Rectangle 14"/>
           <p:cNvSpPr/>
           <p:nvPr/>
         </p:nvSpPr>
         <p:spPr>
           <a:xfrm>
-            <a:off x="8183879" y="2514600"/>
-            <a:ext cx="91440" cy="1554480"/>
+            <a:off x="8183879" y="2606040"/>
+            <a:ext cx="91440" cy="1481328"/>
           </a:xfrm>
           <a:prstGeom prst="rect">
             <a:avLst/>
@@ -10688,14 +11157,14 @@
       </p:sp>
       <p:sp>
         <p:nvSpPr>
-          <p:cNvPr id="14" name="TextBox 13"/>
+          <p:cNvPr id="16" name="TextBox 15"/>
           <p:cNvSpPr txBox="1"/>
           <p:nvPr/>
         </p:nvSpPr>
         <p:spPr>
           <a:xfrm>
-            <a:off x="8439911" y="2679192"/>
-            <a:ext cx="3108960" cy="1280160"/>
+            <a:off x="8439911" y="2752344"/>
+            <a:ext cx="3108960" cy="1207008"/>
           </a:xfrm>
           <a:prstGeom prst="rect">
             <a:avLst/>
@@ -10714,13 +11183,13 @@
               </a:spcAft>
             </a:pPr>
             <a:r>
-              <a:rPr sz="1500" b="1" i="0">
+              <a:rPr sz="1450" b="1" i="0">
                 <a:solidFill>
                   <a:srgbClr val="2A2724"/>
                 </a:solidFill>
                 <a:latin typeface="Calibri"/>
               </a:rPr>
-              <a:t>García Fernández</a:t>
+              <a:t>García Fernández / Peydró</a:t>
             </a:r>
           </a:p>
           <a:p>
@@ -10730,27 +11199,27 @@
               </a:lnSpc>
             </a:pPr>
             <a:r>
-              <a:rPr sz="1250" b="0" i="1">
+              <a:rPr sz="1200" b="0" i="1">
                 <a:solidFill>
                   <a:srgbClr val="6B645C"/>
                 </a:solidFill>
                 <a:latin typeface="Calibri"/>
               </a:rPr>
-              <a:t>El cine sobre arte / La piel bajo las máscaras</a:t>
-            </a:r>
-          </a:p>
-        </p:txBody>
-      </p:sp>
-      <p:sp>
-        <p:nvSpPr>
-          <p:cNvPr id="15" name="Rectangle 14"/>
+              <a:t>El cine sobre arte · La piel bajo las máscaras</a:t>
+            </a:r>
+          </a:p>
+        </p:txBody>
+      </p:sp>
+      <p:sp>
+        <p:nvSpPr>
+          <p:cNvPr id="17" name="Rectangle 16"/>
           <p:cNvSpPr/>
           <p:nvPr/>
         </p:nvSpPr>
         <p:spPr>
           <a:xfrm>
-            <a:off x="777240" y="4297680"/>
-            <a:ext cx="3520440" cy="1554480"/>
+            <a:off x="777240" y="4288536"/>
+            <a:ext cx="3520440" cy="1481328"/>
           </a:xfrm>
           <a:prstGeom prst="rect">
             <a:avLst/>
@@ -10789,14 +11258,14 @@
       </p:sp>
       <p:sp>
         <p:nvSpPr>
-          <p:cNvPr id="16" name="Rectangle 15"/>
+          <p:cNvPr id="18" name="Rectangle 17"/>
           <p:cNvSpPr/>
           <p:nvPr/>
         </p:nvSpPr>
         <p:spPr>
           <a:xfrm>
-            <a:off x="777240" y="4297680"/>
-            <a:ext cx="91440" cy="1554480"/>
+            <a:off x="777240" y="4288536"/>
+            <a:ext cx="91440" cy="1481328"/>
           </a:xfrm>
           <a:prstGeom prst="rect">
             <a:avLst/>
@@ -10833,14 +11302,14 @@
       </p:sp>
       <p:sp>
         <p:nvSpPr>
-          <p:cNvPr id="17" name="TextBox 16"/>
+          <p:cNvPr id="19" name="TextBox 18"/>
           <p:cNvSpPr txBox="1"/>
           <p:nvPr/>
         </p:nvSpPr>
         <p:spPr>
           <a:xfrm>
-            <a:off x="1033272" y="4462272"/>
-            <a:ext cx="3108960" cy="1280160"/>
+            <a:off x="1033272" y="4434840"/>
+            <a:ext cx="3108960" cy="1207008"/>
           </a:xfrm>
           <a:prstGeom prst="rect">
             <a:avLst/>
@@ -10859,7 +11328,7 @@
               </a:spcAft>
             </a:pPr>
             <a:r>
-              <a:rPr sz="1500" b="1" i="0">
+              <a:rPr sz="1450" b="1" i="0">
                 <a:solidFill>
                   <a:srgbClr val="2A2724"/>
                 </a:solidFill>
@@ -10875,7 +11344,7 @@
               </a:lnSpc>
             </a:pPr>
             <a:r>
-              <a:rPr sz="1250" b="0" i="1">
+              <a:rPr sz="1200" b="0" i="1">
                 <a:solidFill>
                   <a:srgbClr val="6B645C"/>
                 </a:solidFill>
@@ -10888,14 +11357,14 @@
       </p:sp>
       <p:sp>
         <p:nvSpPr>
-          <p:cNvPr id="18" name="Rectangle 17"/>
+          <p:cNvPr id="20" name="Rectangle 19"/>
           <p:cNvSpPr/>
           <p:nvPr/>
         </p:nvSpPr>
         <p:spPr>
           <a:xfrm>
-            <a:off x="4480559" y="4297680"/>
-            <a:ext cx="3520440" cy="1554480"/>
+            <a:off x="4480559" y="4288536"/>
+            <a:ext cx="3520440" cy="1481328"/>
           </a:xfrm>
           <a:prstGeom prst="rect">
             <a:avLst/>
@@ -10934,14 +11403,14 @@
       </p:sp>
       <p:sp>
         <p:nvSpPr>
-          <p:cNvPr id="19" name="Rectangle 18"/>
+          <p:cNvPr id="21" name="Rectangle 20"/>
           <p:cNvSpPr/>
           <p:nvPr/>
         </p:nvSpPr>
         <p:spPr>
           <a:xfrm>
-            <a:off x="4480559" y="4297680"/>
-            <a:ext cx="91440" cy="1554480"/>
+            <a:off x="4480559" y="4288536"/>
+            <a:ext cx="91440" cy="1481328"/>
           </a:xfrm>
           <a:prstGeom prst="rect">
             <a:avLst/>
@@ -10978,14 +11447,14 @@
       </p:sp>
       <p:sp>
         <p:nvSpPr>
-          <p:cNvPr id="20" name="TextBox 19"/>
+          <p:cNvPr id="22" name="TextBox 21"/>
           <p:cNvSpPr txBox="1"/>
           <p:nvPr/>
         </p:nvSpPr>
         <p:spPr>
           <a:xfrm>
-            <a:off x="4736591" y="4462272"/>
-            <a:ext cx="3108960" cy="1280160"/>
+            <a:off x="4736591" y="4434840"/>
+            <a:ext cx="3108960" cy="1207008"/>
           </a:xfrm>
           <a:prstGeom prst="rect">
             <a:avLst/>
@@ -11004,13 +11473,13 @@
               </a:spcAft>
             </a:pPr>
             <a:r>
-              <a:rPr sz="1500" b="1" i="0">
+              <a:rPr sz="1450" b="1" i="0">
                 <a:solidFill>
                   <a:srgbClr val="2A2724"/>
                 </a:solidFill>
                 <a:latin typeface="Calibri"/>
               </a:rPr>
-              <a:t>Sarr &amp; Savoy</a:t>
+              <a:t>Ceamanos &amp; Kabunda</a:t>
             </a:r>
           </a:p>
           <a:p>
@@ -11020,27 +11489,27 @@
               </a:lnSpc>
             </a:pPr>
             <a:r>
-              <a:rPr sz="1250" b="0" i="1">
+              <a:rPr sz="1200" b="0" i="1">
                 <a:solidFill>
                   <a:srgbClr val="6B645C"/>
                 </a:solidFill>
                 <a:latin typeface="Calibri"/>
               </a:rPr>
-              <a:t>The Restitution of African Cultural Heritage (2018)</a:t>
-            </a:r>
-          </a:p>
-        </p:txBody>
-      </p:sp>
-      <p:sp>
-        <p:nvSpPr>
-          <p:cNvPr id="21" name="Rectangle 20"/>
+              <a:t>El Reparto de África (2016)</a:t>
+            </a:r>
+          </a:p>
+        </p:txBody>
+      </p:sp>
+      <p:sp>
+        <p:nvSpPr>
+          <p:cNvPr id="23" name="Rectangle 22"/>
           <p:cNvSpPr/>
           <p:nvPr/>
         </p:nvSpPr>
         <p:spPr>
           <a:xfrm>
-            <a:off x="8183879" y="4297680"/>
-            <a:ext cx="3520440" cy="1554480"/>
+            <a:off x="8183879" y="4288536"/>
+            <a:ext cx="3520440" cy="1481328"/>
           </a:xfrm>
           <a:prstGeom prst="rect">
             <a:avLst/>
@@ -11079,14 +11548,14 @@
       </p:sp>
       <p:sp>
         <p:nvSpPr>
-          <p:cNvPr id="22" name="Rectangle 21"/>
+          <p:cNvPr id="24" name="Rectangle 23"/>
           <p:cNvSpPr/>
           <p:nvPr/>
         </p:nvSpPr>
         <p:spPr>
           <a:xfrm>
-            <a:off x="8183879" y="4297680"/>
-            <a:ext cx="91440" cy="1554480"/>
+            <a:off x="8183879" y="4288536"/>
+            <a:ext cx="91440" cy="1481328"/>
           </a:xfrm>
           <a:prstGeom prst="rect">
             <a:avLst/>
@@ -11123,14 +11592,14 @@
       </p:sp>
       <p:sp>
         <p:nvSpPr>
-          <p:cNvPr id="23" name="TextBox 22"/>
+          <p:cNvPr id="25" name="TextBox 24"/>
           <p:cNvSpPr txBox="1"/>
           <p:nvPr/>
         </p:nvSpPr>
         <p:spPr>
           <a:xfrm>
-            <a:off x="8439911" y="4462272"/>
-            <a:ext cx="3108960" cy="1280160"/>
+            <a:off x="8439911" y="4434840"/>
+            <a:ext cx="3108960" cy="1207008"/>
           </a:xfrm>
           <a:prstGeom prst="rect">
             <a:avLst/>
@@ -11149,13 +11618,13 @@
               </a:spcAft>
             </a:pPr>
             <a:r>
-              <a:rPr sz="1500" b="1" i="0">
+              <a:rPr sz="1450" b="1" i="0">
                 <a:solidFill>
                   <a:srgbClr val="2A2724"/>
                 </a:solidFill>
                 <a:latin typeface="Calibri"/>
               </a:rPr>
-              <a:t>Alter / Lupton</a:t>
+              <a:t>Sarr &amp; Savoy</a:t>
             </a:r>
           </a:p>
           <a:p>
@@ -11165,27 +11634,27 @@
               </a:lnSpc>
             </a:pPr>
             <a:r>
-              <a:rPr sz="1250" b="0" i="1">
+              <a:rPr sz="1200" b="0" i="1">
                 <a:solidFill>
                   <a:srgbClr val="6B645C"/>
                 </a:solidFill>
                 <a:latin typeface="Calibri"/>
               </a:rPr>
-              <a:t>Chris Marker — monografías de referencia</a:t>
-            </a:r>
-          </a:p>
-        </p:txBody>
-      </p:sp>
-      <p:sp>
-        <p:nvSpPr>
-          <p:cNvPr id="24" name="Rectangle 23"/>
+              <a:t>The Restitution of African Cultural Heritage (2018)</a:t>
+            </a:r>
+          </a:p>
+        </p:txBody>
+      </p:sp>
+      <p:sp>
+        <p:nvSpPr>
+          <p:cNvPr id="26" name="Rectangle 25"/>
           <p:cNvSpPr/>
           <p:nvPr/>
         </p:nvSpPr>
         <p:spPr>
           <a:xfrm>
-            <a:off x="502920" y="6327648"/>
-            <a:ext cx="11183112" cy="17780"/>
+            <a:off x="502920" y="6355080"/>
+            <a:ext cx="11183112" cy="15240"/>
           </a:xfrm>
           <a:prstGeom prst="rect">
             <a:avLst/>
@@ -11222,14 +11691,14 @@
       </p:sp>
       <p:sp>
         <p:nvSpPr>
-          <p:cNvPr id="25" name="TextBox 24"/>
+          <p:cNvPr id="27" name="TextBox 26"/>
           <p:cNvSpPr txBox="1"/>
           <p:nvPr/>
         </p:nvSpPr>
         <p:spPr>
           <a:xfrm>
-            <a:off x="502920" y="6400800"/>
-            <a:ext cx="9601200" cy="365760"/>
+            <a:off x="502920" y="6428232"/>
+            <a:ext cx="9601200" cy="320040"/>
           </a:xfrm>
           <a:prstGeom prst="rect">
             <a:avLst/>
@@ -11257,14 +11726,14 @@
       </p:sp>
       <p:sp>
         <p:nvSpPr>
-          <p:cNvPr id="26" name="TextBox 25"/>
+          <p:cNvPr id="28" name="TextBox 27"/>
           <p:cNvSpPr txBox="1"/>
           <p:nvPr/>
         </p:nvSpPr>
         <p:spPr>
           <a:xfrm>
-            <a:off x="10515600" y="6400800"/>
-            <a:ext cx="1170432" cy="365760"/>
+            <a:off x="10515600" y="6428232"/>
+            <a:ext cx="1170432" cy="320040"/>
           </a:xfrm>
           <a:prstGeom prst="rect">
             <a:avLst/>
@@ -11318,14 +11787,53 @@
       <p:grpSpPr/>
       <p:sp>
         <p:nvSpPr>
-          <p:cNvPr id="2" name="Rectangle 1"/>
+          <p:cNvPr id="2" name="TextBox 1"/>
+          <p:cNvSpPr txBox="1"/>
+          <p:nvPr/>
+        </p:nvSpPr>
+        <p:spPr>
+          <a:xfrm>
+            <a:off x="4206240" y="219456"/>
+            <a:ext cx="7479792" cy="502920"/>
+          </a:xfrm>
+          <a:prstGeom prst="rect">
+            <a:avLst/>
+          </a:prstGeom>
+          <a:noFill/>
+        </p:spPr>
+        <p:txBody>
+          <a:bodyPr wrap="square" anchor="t" lIns="0" rIns="0" tIns="0" bIns="0">
+            <a:spAutoFit/>
+          </a:bodyPr>
+          <a:lstStyle/>
+          <a:p>
+            <a:pPr algn="r">
+              <a:lnSpc>
+                <a:spcPct val="100000"/>
+              </a:lnSpc>
+            </a:pPr>
+            <a:r>
+              <a:rPr sz="850" b="0" i="1">
+                <a:solidFill>
+                  <a:srgbClr val="6B645C"/>
+                </a:solidFill>
+                <a:latin typeface="Georgia"/>
+              </a:rPr>
+              <a:t>Más allá del documental de arte: ensayo fílmico y crítica anticolonial en Las estatuas también mueren</a:t>
+            </a:r>
+          </a:p>
+        </p:txBody>
+      </p:sp>
+      <p:sp>
+        <p:nvSpPr>
+          <p:cNvPr id="3" name="Rectangle 2"/>
           <p:cNvSpPr/>
           <p:nvPr/>
         </p:nvSpPr>
         <p:spPr>
           <a:xfrm>
-            <a:off x="502920" y="548640"/>
-            <a:ext cx="128016" cy="1051560"/>
+            <a:off x="502920" y="566928"/>
+            <a:ext cx="128016" cy="960120"/>
           </a:xfrm>
           <a:prstGeom prst="rect">
             <a:avLst/>
@@ -11362,14 +11870,14 @@
       </p:sp>
       <p:sp>
         <p:nvSpPr>
-          <p:cNvPr id="3" name="TextBox 2"/>
+          <p:cNvPr id="4" name="TextBox 3"/>
           <p:cNvSpPr txBox="1"/>
           <p:nvPr/>
         </p:nvSpPr>
         <p:spPr>
           <a:xfrm>
             <a:off x="777240" y="502920"/>
-            <a:ext cx="10698480" cy="320040"/>
+            <a:ext cx="6400800" cy="292608"/>
           </a:xfrm>
           <a:prstGeom prst="rect">
             <a:avLst/>
@@ -11397,14 +11905,14 @@
       </p:sp>
       <p:sp>
         <p:nvSpPr>
-          <p:cNvPr id="4" name="TextBox 3"/>
+          <p:cNvPr id="5" name="TextBox 4"/>
           <p:cNvSpPr txBox="1"/>
           <p:nvPr/>
         </p:nvSpPr>
         <p:spPr>
           <a:xfrm>
             <a:off x="777240" y="786384"/>
-            <a:ext cx="10881360" cy="868680"/>
+            <a:ext cx="10881360" cy="822960"/>
           </a:xfrm>
           <a:prstGeom prst="rect">
             <a:avLst/>
@@ -11419,11 +11927,11 @@
           <a:p>
             <a:pPr algn="l">
               <a:lnSpc>
-                <a:spcPct val="100000"/>
+                <a:spcPct val="98000"/>
               </a:lnSpc>
             </a:pPr>
             <a:r>
-              <a:rPr sz="3000" b="0" i="0">
+              <a:rPr sz="2500" b="1" i="0">
                 <a:solidFill>
                   <a:srgbClr val="2A2724"/>
                 </a:solidFill>
@@ -11436,14 +11944,14 @@
       </p:sp>
       <p:sp>
         <p:nvSpPr>
-          <p:cNvPr id="5" name="TextBox 4"/>
+          <p:cNvPr id="6" name="TextBox 5"/>
           <p:cNvSpPr txBox="1"/>
           <p:nvPr/>
         </p:nvSpPr>
         <p:spPr>
           <a:xfrm>
-            <a:off x="777240" y="1828800"/>
-            <a:ext cx="6492240" cy="4023360"/>
+            <a:off x="777240" y="1691640"/>
+            <a:ext cx="6492240" cy="4206240"/>
           </a:xfrm>
           <a:prstGeom prst="rect">
             <a:avLst/>
@@ -11461,11 +11969,11 @@
                 <a:spcPct val="105000"/>
               </a:lnSpc>
               <a:spcAft>
-                <a:spcPts val="1300"/>
+                <a:spcPts val="1200"/>
               </a:spcAft>
             </a:pPr>
             <a:r>
-              <a:rPr sz="1600" b="1">
+              <a:rPr sz="1550" b="1">
                 <a:solidFill>
                   <a:srgbClr val="C08A3E"/>
                 </a:solidFill>
@@ -11474,7 +11982,7 @@
               <a:t>—  </a:t>
             </a:r>
             <a:r>
-              <a:rPr sz="1600" b="1">
+              <a:rPr sz="1550" b="1">
                 <a:solidFill>
                   <a:srgbClr val="2A2724"/>
                 </a:solidFill>
@@ -11483,7 +11991,7 @@
               <a:t>Orígenes: </a:t>
             </a:r>
             <a:r>
-              <a:rPr sz="1600">
+              <a:rPr sz="1550">
                 <a:solidFill>
                   <a:srgbClr val="2A2724"/>
                 </a:solidFill>
@@ -11498,11 +12006,11 @@
                 <a:spcPct val="105000"/>
               </a:lnSpc>
               <a:spcAft>
-                <a:spcPts val="1300"/>
+                <a:spcPts val="1200"/>
               </a:spcAft>
             </a:pPr>
             <a:r>
-              <a:rPr sz="1600" b="1">
+              <a:rPr sz="1550" b="1">
                 <a:solidFill>
                   <a:srgbClr val="C08A3E"/>
                 </a:solidFill>
@@ -11511,7 +12019,7 @@
               <a:t>—  </a:t>
             </a:r>
             <a:r>
-              <a:rPr sz="1600" b="1">
+              <a:rPr sz="1550" b="1">
                 <a:solidFill>
                   <a:srgbClr val="2A2724"/>
                 </a:solidFill>
@@ -11520,7 +12028,7 @@
               <a:t>«Edad de oro» (posguerra): </a:t>
             </a:r>
             <a:r>
-              <a:rPr sz="1600">
+              <a:rPr sz="1550">
                 <a:solidFill>
                   <a:srgbClr val="2A2724"/>
                 </a:solidFill>
@@ -11535,11 +12043,11 @@
                 <a:spcPct val="105000"/>
               </a:lnSpc>
               <a:spcAft>
-                <a:spcPts val="1300"/>
+                <a:spcPts val="1200"/>
               </a:spcAft>
             </a:pPr>
             <a:r>
-              <a:rPr sz="1600" b="1">
+              <a:rPr sz="1550" b="1">
                 <a:solidFill>
                   <a:srgbClr val="C08A3E"/>
                 </a:solidFill>
@@ -11548,7 +12056,7 @@
               <a:t>—  </a:t>
             </a:r>
             <a:r>
-              <a:rPr sz="1600" b="1">
+              <a:rPr sz="1550" b="1">
                 <a:solidFill>
                   <a:srgbClr val="2A2724"/>
                 </a:solidFill>
@@ -11557,13 +12065,13 @@
               <a:t>Caso francés: </a:t>
             </a:r>
             <a:r>
-              <a:rPr sz="1600">
+              <a:rPr sz="1550">
                 <a:solidFill>
                   <a:srgbClr val="2A2724"/>
                 </a:solidFill>
                 <a:latin typeface="Calibri"/>
               </a:rPr>
-              <a:t>del cinéma de qualité hacia un cine más poético y personal; semilla del documental ensayístico.</a:t>
+              <a:t>del cinéma de qualité hacia un cine más poético y personal; germen del documental ensayístico.</a:t>
             </a:r>
           </a:p>
           <a:p>
@@ -11572,11 +12080,11 @@
                 <a:spcPct val="105000"/>
               </a:lnSpc>
               <a:spcAft>
-                <a:spcPts val="1300"/>
+                <a:spcPts val="1200"/>
               </a:spcAft>
             </a:pPr>
             <a:r>
-              <a:rPr sz="1600" b="1">
+              <a:rPr sz="1550" b="1">
                 <a:solidFill>
                   <a:srgbClr val="C08A3E"/>
                 </a:solidFill>
@@ -11585,7 +12093,7 @@
               <a:t>—  </a:t>
             </a:r>
             <a:r>
-              <a:rPr sz="1600" b="1">
+              <a:rPr sz="1550" b="1">
                 <a:solidFill>
                   <a:srgbClr val="2A2724"/>
                 </a:solidFill>
@@ -11594,7 +12102,7 @@
               <a:t>Nueva gramática: </a:t>
             </a:r>
             <a:r>
-              <a:rPr sz="1600">
+              <a:rPr sz="1550">
                 <a:solidFill>
                   <a:srgbClr val="2A2724"/>
                 </a:solidFill>
@@ -11607,14 +12115,14 @@
       </p:sp>
       <p:sp>
         <p:nvSpPr>
-          <p:cNvPr id="6" name="Rectangle 5"/>
+          <p:cNvPr id="7" name="Rectangle 6"/>
           <p:cNvSpPr/>
           <p:nvPr/>
         </p:nvSpPr>
         <p:spPr>
           <a:xfrm>
-            <a:off x="7543800" y="1828800"/>
-            <a:ext cx="4114800" cy="4069080"/>
+            <a:off x="7543800" y="1691640"/>
+            <a:ext cx="4114800" cy="4206240"/>
           </a:xfrm>
           <a:prstGeom prst="rect">
             <a:avLst/>
@@ -11651,13 +12159,13 @@
       </p:sp>
       <p:sp>
         <p:nvSpPr>
-          <p:cNvPr id="7" name="TextBox 6"/>
+          <p:cNvPr id="8" name="TextBox 7"/>
           <p:cNvSpPr txBox="1"/>
           <p:nvPr/>
         </p:nvSpPr>
         <p:spPr>
           <a:xfrm>
-            <a:off x="7818120" y="2011680"/>
+            <a:off x="7818120" y="1874519"/>
             <a:ext cx="3657600" cy="457200"/>
           </a:xfrm>
           <a:prstGeom prst="rect">
@@ -11686,13 +12194,13 @@
       </p:sp>
       <p:sp>
         <p:nvSpPr>
-          <p:cNvPr id="8" name="Oval 7"/>
+          <p:cNvPr id="9" name="Oval 8"/>
           <p:cNvSpPr/>
           <p:nvPr/>
         </p:nvSpPr>
         <p:spPr>
           <a:xfrm>
-            <a:off x="7818120" y="2569464"/>
+            <a:off x="7818120" y="2459736"/>
             <a:ext cx="91440" cy="91440"/>
           </a:xfrm>
           <a:prstGeom prst="ellipse">
@@ -11730,14 +12238,14 @@
       </p:sp>
       <p:sp>
         <p:nvSpPr>
-          <p:cNvPr id="9" name="TextBox 8"/>
+          <p:cNvPr id="10" name="TextBox 9"/>
           <p:cNvSpPr txBox="1"/>
           <p:nvPr/>
         </p:nvSpPr>
         <p:spPr>
           <a:xfrm>
-            <a:off x="8028431" y="2514600"/>
-            <a:ext cx="3520440" cy="822960"/>
+            <a:off x="8028431" y="2395728"/>
+            <a:ext cx="3520440" cy="914400"/>
           </a:xfrm>
           <a:prstGeom prst="rect">
             <a:avLst/>
@@ -11752,39 +12260,39 @@
           <a:p>
             <a:pPr algn="l">
               <a:lnSpc>
-                <a:spcPct val="100000"/>
+                <a:spcPct val="102000"/>
               </a:lnSpc>
             </a:pPr>
             <a:r>
-              <a:rPr sz="1350" b="1" i="0">
+              <a:rPr sz="1300" b="1" i="0">
                 <a:solidFill>
                   <a:srgbClr val="FFFFFF"/>
                 </a:solidFill>
                 <a:latin typeface="Calibri"/>
               </a:rPr>
-              <a:t>UNESCO · FIAF · ICOM  </a:t>
-            </a:r>
-            <a:r>
-              <a:rPr sz="1250" b="0" i="0">
+              <a:t>UNESCO · FIAF (1938) · ICOM (1946)  </a:t>
+            </a:r>
+            <a:r>
+              <a:rPr sz="1200" b="0" i="0">
                 <a:solidFill>
                   <a:srgbClr val="F4F0E9"/>
                 </a:solidFill>
                 <a:latin typeface="Calibri"/>
               </a:rPr>
-              <a:t>marco institucional de la cultura</a:t>
-            </a:r>
-          </a:p>
-        </p:txBody>
-      </p:sp>
-      <p:sp>
-        <p:nvSpPr>
-          <p:cNvPr id="10" name="Oval 9"/>
+              <a:t>marco institucional de la cultura.</a:t>
+            </a:r>
+          </a:p>
+        </p:txBody>
+      </p:sp>
+      <p:sp>
+        <p:nvSpPr>
+          <p:cNvPr id="11" name="Oval 10"/>
           <p:cNvSpPr/>
           <p:nvPr/>
         </p:nvSpPr>
         <p:spPr>
           <a:xfrm>
-            <a:off x="7818120" y="3392424"/>
+            <a:off x="7818120" y="3300984"/>
             <a:ext cx="91440" cy="91440"/>
           </a:xfrm>
           <a:prstGeom prst="ellipse">
@@ -11822,14 +12330,14 @@
       </p:sp>
       <p:sp>
         <p:nvSpPr>
-          <p:cNvPr id="11" name="TextBox 10"/>
+          <p:cNvPr id="12" name="TextBox 11"/>
           <p:cNvSpPr txBox="1"/>
           <p:nvPr/>
         </p:nvSpPr>
         <p:spPr>
           <a:xfrm>
-            <a:off x="8028431" y="3337560"/>
-            <a:ext cx="3520440" cy="822960"/>
+            <a:off x="8028431" y="3236976"/>
+            <a:ext cx="3520440" cy="914400"/>
           </a:xfrm>
           <a:prstGeom prst="rect">
             <a:avLst/>
@@ -11844,11 +12352,11 @@
           <a:p>
             <a:pPr algn="l">
               <a:lnSpc>
-                <a:spcPct val="100000"/>
+                <a:spcPct val="102000"/>
               </a:lnSpc>
             </a:pPr>
             <a:r>
-              <a:rPr sz="1350" b="1" i="0">
+              <a:rPr sz="1300" b="1" i="0">
                 <a:solidFill>
                   <a:srgbClr val="FFFFFF"/>
                 </a:solidFill>
@@ -11857,26 +12365,26 @@
               <a:t>26 jun. 1948  </a:t>
             </a:r>
             <a:r>
-              <a:rPr sz="1250" b="0" i="0">
+              <a:rPr sz="1200" b="0" i="0">
                 <a:solidFill>
                   <a:srgbClr val="F4F0E9"/>
                 </a:solidFill>
                 <a:latin typeface="Calibri"/>
               </a:rPr>
-              <a:t>I Conferencia Internacional sobre el Cine de Arte (Louvre y Musée de l'Homme) → nace la FIFA</a:t>
-            </a:r>
-          </a:p>
-        </p:txBody>
-      </p:sp>
-      <p:sp>
-        <p:nvSpPr>
-          <p:cNvPr id="12" name="Oval 11"/>
+              <a:t>I Conferencia Internacional sobre el Cine de Arte (Louvre y Musée de l'Homme) → nace la FIFA.</a:t>
+            </a:r>
+          </a:p>
+        </p:txBody>
+      </p:sp>
+      <p:sp>
+        <p:nvSpPr>
+          <p:cNvPr id="13" name="Oval 12"/>
           <p:cNvSpPr/>
           <p:nvPr/>
         </p:nvSpPr>
         <p:spPr>
           <a:xfrm>
-            <a:off x="7818120" y="4215383"/>
+            <a:off x="7818120" y="4142232"/>
             <a:ext cx="91440" cy="91440"/>
           </a:xfrm>
           <a:prstGeom prst="ellipse">
@@ -11914,14 +12422,14 @@
       </p:sp>
       <p:sp>
         <p:nvSpPr>
-          <p:cNvPr id="13" name="TextBox 12"/>
+          <p:cNvPr id="14" name="TextBox 13"/>
           <p:cNvSpPr txBox="1"/>
           <p:nvPr/>
         </p:nvSpPr>
         <p:spPr>
           <a:xfrm>
-            <a:off x="8028431" y="4160520"/>
-            <a:ext cx="3520440" cy="822960"/>
+            <a:off x="8028431" y="4078224"/>
+            <a:ext cx="3520440" cy="914400"/>
           </a:xfrm>
           <a:prstGeom prst="rect">
             <a:avLst/>
@@ -11936,11 +12444,11 @@
           <a:p>
             <a:pPr algn="l">
               <a:lnSpc>
-                <a:spcPct val="100000"/>
+                <a:spcPct val="102000"/>
               </a:lnSpc>
             </a:pPr>
             <a:r>
-              <a:rPr sz="1350" b="1" i="0">
+              <a:rPr sz="1300" b="1" i="0">
                 <a:solidFill>
                   <a:srgbClr val="FFFFFF"/>
                 </a:solidFill>
@@ -11949,26 +12457,26 @@
               <a:t>1950  </a:t>
             </a:r>
             <a:r>
-              <a:rPr sz="1250" b="0" i="0">
+              <a:rPr sz="1200" b="0" i="0">
                 <a:solidFill>
                   <a:srgbClr val="F4F0E9"/>
                 </a:solidFill>
                 <a:latin typeface="Calibri"/>
               </a:rPr>
-              <a:t>Bolen define la «película de arte» (Bruselas)</a:t>
-            </a:r>
-          </a:p>
-        </p:txBody>
-      </p:sp>
-      <p:sp>
-        <p:nvSpPr>
-          <p:cNvPr id="14" name="Oval 13"/>
+              <a:t>Francis Bolen define la «película de arte» (congreso de Bruselas).</a:t>
+            </a:r>
+          </a:p>
+        </p:txBody>
+      </p:sp>
+      <p:sp>
+        <p:nvSpPr>
+          <p:cNvPr id="15" name="Oval 14"/>
           <p:cNvSpPr/>
           <p:nvPr/>
         </p:nvSpPr>
         <p:spPr>
           <a:xfrm>
-            <a:off x="7818120" y="5038344"/>
+            <a:off x="7818120" y="4983480"/>
             <a:ext cx="91440" cy="91440"/>
           </a:xfrm>
           <a:prstGeom prst="ellipse">
@@ -12006,14 +12514,14 @@
       </p:sp>
       <p:sp>
         <p:nvSpPr>
-          <p:cNvPr id="15" name="TextBox 14"/>
+          <p:cNvPr id="16" name="TextBox 15"/>
           <p:cNvSpPr txBox="1"/>
           <p:nvPr/>
         </p:nvSpPr>
         <p:spPr>
           <a:xfrm>
-            <a:off x="8028431" y="4983480"/>
-            <a:ext cx="3520440" cy="822960"/>
+            <a:off x="8028431" y="4919472"/>
+            <a:ext cx="3520440" cy="914400"/>
           </a:xfrm>
           <a:prstGeom prst="rect">
             <a:avLst/>
@@ -12028,11 +12536,11 @@
           <a:p>
             <a:pPr algn="l">
               <a:lnSpc>
-                <a:spcPct val="100000"/>
+                <a:spcPct val="102000"/>
               </a:lnSpc>
             </a:pPr>
             <a:r>
-              <a:rPr sz="1350" b="1" i="0">
+              <a:rPr sz="1300" b="1" i="0">
                 <a:solidFill>
                   <a:srgbClr val="FFFFFF"/>
                 </a:solidFill>
@@ -12041,27 +12549,27 @@
               <a:t>1952-53  </a:t>
             </a:r>
             <a:r>
-              <a:rPr sz="1250" b="0" i="0">
+              <a:rPr sz="1200" b="0" i="0">
                 <a:solidFill>
                   <a:srgbClr val="F4F0E9"/>
                 </a:solidFill>
                 <a:latin typeface="Calibri"/>
               </a:rPr>
-              <a:t>la UNESCO reconoce la FIFA; subvención de sus actividades</a:t>
-            </a:r>
-          </a:p>
-        </p:txBody>
-      </p:sp>
-      <p:sp>
-        <p:nvSpPr>
-          <p:cNvPr id="16" name="Rectangle 15"/>
+              <a:t>la UNESCO reconoce la FIFA, que pasa a recibir subvención.</a:t>
+            </a:r>
+          </a:p>
+        </p:txBody>
+      </p:sp>
+      <p:sp>
+        <p:nvSpPr>
+          <p:cNvPr id="17" name="Rectangle 16"/>
           <p:cNvSpPr/>
           <p:nvPr/>
         </p:nvSpPr>
         <p:spPr>
           <a:xfrm>
-            <a:off x="502920" y="6327648"/>
-            <a:ext cx="11183112" cy="17780"/>
+            <a:off x="502920" y="6355080"/>
+            <a:ext cx="11183112" cy="15240"/>
           </a:xfrm>
           <a:prstGeom prst="rect">
             <a:avLst/>
@@ -12098,14 +12606,14 @@
       </p:sp>
       <p:sp>
         <p:nvSpPr>
-          <p:cNvPr id="17" name="TextBox 16"/>
+          <p:cNvPr id="18" name="TextBox 17"/>
           <p:cNvSpPr txBox="1"/>
           <p:nvPr/>
         </p:nvSpPr>
         <p:spPr>
           <a:xfrm>
-            <a:off x="502920" y="6400800"/>
-            <a:ext cx="9601200" cy="365760"/>
+            <a:off x="502920" y="6428232"/>
+            <a:ext cx="9601200" cy="320040"/>
           </a:xfrm>
           <a:prstGeom prst="rect">
             <a:avLst/>
@@ -12133,14 +12641,14 @@
       </p:sp>
       <p:sp>
         <p:nvSpPr>
-          <p:cNvPr id="18" name="TextBox 17"/>
+          <p:cNvPr id="19" name="TextBox 18"/>
           <p:cNvSpPr txBox="1"/>
           <p:nvPr/>
         </p:nvSpPr>
         <p:spPr>
           <a:xfrm>
-            <a:off x="10515600" y="6400800"/>
-            <a:ext cx="1170432" cy="365760"/>
+            <a:off x="10515600" y="6428232"/>
+            <a:ext cx="1170432" cy="320040"/>
           </a:xfrm>
           <a:prstGeom prst="rect">
             <a:avLst/>
@@ -12194,14 +12702,53 @@
       <p:grpSpPr/>
       <p:sp>
         <p:nvSpPr>
-          <p:cNvPr id="2" name="Rectangle 1"/>
+          <p:cNvPr id="2" name="TextBox 1"/>
+          <p:cNvSpPr txBox="1"/>
+          <p:nvPr/>
+        </p:nvSpPr>
+        <p:spPr>
+          <a:xfrm>
+            <a:off x="4206240" y="219456"/>
+            <a:ext cx="7479792" cy="502920"/>
+          </a:xfrm>
+          <a:prstGeom prst="rect">
+            <a:avLst/>
+          </a:prstGeom>
+          <a:noFill/>
+        </p:spPr>
+        <p:txBody>
+          <a:bodyPr wrap="square" anchor="t" lIns="0" rIns="0" tIns="0" bIns="0">
+            <a:spAutoFit/>
+          </a:bodyPr>
+          <a:lstStyle/>
+          <a:p>
+            <a:pPr algn="r">
+              <a:lnSpc>
+                <a:spcPct val="100000"/>
+              </a:lnSpc>
+            </a:pPr>
+            <a:r>
+              <a:rPr sz="850" b="0" i="1">
+                <a:solidFill>
+                  <a:srgbClr val="6B645C"/>
+                </a:solidFill>
+                <a:latin typeface="Georgia"/>
+              </a:rPr>
+              <a:t>Más allá del documental de arte: ensayo fílmico y crítica anticolonial en Las estatuas también mueren</a:t>
+            </a:r>
+          </a:p>
+        </p:txBody>
+      </p:sp>
+      <p:sp>
+        <p:nvSpPr>
+          <p:cNvPr id="3" name="Rectangle 2"/>
           <p:cNvSpPr/>
           <p:nvPr/>
         </p:nvSpPr>
         <p:spPr>
           <a:xfrm>
-            <a:off x="502920" y="548640"/>
-            <a:ext cx="128016" cy="1051560"/>
+            <a:off x="502920" y="566928"/>
+            <a:ext cx="128016" cy="960120"/>
           </a:xfrm>
           <a:prstGeom prst="rect">
             <a:avLst/>
@@ -12238,14 +12785,14 @@
       </p:sp>
       <p:sp>
         <p:nvSpPr>
-          <p:cNvPr id="3" name="TextBox 2"/>
+          <p:cNvPr id="4" name="TextBox 3"/>
           <p:cNvSpPr txBox="1"/>
           <p:nvPr/>
         </p:nvSpPr>
         <p:spPr>
           <a:xfrm>
             <a:off x="777240" y="502920"/>
-            <a:ext cx="10698480" cy="320040"/>
+            <a:ext cx="6400800" cy="292608"/>
           </a:xfrm>
           <a:prstGeom prst="rect">
             <a:avLst/>
@@ -12273,14 +12820,14 @@
       </p:sp>
       <p:sp>
         <p:nvSpPr>
-          <p:cNvPr id="4" name="TextBox 3"/>
+          <p:cNvPr id="5" name="TextBox 4"/>
           <p:cNvSpPr txBox="1"/>
           <p:nvPr/>
         </p:nvSpPr>
         <p:spPr>
           <a:xfrm>
             <a:off x="777240" y="786384"/>
-            <a:ext cx="10881360" cy="868680"/>
+            <a:ext cx="10881360" cy="822960"/>
           </a:xfrm>
           <a:prstGeom prst="rect">
             <a:avLst/>
@@ -12295,30 +12842,30 @@
           <a:p>
             <a:pPr algn="l">
               <a:lnSpc>
-                <a:spcPct val="100000"/>
+                <a:spcPct val="98000"/>
               </a:lnSpc>
             </a:pPr>
             <a:r>
-              <a:rPr sz="3000" b="0" i="0">
+              <a:rPr sz="2400" b="1" i="0">
                 <a:solidFill>
                   <a:srgbClr val="2A2724"/>
                 </a:solidFill>
                 <a:latin typeface="Georgia"/>
               </a:rPr>
-              <a:t>Colonialismo, museos y mercado del arte africano</a:t>
-            </a:r>
-          </a:p>
-        </p:txBody>
-      </p:sp>
-      <p:sp>
-        <p:nvSpPr>
-          <p:cNvPr id="5" name="Rectangle 4"/>
+              <a:t>El colonialismo africano y su manifiesto en el arte</a:t>
+            </a:r>
+          </a:p>
+        </p:txBody>
+      </p:sp>
+      <p:sp>
+        <p:nvSpPr>
+          <p:cNvPr id="6" name="Rectangle 5"/>
           <p:cNvSpPr/>
           <p:nvPr/>
         </p:nvSpPr>
         <p:spPr>
           <a:xfrm>
-            <a:off x="777240" y="1828800"/>
+            <a:off x="777240" y="1783080"/>
             <a:ext cx="3520440" cy="502920"/>
           </a:xfrm>
           <a:prstGeom prst="rect">
@@ -12356,13 +12903,13 @@
       </p:sp>
       <p:sp>
         <p:nvSpPr>
-          <p:cNvPr id="6" name="TextBox 5"/>
+          <p:cNvPr id="7" name="TextBox 6"/>
           <p:cNvSpPr txBox="1"/>
           <p:nvPr/>
         </p:nvSpPr>
         <p:spPr>
           <a:xfrm>
-            <a:off x="777240" y="1828800"/>
+            <a:off x="777240" y="1783080"/>
             <a:ext cx="3520440" cy="502920"/>
           </a:xfrm>
           <a:prstGeom prst="rect">
@@ -12378,7 +12925,7 @@
           <a:p>
             <a:pPr algn="ctr"/>
             <a:r>
-              <a:rPr sz="1450" b="1" i="0">
+              <a:rPr sz="1400" b="1" i="0">
                 <a:solidFill>
                   <a:srgbClr val="FFFFFF"/>
                 </a:solidFill>
@@ -12391,14 +12938,14 @@
       </p:sp>
       <p:sp>
         <p:nvSpPr>
-          <p:cNvPr id="7" name="Rectangle 6"/>
+          <p:cNvPr id="8" name="Rectangle 7"/>
           <p:cNvSpPr/>
           <p:nvPr/>
         </p:nvSpPr>
         <p:spPr>
           <a:xfrm>
-            <a:off x="777240" y="2331720"/>
-            <a:ext cx="3520440" cy="3566160"/>
+            <a:off x="777240" y="2286000"/>
+            <a:ext cx="3520440" cy="3611880"/>
           </a:xfrm>
           <a:prstGeom prst="rect">
             <a:avLst/>
@@ -12437,14 +12984,14 @@
       </p:sp>
       <p:sp>
         <p:nvSpPr>
-          <p:cNvPr id="8" name="TextBox 7"/>
+          <p:cNvPr id="9" name="TextBox 8"/>
           <p:cNvSpPr txBox="1"/>
           <p:nvPr/>
         </p:nvSpPr>
         <p:spPr>
           <a:xfrm>
-            <a:off x="978408" y="2542032"/>
-            <a:ext cx="3118104" cy="3200400"/>
+            <a:off x="978408" y="2487168"/>
+            <a:ext cx="3118104" cy="3291840"/>
           </a:xfrm>
           <a:prstGeom prst="rect">
             <a:avLst/>
@@ -12466,7 +13013,7 @@
               </a:spcAft>
             </a:pPr>
             <a:r>
-              <a:rPr sz="1300" b="1">
+              <a:rPr sz="1250" b="1">
                 <a:solidFill>
                   <a:srgbClr val="C08A3E"/>
                 </a:solidFill>
@@ -12475,7 +13022,7 @@
               <a:t>—  </a:t>
             </a:r>
             <a:r>
-              <a:rPr sz="1300">
+              <a:rPr sz="1250">
                 <a:solidFill>
                   <a:srgbClr val="2A2724"/>
                 </a:solidFill>
@@ -12494,7 +13041,7 @@
               </a:spcAft>
             </a:pPr>
             <a:r>
-              <a:rPr sz="1300" b="1">
+              <a:rPr sz="1250" b="1">
                 <a:solidFill>
                   <a:srgbClr val="C08A3E"/>
                 </a:solidFill>
@@ -12503,7 +13050,7 @@
               <a:t>—  </a:t>
             </a:r>
             <a:r>
-              <a:rPr sz="1300">
+              <a:rPr sz="1250">
                 <a:solidFill>
                   <a:srgbClr val="2A2724"/>
                 </a:solidFill>
@@ -12516,13 +13063,13 @@
       </p:sp>
       <p:sp>
         <p:nvSpPr>
-          <p:cNvPr id="9" name="Rectangle 8"/>
+          <p:cNvPr id="10" name="Rectangle 9"/>
           <p:cNvSpPr/>
           <p:nvPr/>
         </p:nvSpPr>
         <p:spPr>
           <a:xfrm>
-            <a:off x="4480559" y="1828800"/>
+            <a:off x="4480559" y="1783080"/>
             <a:ext cx="3520440" cy="502920"/>
           </a:xfrm>
           <a:prstGeom prst="rect">
@@ -12560,13 +13107,13 @@
       </p:sp>
       <p:sp>
         <p:nvSpPr>
-          <p:cNvPr id="10" name="TextBox 9"/>
+          <p:cNvPr id="11" name="TextBox 10"/>
           <p:cNvSpPr txBox="1"/>
           <p:nvPr/>
         </p:nvSpPr>
         <p:spPr>
           <a:xfrm>
-            <a:off x="4480559" y="1828800"/>
+            <a:off x="4480559" y="1783080"/>
             <a:ext cx="3520440" cy="502920"/>
           </a:xfrm>
           <a:prstGeom prst="rect">
@@ -12582,7 +13129,7 @@
           <a:p>
             <a:pPr algn="ctr"/>
             <a:r>
-              <a:rPr sz="1450" b="1" i="0">
+              <a:rPr sz="1400" b="1" i="0">
                 <a:solidFill>
                   <a:srgbClr val="FFFFFF"/>
                 </a:solidFill>
@@ -12595,14 +13142,14 @@
       </p:sp>
       <p:sp>
         <p:nvSpPr>
-          <p:cNvPr id="11" name="Rectangle 10"/>
+          <p:cNvPr id="12" name="Rectangle 11"/>
           <p:cNvSpPr/>
           <p:nvPr/>
         </p:nvSpPr>
         <p:spPr>
           <a:xfrm>
-            <a:off x="4480559" y="2331720"/>
-            <a:ext cx="3520440" cy="3566160"/>
+            <a:off x="4480559" y="2286000"/>
+            <a:ext cx="3520440" cy="3611880"/>
           </a:xfrm>
           <a:prstGeom prst="rect">
             <a:avLst/>
@@ -12641,14 +13188,14 @@
       </p:sp>
       <p:sp>
         <p:nvSpPr>
-          <p:cNvPr id="12" name="TextBox 11"/>
+          <p:cNvPr id="13" name="TextBox 12"/>
           <p:cNvSpPr txBox="1"/>
           <p:nvPr/>
         </p:nvSpPr>
         <p:spPr>
           <a:xfrm>
-            <a:off x="4681727" y="2542032"/>
-            <a:ext cx="3118104" cy="3200400"/>
+            <a:off x="4681727" y="2487168"/>
+            <a:ext cx="3118104" cy="3291840"/>
           </a:xfrm>
           <a:prstGeom prst="rect">
             <a:avLst/>
@@ -12670,7 +13217,7 @@
               </a:spcAft>
             </a:pPr>
             <a:r>
-              <a:rPr sz="1300" b="1">
+              <a:rPr sz="1250" b="1">
                 <a:solidFill>
                   <a:srgbClr val="C08A3E"/>
                 </a:solidFill>
@@ -12679,13 +13226,13 @@
               <a:t>—  </a:t>
             </a:r>
             <a:r>
-              <a:rPr sz="1300">
+              <a:rPr sz="1250">
                 <a:solidFill>
                   <a:srgbClr val="2A2724"/>
                 </a:solidFill>
                 <a:latin typeface="Calibri"/>
               </a:rPr>
-              <a:t>Museo del Trocadero (1892) y los «zoos humanos» etnocéntricos.</a:t>
+              <a:t>Museo del Trocadero (1892) y los «zoos humanos».</a:t>
             </a:r>
           </a:p>
           <a:p>
@@ -12698,7 +13245,7 @@
               </a:spcAft>
             </a:pPr>
             <a:r>
-              <a:rPr sz="1300" b="1">
+              <a:rPr sz="1250" b="1">
                 <a:solidFill>
                   <a:srgbClr val="C08A3E"/>
                 </a:solidFill>
@@ -12707,13 +13254,13 @@
               <a:t>—  </a:t>
             </a:r>
             <a:r>
-              <a:rPr sz="1300">
+              <a:rPr sz="1250">
                 <a:solidFill>
                   <a:srgbClr val="2A2724"/>
                 </a:solidFill>
                 <a:latin typeface="Calibri"/>
               </a:rPr>
-              <a:t>Paul Rivet funda el Musée de l'Homme (1938): «museo-laboratorio».</a:t>
+              <a:t>Paul Rivet inaugura el Musée de l'Homme (1938): «museo-laboratorio».</a:t>
             </a:r>
           </a:p>
           <a:p>
@@ -12726,7 +13273,7 @@
               </a:spcAft>
             </a:pPr>
             <a:r>
-              <a:rPr sz="1300" b="1">
+              <a:rPr sz="1250" b="1">
                 <a:solidFill>
                   <a:srgbClr val="C08A3E"/>
                 </a:solidFill>
@@ -12735,7 +13282,7 @@
               <a:t>—  </a:t>
             </a:r>
             <a:r>
-              <a:rPr sz="1300">
+              <a:rPr sz="1250">
                 <a:solidFill>
                   <a:srgbClr val="2A2724"/>
                 </a:solidFill>
@@ -12748,13 +13295,13 @@
       </p:sp>
       <p:sp>
         <p:nvSpPr>
-          <p:cNvPr id="13" name="Rectangle 12"/>
+          <p:cNvPr id="14" name="Rectangle 13"/>
           <p:cNvSpPr/>
           <p:nvPr/>
         </p:nvSpPr>
         <p:spPr>
           <a:xfrm>
-            <a:off x="8183879" y="1828800"/>
+            <a:off x="8183879" y="1783080"/>
             <a:ext cx="3520440" cy="502920"/>
           </a:xfrm>
           <a:prstGeom prst="rect">
@@ -12792,13 +13339,13 @@
       </p:sp>
       <p:sp>
         <p:nvSpPr>
-          <p:cNvPr id="14" name="TextBox 13"/>
+          <p:cNvPr id="15" name="TextBox 14"/>
           <p:cNvSpPr txBox="1"/>
           <p:nvPr/>
         </p:nvSpPr>
         <p:spPr>
           <a:xfrm>
-            <a:off x="8183879" y="1828800"/>
+            <a:off x="8183879" y="1783080"/>
             <a:ext cx="3520440" cy="502920"/>
           </a:xfrm>
           <a:prstGeom prst="rect">
@@ -12814,7 +13361,7 @@
           <a:p>
             <a:pPr algn="ctr"/>
             <a:r>
-              <a:rPr sz="1450" b="1" i="0">
+              <a:rPr sz="1400" b="1" i="0">
                 <a:solidFill>
                   <a:srgbClr val="FFFFFF"/>
                 </a:solidFill>
@@ -12827,14 +13374,14 @@
       </p:sp>
       <p:sp>
         <p:nvSpPr>
-          <p:cNvPr id="15" name="Rectangle 14"/>
+          <p:cNvPr id="16" name="Rectangle 15"/>
           <p:cNvSpPr/>
           <p:nvPr/>
         </p:nvSpPr>
         <p:spPr>
           <a:xfrm>
-            <a:off x="8183879" y="2331720"/>
-            <a:ext cx="3520440" cy="3566160"/>
+            <a:off x="8183879" y="2286000"/>
+            <a:ext cx="3520440" cy="3611880"/>
           </a:xfrm>
           <a:prstGeom prst="rect">
             <a:avLst/>
@@ -12873,14 +13420,14 @@
       </p:sp>
       <p:sp>
         <p:nvSpPr>
-          <p:cNvPr id="16" name="TextBox 15"/>
+          <p:cNvPr id="17" name="TextBox 16"/>
           <p:cNvSpPr txBox="1"/>
           <p:nvPr/>
         </p:nvSpPr>
         <p:spPr>
           <a:xfrm>
-            <a:off x="8385047" y="2542032"/>
-            <a:ext cx="3118104" cy="3200400"/>
+            <a:off x="8385047" y="2487168"/>
+            <a:ext cx="3118104" cy="3291840"/>
           </a:xfrm>
           <a:prstGeom prst="rect">
             <a:avLst/>
@@ -12902,7 +13449,7 @@
               </a:spcAft>
             </a:pPr>
             <a:r>
-              <a:rPr sz="1300" b="1">
+              <a:rPr sz="1250" b="1">
                 <a:solidFill>
                   <a:srgbClr val="C08A3E"/>
                 </a:solidFill>
@@ -12911,13 +13458,13 @@
               <a:t>—  </a:t>
             </a:r>
             <a:r>
-              <a:rPr sz="1300">
+              <a:rPr sz="1250">
                 <a:solidFill>
                   <a:srgbClr val="2A2724"/>
                 </a:solidFill>
                 <a:latin typeface="Calibri"/>
               </a:rPr>
-              <a:t>Tourist / airport art (Jules-Rosette): obras adaptadas al gusto europeo.</a:t>
+              <a:t>Tourist art / airport art (Jules-Rosette): obras adaptadas al gusto europeo.</a:t>
             </a:r>
           </a:p>
           <a:p>
@@ -12930,7 +13477,7 @@
               </a:spcAft>
             </a:pPr>
             <a:r>
-              <a:rPr sz="1300" b="1">
+              <a:rPr sz="1250" b="1">
                 <a:solidFill>
                   <a:srgbClr val="C08A3E"/>
                 </a:solidFill>
@@ -12939,7 +13486,7 @@
               <a:t>—  </a:t>
             </a:r>
             <a:r>
-              <a:rPr sz="1300">
+              <a:rPr sz="1250">
                 <a:solidFill>
                   <a:srgbClr val="2A2724"/>
                 </a:solidFill>
@@ -12958,7 +13505,7 @@
               </a:spcAft>
             </a:pPr>
             <a:r>
-              <a:rPr sz="1300" b="1">
+              <a:rPr sz="1250" b="1">
                 <a:solidFill>
                   <a:srgbClr val="C08A3E"/>
                 </a:solidFill>
@@ -12967,27 +13514,27 @@
               <a:t>—  </a:t>
             </a:r>
             <a:r>
-              <a:rPr sz="1300">
+              <a:rPr sz="1250">
                 <a:solidFill>
                   <a:srgbClr val="2A2724"/>
                 </a:solidFill>
                 <a:latin typeface="Calibri"/>
               </a:rPr>
-              <a:t>El ego-system (Forni &amp; Steiner): herencia desigual del colonialismo.</a:t>
-            </a:r>
-          </a:p>
-        </p:txBody>
-      </p:sp>
-      <p:sp>
-        <p:nvSpPr>
-          <p:cNvPr id="17" name="Rectangle 16"/>
+              <a:t>El ego-system (Forni &amp; Steiner): herencia del colonialismo.</a:t>
+            </a:r>
+          </a:p>
+        </p:txBody>
+      </p:sp>
+      <p:sp>
+        <p:nvSpPr>
+          <p:cNvPr id="18" name="Rectangle 17"/>
           <p:cNvSpPr/>
           <p:nvPr/>
         </p:nvSpPr>
         <p:spPr>
           <a:xfrm>
-            <a:off x="502920" y="6327648"/>
-            <a:ext cx="11183112" cy="17780"/>
+            <a:off x="502920" y="6355080"/>
+            <a:ext cx="11183112" cy="15240"/>
           </a:xfrm>
           <a:prstGeom prst="rect">
             <a:avLst/>
@@ -13024,14 +13571,14 @@
       </p:sp>
       <p:sp>
         <p:nvSpPr>
-          <p:cNvPr id="18" name="TextBox 17"/>
+          <p:cNvPr id="19" name="TextBox 18"/>
           <p:cNvSpPr txBox="1"/>
           <p:nvPr/>
         </p:nvSpPr>
         <p:spPr>
           <a:xfrm>
-            <a:off x="502920" y="6400800"/>
-            <a:ext cx="9601200" cy="365760"/>
+            <a:off x="502920" y="6428232"/>
+            <a:ext cx="9601200" cy="320040"/>
           </a:xfrm>
           <a:prstGeom prst="rect">
             <a:avLst/>
@@ -13059,14 +13606,14 @@
       </p:sp>
       <p:sp>
         <p:nvSpPr>
-          <p:cNvPr id="19" name="TextBox 18"/>
+          <p:cNvPr id="20" name="TextBox 19"/>
           <p:cNvSpPr txBox="1"/>
           <p:nvPr/>
         </p:nvSpPr>
         <p:spPr>
           <a:xfrm>
-            <a:off x="10515600" y="6400800"/>
-            <a:ext cx="1170432" cy="365760"/>
+            <a:off x="10515600" y="6428232"/>
+            <a:ext cx="1170432" cy="320040"/>
           </a:xfrm>
           <a:prstGeom prst="rect">
             <a:avLst/>
@@ -13120,14 +13667,53 @@
       <p:grpSpPr/>
       <p:sp>
         <p:nvSpPr>
-          <p:cNvPr id="2" name="Rectangle 1"/>
+          <p:cNvPr id="2" name="TextBox 1"/>
+          <p:cNvSpPr txBox="1"/>
+          <p:nvPr/>
+        </p:nvSpPr>
+        <p:spPr>
+          <a:xfrm>
+            <a:off x="4206240" y="219456"/>
+            <a:ext cx="7479792" cy="502920"/>
+          </a:xfrm>
+          <a:prstGeom prst="rect">
+            <a:avLst/>
+          </a:prstGeom>
+          <a:noFill/>
+        </p:spPr>
+        <p:txBody>
+          <a:bodyPr wrap="square" anchor="t" lIns="0" rIns="0" tIns="0" bIns="0">
+            <a:spAutoFit/>
+          </a:bodyPr>
+          <a:lstStyle/>
+          <a:p>
+            <a:pPr algn="r">
+              <a:lnSpc>
+                <a:spcPct val="100000"/>
+              </a:lnSpc>
+            </a:pPr>
+            <a:r>
+              <a:rPr sz="850" b="0" i="1">
+                <a:solidFill>
+                  <a:srgbClr val="6B645C"/>
+                </a:solidFill>
+                <a:latin typeface="Georgia"/>
+              </a:rPr>
+              <a:t>Más allá del documental de arte: ensayo fílmico y crítica anticolonial en Las estatuas también mueren</a:t>
+            </a:r>
+          </a:p>
+        </p:txBody>
+      </p:sp>
+      <p:sp>
+        <p:nvSpPr>
+          <p:cNvPr id="3" name="Rectangle 2"/>
           <p:cNvSpPr/>
           <p:nvPr/>
         </p:nvSpPr>
         <p:spPr>
           <a:xfrm>
-            <a:off x="502920" y="548640"/>
-            <a:ext cx="128016" cy="1051560"/>
+            <a:off x="502920" y="566928"/>
+            <a:ext cx="128016" cy="960120"/>
           </a:xfrm>
           <a:prstGeom prst="rect">
             <a:avLst/>
@@ -13164,14 +13750,14 @@
       </p:sp>
       <p:sp>
         <p:nvSpPr>
-          <p:cNvPr id="3" name="TextBox 2"/>
+          <p:cNvPr id="4" name="TextBox 3"/>
           <p:cNvSpPr txBox="1"/>
           <p:nvPr/>
         </p:nvSpPr>
         <p:spPr>
           <a:xfrm>
             <a:off x="777240" y="502920"/>
-            <a:ext cx="10698480" cy="320040"/>
+            <a:ext cx="6400800" cy="292608"/>
           </a:xfrm>
           <a:prstGeom prst="rect">
             <a:avLst/>
@@ -13192,21 +13778,21 @@
                 </a:solidFill>
                 <a:latin typeface="Calibri"/>
               </a:rPr>
-              <a:t>CONTENIDO · 3</a:t>
-            </a:r>
-          </a:p>
-        </p:txBody>
-      </p:sp>
-      <p:sp>
-        <p:nvSpPr>
-          <p:cNvPr id="4" name="TextBox 3"/>
+              <a:t>CONTENIDO · 2</a:t>
+            </a:r>
+          </a:p>
+        </p:txBody>
+      </p:sp>
+      <p:sp>
+        <p:nvSpPr>
+          <p:cNvPr id="5" name="TextBox 4"/>
           <p:cNvSpPr txBox="1"/>
           <p:nvPr/>
         </p:nvSpPr>
         <p:spPr>
           <a:xfrm>
             <a:off x="777240" y="786384"/>
-            <a:ext cx="10881360" cy="868680"/>
+            <a:ext cx="10881360" cy="822960"/>
           </a:xfrm>
           <a:prstGeom prst="rect">
             <a:avLst/>
@@ -13221,30 +13807,65 @@
           <a:p>
             <a:pPr algn="l">
               <a:lnSpc>
-                <a:spcPct val="100000"/>
+                <a:spcPct val="98000"/>
               </a:lnSpc>
             </a:pPr>
             <a:r>
-              <a:rPr sz="3000" b="0" i="0">
+              <a:rPr sz="2600" b="1" i="0">
                 <a:solidFill>
                   <a:srgbClr val="2A2724"/>
                 </a:solidFill>
                 <a:latin typeface="Georgia"/>
               </a:rPr>
-              <a:t>Tres miradas: el cine documental sobre África</a:t>
-            </a:r>
-          </a:p>
-        </p:txBody>
-      </p:sp>
-      <p:sp>
-        <p:nvSpPr>
-          <p:cNvPr id="5" name="Rectangle 4"/>
+              <a:t>Tratamiento cinematográfico de África</a:t>
+            </a:r>
+          </a:p>
+        </p:txBody>
+      </p:sp>
+      <p:sp>
+        <p:nvSpPr>
+          <p:cNvPr id="6" name="TextBox 5"/>
+          <p:cNvSpPr txBox="1"/>
+          <p:nvPr/>
+        </p:nvSpPr>
+        <p:spPr>
+          <a:xfrm>
+            <a:off x="777240" y="1353312"/>
+            <a:ext cx="10881360" cy="365760"/>
+          </a:xfrm>
+          <a:prstGeom prst="rect">
+            <a:avLst/>
+          </a:prstGeom>
+          <a:noFill/>
+        </p:spPr>
+        <p:txBody>
+          <a:bodyPr wrap="square" anchor="t" lIns="0" rIns="0" tIns="0" bIns="0">
+            <a:spAutoFit/>
+          </a:bodyPr>
+          <a:lstStyle/>
+          <a:p>
+            <a:pPr algn="l"/>
+            <a:r>
+              <a:rPr sz="1400" b="0" i="1">
+                <a:solidFill>
+                  <a:srgbClr val="7A5236"/>
+                </a:solidFill>
+                <a:latin typeface="Calibri"/>
+              </a:rPr>
+              <a:t>Tres tipologías de documental sobre el arte africano.</a:t>
+            </a:r>
+          </a:p>
+        </p:txBody>
+      </p:sp>
+      <p:sp>
+        <p:nvSpPr>
+          <p:cNvPr id="7" name="Rectangle 6"/>
           <p:cNvSpPr/>
           <p:nvPr/>
         </p:nvSpPr>
         <p:spPr>
           <a:xfrm>
-            <a:off x="777240" y="1874519"/>
+            <a:off x="777240" y="2423160"/>
             <a:ext cx="3520440" cy="960120"/>
           </a:xfrm>
           <a:prstGeom prst="rect">
@@ -13282,13 +13903,13 @@
       </p:sp>
       <p:sp>
         <p:nvSpPr>
-          <p:cNvPr id="6" name="TextBox 5"/>
+          <p:cNvPr id="8" name="TextBox 7"/>
           <p:cNvSpPr txBox="1"/>
           <p:nvPr/>
         </p:nvSpPr>
         <p:spPr>
           <a:xfrm>
-            <a:off x="914400" y="1874519"/>
+            <a:off x="914400" y="2423160"/>
             <a:ext cx="3246120" cy="960120"/>
           </a:xfrm>
           <a:prstGeom prst="rect">
@@ -13322,14 +13943,14 @@
       </p:sp>
       <p:sp>
         <p:nvSpPr>
-          <p:cNvPr id="7" name="Rectangle 6"/>
+          <p:cNvPr id="9" name="Rectangle 8"/>
           <p:cNvSpPr/>
           <p:nvPr/>
         </p:nvSpPr>
         <p:spPr>
           <a:xfrm>
-            <a:off x="777240" y="2834640"/>
-            <a:ext cx="3520440" cy="3063240"/>
+            <a:off x="777240" y="3383280"/>
+            <a:ext cx="3520440" cy="2514600"/>
           </a:xfrm>
           <a:prstGeom prst="rect">
             <a:avLst/>
@@ -13368,14 +13989,14 @@
       </p:sp>
       <p:sp>
         <p:nvSpPr>
-          <p:cNvPr id="8" name="TextBox 7"/>
+          <p:cNvPr id="10" name="TextBox 9"/>
           <p:cNvSpPr txBox="1"/>
           <p:nvPr/>
         </p:nvSpPr>
         <p:spPr>
           <a:xfrm>
-            <a:off x="978408" y="3063240"/>
-            <a:ext cx="3118104" cy="2743200"/>
+            <a:off x="978408" y="3584448"/>
+            <a:ext cx="3118104" cy="2194560"/>
           </a:xfrm>
           <a:prstGeom prst="rect">
             <a:avLst/>
@@ -13393,11 +14014,11 @@
                 <a:spcPct val="102000"/>
               </a:lnSpc>
               <a:spcAft>
-                <a:spcPts val="1200"/>
+                <a:spcPts val="1100"/>
               </a:spcAft>
             </a:pPr>
             <a:r>
-              <a:rPr sz="1350" b="1">
+              <a:rPr sz="1300" b="1">
                 <a:solidFill>
                   <a:srgbClr val="C08A3E"/>
                 </a:solidFill>
@@ -13406,7 +14027,7 @@
               <a:t>—  </a:t>
             </a:r>
             <a:r>
-              <a:rPr sz="1350">
+              <a:rPr sz="1300">
                 <a:solidFill>
                   <a:srgbClr val="2A2724"/>
                 </a:solidFill>
@@ -13421,11 +14042,11 @@
                 <a:spcPct val="102000"/>
               </a:lnSpc>
               <a:spcAft>
-                <a:spcPts val="1200"/>
+                <a:spcPts val="1100"/>
               </a:spcAft>
             </a:pPr>
             <a:r>
-              <a:rPr sz="1350" b="1">
+              <a:rPr sz="1300" b="1">
                 <a:solidFill>
                   <a:srgbClr val="C08A3E"/>
                 </a:solidFill>
@@ -13434,7 +14055,7 @@
               <a:t>—  </a:t>
             </a:r>
             <a:r>
-              <a:rPr sz="1350">
+              <a:rPr sz="1300">
                 <a:solidFill>
                   <a:srgbClr val="2A2724"/>
                 </a:solidFill>
@@ -13449,11 +14070,11 @@
                 <a:spcPct val="102000"/>
               </a:lnSpc>
               <a:spcAft>
-                <a:spcPts val="1200"/>
+                <a:spcPts val="1100"/>
               </a:spcAft>
             </a:pPr>
             <a:r>
-              <a:rPr sz="1350" b="1">
+              <a:rPr sz="1300" b="1">
                 <a:solidFill>
                   <a:srgbClr val="C08A3E"/>
                 </a:solidFill>
@@ -13462,7 +14083,7 @@
               <a:t>—  </a:t>
             </a:r>
             <a:r>
-              <a:rPr sz="1350">
+              <a:rPr sz="1300">
                 <a:solidFill>
                   <a:srgbClr val="2A2724"/>
                 </a:solidFill>
@@ -13475,13 +14096,13 @@
       </p:sp>
       <p:sp>
         <p:nvSpPr>
-          <p:cNvPr id="9" name="Rectangle 8"/>
+          <p:cNvPr id="11" name="Rectangle 10"/>
           <p:cNvSpPr/>
           <p:nvPr/>
         </p:nvSpPr>
         <p:spPr>
           <a:xfrm>
-            <a:off x="4480559" y="1874519"/>
+            <a:off x="4480559" y="2423160"/>
             <a:ext cx="3520440" cy="960120"/>
           </a:xfrm>
           <a:prstGeom prst="rect">
@@ -13519,13 +14140,13 @@
       </p:sp>
       <p:sp>
         <p:nvSpPr>
-          <p:cNvPr id="10" name="TextBox 9"/>
+          <p:cNvPr id="12" name="TextBox 11"/>
           <p:cNvSpPr txBox="1"/>
           <p:nvPr/>
         </p:nvSpPr>
         <p:spPr>
           <a:xfrm>
-            <a:off x="4617719" y="1874519"/>
+            <a:off x="4617719" y="2423160"/>
             <a:ext cx="3246120" cy="960120"/>
           </a:xfrm>
           <a:prstGeom prst="rect">
@@ -13559,14 +14180,14 @@
       </p:sp>
       <p:sp>
         <p:nvSpPr>
-          <p:cNvPr id="11" name="Rectangle 10"/>
+          <p:cNvPr id="13" name="Rectangle 12"/>
           <p:cNvSpPr/>
           <p:nvPr/>
         </p:nvSpPr>
         <p:spPr>
           <a:xfrm>
-            <a:off x="4480559" y="2834640"/>
-            <a:ext cx="3520440" cy="3063240"/>
+            <a:off x="4480559" y="3383280"/>
+            <a:ext cx="3520440" cy="2514600"/>
           </a:xfrm>
           <a:prstGeom prst="rect">
             <a:avLst/>
@@ -13605,14 +14226,14 @@
       </p:sp>
       <p:sp>
         <p:nvSpPr>
-          <p:cNvPr id="12" name="TextBox 11"/>
+          <p:cNvPr id="14" name="TextBox 13"/>
           <p:cNvSpPr txBox="1"/>
           <p:nvPr/>
         </p:nvSpPr>
         <p:spPr>
           <a:xfrm>
-            <a:off x="4681727" y="3063240"/>
-            <a:ext cx="3118104" cy="2743200"/>
+            <a:off x="4681727" y="3584448"/>
+            <a:ext cx="3118104" cy="2194560"/>
           </a:xfrm>
           <a:prstGeom prst="rect">
             <a:avLst/>
@@ -13630,11 +14251,11 @@
                 <a:spcPct val="102000"/>
               </a:lnSpc>
               <a:spcAft>
-                <a:spcPts val="1200"/>
+                <a:spcPts val="1100"/>
               </a:spcAft>
             </a:pPr>
             <a:r>
-              <a:rPr sz="1350" b="1">
+              <a:rPr sz="1300" b="1">
                 <a:solidFill>
                   <a:srgbClr val="C08A3E"/>
                 </a:solidFill>
@@ -13643,7 +14264,7 @@
               <a:t>—  </a:t>
             </a:r>
             <a:r>
-              <a:rPr sz="1350">
+              <a:rPr sz="1300">
                 <a:solidFill>
                   <a:srgbClr val="2A2724"/>
                 </a:solidFill>
@@ -13658,11 +14279,11 @@
                 <a:spcPct val="102000"/>
               </a:lnSpc>
               <a:spcAft>
-                <a:spcPts val="1200"/>
+                <a:spcPts val="1100"/>
               </a:spcAft>
             </a:pPr>
             <a:r>
-              <a:rPr sz="1350" b="1">
+              <a:rPr sz="1300" b="1">
                 <a:solidFill>
                   <a:srgbClr val="C08A3E"/>
                 </a:solidFill>
@@ -13671,7 +14292,7 @@
               <a:t>—  </a:t>
             </a:r>
             <a:r>
-              <a:rPr sz="1350">
+              <a:rPr sz="1300">
                 <a:solidFill>
                   <a:srgbClr val="2A2724"/>
                 </a:solidFill>
@@ -13686,11 +14307,11 @@
                 <a:spcPct val="102000"/>
               </a:lnSpc>
               <a:spcAft>
-                <a:spcPts val="1200"/>
+                <a:spcPts val="1100"/>
               </a:spcAft>
             </a:pPr>
             <a:r>
-              <a:rPr sz="1350" b="1">
+              <a:rPr sz="1300" b="1">
                 <a:solidFill>
                   <a:srgbClr val="C08A3E"/>
                 </a:solidFill>
@@ -13699,7 +14320,7 @@
               <a:t>—  </a:t>
             </a:r>
             <a:r>
-              <a:rPr sz="1350">
+              <a:rPr sz="1300">
                 <a:solidFill>
                   <a:srgbClr val="2A2724"/>
                 </a:solidFill>
@@ -13712,13 +14333,13 @@
       </p:sp>
       <p:sp>
         <p:nvSpPr>
-          <p:cNvPr id="13" name="Rectangle 12"/>
+          <p:cNvPr id="15" name="Rectangle 14"/>
           <p:cNvSpPr/>
           <p:nvPr/>
         </p:nvSpPr>
         <p:spPr>
           <a:xfrm>
-            <a:off x="8183879" y="1874519"/>
+            <a:off x="8183879" y="2423160"/>
             <a:ext cx="3520440" cy="960120"/>
           </a:xfrm>
           <a:prstGeom prst="rect">
@@ -13756,13 +14377,13 @@
       </p:sp>
       <p:sp>
         <p:nvSpPr>
-          <p:cNvPr id="14" name="TextBox 13"/>
+          <p:cNvPr id="16" name="TextBox 15"/>
           <p:cNvSpPr txBox="1"/>
           <p:nvPr/>
         </p:nvSpPr>
         <p:spPr>
           <a:xfrm>
-            <a:off x="8321039" y="1874519"/>
+            <a:off x="8321039" y="2423160"/>
             <a:ext cx="3246120" cy="960120"/>
           </a:xfrm>
           <a:prstGeom prst="rect">
@@ -13796,14 +14417,14 @@
       </p:sp>
       <p:sp>
         <p:nvSpPr>
-          <p:cNvPr id="15" name="Rectangle 14"/>
+          <p:cNvPr id="17" name="Rectangle 16"/>
           <p:cNvSpPr/>
           <p:nvPr/>
         </p:nvSpPr>
         <p:spPr>
           <a:xfrm>
-            <a:off x="8183879" y="2834640"/>
-            <a:ext cx="3520440" cy="3063240"/>
+            <a:off x="8183879" y="3383280"/>
+            <a:ext cx="3520440" cy="2514600"/>
           </a:xfrm>
           <a:prstGeom prst="rect">
             <a:avLst/>
@@ -13842,14 +14463,14 @@
       </p:sp>
       <p:sp>
         <p:nvSpPr>
-          <p:cNvPr id="16" name="TextBox 15"/>
+          <p:cNvPr id="18" name="TextBox 17"/>
           <p:cNvSpPr txBox="1"/>
           <p:nvPr/>
         </p:nvSpPr>
         <p:spPr>
           <a:xfrm>
-            <a:off x="8385047" y="3063240"/>
-            <a:ext cx="3118104" cy="2743200"/>
+            <a:off x="8385047" y="3584448"/>
+            <a:ext cx="3118104" cy="2194560"/>
           </a:xfrm>
           <a:prstGeom prst="rect">
             <a:avLst/>
@@ -13867,11 +14488,11 @@
                 <a:spcPct val="102000"/>
               </a:lnSpc>
               <a:spcAft>
-                <a:spcPts val="1200"/>
+                <a:spcPts val="1100"/>
               </a:spcAft>
             </a:pPr>
             <a:r>
-              <a:rPr sz="1350" b="1">
+              <a:rPr sz="1300" b="1">
                 <a:solidFill>
                   <a:srgbClr val="C08A3E"/>
                 </a:solidFill>
@@ -13880,7 +14501,7 @@
               <a:t>—  </a:t>
             </a:r>
             <a:r>
-              <a:rPr sz="1350">
+              <a:rPr sz="1300">
                 <a:solidFill>
                   <a:srgbClr val="2A2724"/>
                 </a:solidFill>
@@ -13895,11 +14516,11 @@
                 <a:spcPct val="102000"/>
               </a:lnSpc>
               <a:spcAft>
-                <a:spcPts val="1200"/>
+                <a:spcPts val="1100"/>
               </a:spcAft>
             </a:pPr>
             <a:r>
-              <a:rPr sz="1350" b="1">
+              <a:rPr sz="1300" b="1">
                 <a:solidFill>
                   <a:srgbClr val="C08A3E"/>
                 </a:solidFill>
@@ -13908,7 +14529,7 @@
               <a:t>—  </a:t>
             </a:r>
             <a:r>
-              <a:rPr sz="1350">
+              <a:rPr sz="1300">
                 <a:solidFill>
                   <a:srgbClr val="2A2724"/>
                 </a:solidFill>
@@ -13923,11 +14544,11 @@
                 <a:spcPct val="102000"/>
               </a:lnSpc>
               <a:spcAft>
-                <a:spcPts val="1200"/>
+                <a:spcPts val="1100"/>
               </a:spcAft>
             </a:pPr>
             <a:r>
-              <a:rPr sz="1350" b="1">
+              <a:rPr sz="1300" b="1">
                 <a:solidFill>
                   <a:srgbClr val="C08A3E"/>
                 </a:solidFill>
@@ -13936,27 +14557,27 @@
               <a:t>—  </a:t>
             </a:r>
             <a:r>
-              <a:rPr sz="1350">
+              <a:rPr sz="1300">
                 <a:solidFill>
                   <a:srgbClr val="2A2724"/>
                 </a:solidFill>
                 <a:latin typeface="Calibri"/>
               </a:rPr>
-              <a:t>Obras descontextualizadas de su función.</a:t>
-            </a:r>
-          </a:p>
-        </p:txBody>
-      </p:sp>
-      <p:sp>
-        <p:nvSpPr>
-          <p:cNvPr id="17" name="Rectangle 16"/>
+              <a:t>Obras descontextualizadas de su función ritual.</a:t>
+            </a:r>
+          </a:p>
+        </p:txBody>
+      </p:sp>
+      <p:sp>
+        <p:nvSpPr>
+          <p:cNvPr id="19" name="Rectangle 18"/>
           <p:cNvSpPr/>
           <p:nvPr/>
         </p:nvSpPr>
         <p:spPr>
           <a:xfrm>
-            <a:off x="502920" y="6327648"/>
-            <a:ext cx="11183112" cy="17780"/>
+            <a:off x="502920" y="6355080"/>
+            <a:ext cx="11183112" cy="15240"/>
           </a:xfrm>
           <a:prstGeom prst="rect">
             <a:avLst/>
@@ -13993,14 +14614,14 @@
       </p:sp>
       <p:sp>
         <p:nvSpPr>
-          <p:cNvPr id="18" name="TextBox 17"/>
+          <p:cNvPr id="20" name="TextBox 19"/>
           <p:cNvSpPr txBox="1"/>
           <p:nvPr/>
         </p:nvSpPr>
         <p:spPr>
           <a:xfrm>
-            <a:off x="502920" y="6400800"/>
-            <a:ext cx="9601200" cy="365760"/>
+            <a:off x="502920" y="6428232"/>
+            <a:ext cx="9601200" cy="320040"/>
           </a:xfrm>
           <a:prstGeom prst="rect">
             <a:avLst/>
@@ -14028,14 +14649,14 @@
       </p:sp>
       <p:sp>
         <p:nvSpPr>
-          <p:cNvPr id="19" name="TextBox 18"/>
+          <p:cNvPr id="21" name="TextBox 20"/>
           <p:cNvSpPr txBox="1"/>
           <p:nvPr/>
         </p:nvSpPr>
         <p:spPr>
           <a:xfrm>
-            <a:off x="10515600" y="6400800"/>
-            <a:ext cx="1170432" cy="365760"/>
+            <a:off x="10515600" y="6428232"/>
+            <a:ext cx="1170432" cy="320040"/>
           </a:xfrm>
           <a:prstGeom prst="rect">
             <a:avLst/>

--- a/Defensa_TFG_Las_estatuas_tambien_mueren.pptx
+++ b/Defensa_TFG_Las_estatuas_tambien_mueren.pptx
@@ -3244,14 +3244,82 @@
       </p:sp>
       <p:sp>
         <p:nvSpPr>
-          <p:cNvPr id="5" name="TextBox 4"/>
+          <p:cNvPr id="5" name="Rounded Rectangle 4"/>
+          <p:cNvSpPr/>
+          <p:nvPr/>
+        </p:nvSpPr>
+        <p:spPr>
+          <a:xfrm>
+            <a:off x="10058400" y="548640"/>
+            <a:ext cx="1554480" cy="1554480"/>
+          </a:xfrm>
+          <a:prstGeom prst="roundRect">
+            <a:avLst/>
+          </a:prstGeom>
+          <a:solidFill>
+            <a:srgbClr val="FFFFFF"/>
+          </a:solidFill>
+          <a:ln>
+            <a:noFill/>
+          </a:ln>
+          <a:effectLst/>
+        </p:spPr>
+        <p:style>
+          <a:lnRef idx="1">
+            <a:schemeClr val="accent1"/>
+          </a:lnRef>
+          <a:fillRef idx="3">
+            <a:schemeClr val="accent1"/>
+          </a:fillRef>
+          <a:effectRef idx="2">
+            <a:schemeClr val="accent1"/>
+          </a:effectRef>
+          <a:fontRef idx="minor">
+            <a:schemeClr val="lt1"/>
+          </a:fontRef>
+        </p:style>
+        <p:txBody>
+          <a:bodyPr rtlCol="0" anchor="ctr"/>
+          <a:lstStyle/>
+          <a:p>
+            <a:pPr algn="ctr"/>
+          </a:p>
+        </p:txBody>
+      </p:sp>
+      <p:pic>
+        <p:nvPicPr>
+          <p:cNvPr id="6" name="Picture 5" descr="logo_umu.jpeg"/>
+          <p:cNvPicPr>
+            <a:picLocks noChangeAspect="1"/>
+          </p:cNvPicPr>
+          <p:nvPr/>
+        </p:nvPicPr>
+        <p:blipFill>
+          <a:blip r:embed="rId2"/>
+          <a:stretch>
+            <a:fillRect/>
+          </a:stretch>
+        </p:blipFill>
+        <p:spPr>
+          <a:xfrm>
+            <a:off x="10168128" y="658368"/>
+            <a:ext cx="1335024" cy="1335024"/>
+          </a:xfrm>
+          <a:prstGeom prst="rect">
+            <a:avLst/>
+          </a:prstGeom>
+        </p:spPr>
+      </p:pic>
+      <p:sp>
+        <p:nvSpPr>
+          <p:cNvPr id="7" name="TextBox 6"/>
           <p:cNvSpPr txBox="1"/>
           <p:nvPr/>
         </p:nvSpPr>
         <p:spPr>
           <a:xfrm>
             <a:off x="822960" y="868680"/>
-            <a:ext cx="10515600" cy="457200"/>
+            <a:ext cx="8961120" cy="457200"/>
           </a:xfrm>
           <a:prstGeom prst="rect">
             <a:avLst/>
@@ -3279,7 +3347,7 @@
       </p:sp>
       <p:sp>
         <p:nvSpPr>
-          <p:cNvPr id="6" name="TextBox 5"/>
+          <p:cNvPr id="8" name="TextBox 7"/>
           <p:cNvSpPr txBox="1"/>
           <p:nvPr/>
         </p:nvSpPr>
@@ -3352,7 +3420,7 @@
       </p:sp>
       <p:sp>
         <p:nvSpPr>
-          <p:cNvPr id="7" name="TextBox 6"/>
+          <p:cNvPr id="9" name="TextBox 8"/>
           <p:cNvSpPr txBox="1"/>
           <p:nvPr/>
         </p:nvSpPr>
@@ -4469,8 +4537,8 @@
         </p:nvSpPr>
         <p:spPr>
           <a:xfrm>
-            <a:off x="777240" y="1828800"/>
-            <a:ext cx="10881360" cy="621792"/>
+            <a:off x="777240" y="1536192"/>
+            <a:ext cx="10881360" cy="530352"/>
           </a:xfrm>
           <a:prstGeom prst="rect">
             <a:avLst/>
@@ -4513,8 +4581,8 @@
         </p:nvSpPr>
         <p:spPr>
           <a:xfrm>
-            <a:off x="1005840" y="1828800"/>
-            <a:ext cx="10424160" cy="621792"/>
+            <a:off x="1005840" y="1536192"/>
+            <a:ext cx="10424160" cy="530352"/>
           </a:xfrm>
           <a:prstGeom prst="rect">
             <a:avLst/>
@@ -4529,7 +4597,7 @@
           <a:p>
             <a:pPr algn="ctr"/>
             <a:r>
-              <a:rPr sz="1600" b="0" i="1">
+              <a:rPr sz="1500" b="0" i="1">
                 <a:solidFill>
                   <a:srgbClr val="F4F0E9"/>
                 </a:solidFill>
@@ -4548,8 +4616,8 @@
         </p:nvSpPr>
         <p:spPr>
           <a:xfrm>
-            <a:off x="777240" y="2670048"/>
-            <a:ext cx="5349240" cy="502920"/>
+            <a:off x="777240" y="2194560"/>
+            <a:ext cx="10881360" cy="347472"/>
           </a:xfrm>
           <a:prstGeom prst="rect">
             <a:avLst/>
@@ -4592,8 +4660,8 @@
         </p:nvSpPr>
         <p:spPr>
           <a:xfrm>
-            <a:off x="777240" y="2670048"/>
-            <a:ext cx="5349240" cy="502920"/>
+            <a:off x="960120" y="2194560"/>
+            <a:ext cx="10515600" cy="347472"/>
           </a:xfrm>
           <a:prstGeom prst="rect">
             <a:avLst/>
@@ -4606,29 +4674,58 @@
           </a:bodyPr>
           <a:lstStyle/>
           <a:p>
-            <a:pPr algn="ctr"/>
-            <a:r>
-              <a:rPr sz="1500" b="1" i="0">
+            <a:pPr algn="l"/>
+            <a:r>
+              <a:rPr sz="1300" b="1" i="0">
                 <a:solidFill>
                   <a:srgbClr val="FFFFFF"/>
                 </a:solidFill>
                 <a:latin typeface="Calibri"/>
               </a:rPr>
-              <a:t>Bloque I · Realeza y poder</a:t>
-            </a:r>
-          </a:p>
-        </p:txBody>
-      </p:sp>
-      <p:sp>
-        <p:nvSpPr>
-          <p:cNvPr id="10" name="TextBox 9"/>
+              <a:t>Bloque I · Realeza, poder y organización social</a:t>
+            </a:r>
+          </a:p>
+        </p:txBody>
+      </p:sp>
+      <p:pic>
+        <p:nvPicPr>
+          <p:cNvPr id="10" name="Picture 9" descr="oba.jpeg"/>
+          <p:cNvPicPr>
+            <a:picLocks noChangeAspect="1"/>
+          </p:cNvPicPr>
+          <p:nvPr/>
+        </p:nvPicPr>
+        <p:blipFill>
+          <a:blip r:embed="rId2"/>
+          <a:stretch>
+            <a:fillRect/>
+          </a:stretch>
+        </p:blipFill>
+        <p:spPr>
+          <a:xfrm>
+            <a:off x="1427479" y="2596896"/>
+            <a:ext cx="1406144" cy="1353312"/>
+          </a:xfrm>
+          <a:prstGeom prst="rect">
+            <a:avLst/>
+          </a:prstGeom>
+          <a:ln w="9525">
+            <a:solidFill>
+              <a:srgbClr val="C08A3E"/>
+            </a:solidFill>
+          </a:ln>
+        </p:spPr>
+      </p:pic>
+      <p:sp>
+        <p:nvSpPr>
+          <p:cNvPr id="11" name="TextBox 10"/>
           <p:cNvSpPr txBox="1"/>
           <p:nvPr/>
         </p:nvSpPr>
         <p:spPr>
           <a:xfrm>
-            <a:off x="960120" y="3310128"/>
-            <a:ext cx="5029200" cy="2560320"/>
+            <a:off x="827531" y="3968496"/>
+            <a:ext cx="2606040" cy="292608"/>
           </a:xfrm>
           <a:prstGeom prst="rect">
             <a:avLst/>
@@ -4636,106 +4733,242 @@
           <a:noFill/>
         </p:spPr>
         <p:txBody>
-          <a:bodyPr wrap="square" lIns="0" rIns="0" tIns="0" bIns="0">
+          <a:bodyPr wrap="square" anchor="t" lIns="0" rIns="0" tIns="0" bIns="0">
             <a:spAutoFit/>
           </a:bodyPr>
           <a:lstStyle/>
           <a:p>
-            <a:pPr>
+            <a:pPr algn="ctr">
               <a:lnSpc>
-                <a:spcPct val="105000"/>
+                <a:spcPct val="95000"/>
               </a:lnSpc>
-              <a:spcAft>
-                <a:spcPts val="1200"/>
-              </a:spcAft>
             </a:pPr>
             <a:r>
-              <a:rPr sz="1350" b="1">
-                <a:solidFill>
-                  <a:srgbClr val="C08A3E"/>
-                </a:solidFill>
-                <a:latin typeface="Calibri"/>
-              </a:rPr>
-              <a:t>—  </a:t>
-            </a:r>
-            <a:r>
-              <a:rPr sz="1350">
-                <a:solidFill>
-                  <a:srgbClr val="2A2724"/>
-                </a:solidFill>
-                <a:latin typeface="Calibri"/>
-              </a:rPr>
-              <a:t>Cabezas de oba (Reino de Benín) y de oni (Reino de Ife), Nigeria.</a:t>
-            </a:r>
-          </a:p>
-          <a:p>
-            <a:pPr>
+              <a:rPr sz="950" b="0" i="1">
+                <a:solidFill>
+                  <a:srgbClr val="6B645C"/>
+                </a:solidFill>
+                <a:latin typeface="Calibri"/>
+              </a:rPr>
+              <a:t>Cabeza de oba · Benín</a:t>
+            </a:r>
+          </a:p>
+        </p:txBody>
+      </p:sp>
+      <p:pic>
+        <p:nvPicPr>
+          <p:cNvPr id="12" name="Picture 11" descr="oni.jpeg"/>
+          <p:cNvPicPr>
+            <a:picLocks noChangeAspect="1"/>
+          </p:cNvPicPr>
+          <p:nvPr/>
+        </p:nvPicPr>
+        <p:blipFill>
+          <a:blip r:embed="rId3"/>
+          <a:stretch>
+            <a:fillRect/>
+          </a:stretch>
+        </p:blipFill>
+        <p:spPr>
+          <a:xfrm>
+            <a:off x="4180446" y="2596896"/>
+            <a:ext cx="1350035" cy="1353312"/>
+          </a:xfrm>
+          <a:prstGeom prst="rect">
+            <a:avLst/>
+          </a:prstGeom>
+          <a:ln w="9525">
+            <a:solidFill>
+              <a:srgbClr val="C08A3E"/>
+            </a:solidFill>
+          </a:ln>
+        </p:spPr>
+      </p:pic>
+      <p:sp>
+        <p:nvSpPr>
+          <p:cNvPr id="13" name="TextBox 12"/>
+          <p:cNvSpPr txBox="1"/>
+          <p:nvPr/>
+        </p:nvSpPr>
+        <p:spPr>
+          <a:xfrm>
+            <a:off x="3552444" y="3968496"/>
+            <a:ext cx="2606040" cy="292608"/>
+          </a:xfrm>
+          <a:prstGeom prst="rect">
+            <a:avLst/>
+          </a:prstGeom>
+          <a:noFill/>
+        </p:spPr>
+        <p:txBody>
+          <a:bodyPr wrap="square" anchor="t" lIns="0" rIns="0" tIns="0" bIns="0">
+            <a:spAutoFit/>
+          </a:bodyPr>
+          <a:lstStyle/>
+          <a:p>
+            <a:pPr algn="ctr">
               <a:lnSpc>
-                <a:spcPct val="105000"/>
+                <a:spcPct val="95000"/>
               </a:lnSpc>
-              <a:spcAft>
-                <a:spcPts val="1200"/>
-              </a:spcAft>
             </a:pPr>
             <a:r>
-              <a:rPr sz="1350" b="1">
-                <a:solidFill>
-                  <a:srgbClr val="C08A3E"/>
-                </a:solidFill>
-                <a:latin typeface="Calibri"/>
-              </a:rPr>
-              <a:t>—  </a:t>
-            </a:r>
-            <a:r>
-              <a:rPr sz="1350">
-                <a:solidFill>
-                  <a:srgbClr val="2A2724"/>
-                </a:solidFill>
-                <a:latin typeface="Calibri"/>
-              </a:rPr>
-              <a:t>Guerreros y leopardos de bronce de Benín (British Museum).</a:t>
-            </a:r>
-          </a:p>
-          <a:p>
-            <a:pPr>
+              <a:rPr sz="950" b="0" i="1">
+                <a:solidFill>
+                  <a:srgbClr val="6B645C"/>
+                </a:solidFill>
+                <a:latin typeface="Calibri"/>
+              </a:rPr>
+              <a:t>Cabeza de oni · Ife</a:t>
+            </a:r>
+          </a:p>
+        </p:txBody>
+      </p:sp>
+      <p:pic>
+        <p:nvPicPr>
+          <p:cNvPr id="14" name="Picture 13" descr="guerreros.jpeg"/>
+          <p:cNvPicPr>
+            <a:picLocks noChangeAspect="1"/>
+          </p:cNvPicPr>
+          <p:nvPr/>
+        </p:nvPicPr>
+        <p:blipFill>
+          <a:blip r:embed="rId4"/>
+          <a:stretch>
+            <a:fillRect/>
+          </a:stretch>
+        </p:blipFill>
+        <p:spPr>
+          <a:xfrm>
+            <a:off x="6903719" y="2596896"/>
+            <a:ext cx="1353312" cy="1353312"/>
+          </a:xfrm>
+          <a:prstGeom prst="rect">
+            <a:avLst/>
+          </a:prstGeom>
+          <a:ln w="9525">
+            <a:solidFill>
+              <a:srgbClr val="C08A3E"/>
+            </a:solidFill>
+          </a:ln>
+        </p:spPr>
+      </p:pic>
+      <p:sp>
+        <p:nvSpPr>
+          <p:cNvPr id="15" name="TextBox 14"/>
+          <p:cNvSpPr txBox="1"/>
+          <p:nvPr/>
+        </p:nvSpPr>
+        <p:spPr>
+          <a:xfrm>
+            <a:off x="6277355" y="3968496"/>
+            <a:ext cx="2606040" cy="292608"/>
+          </a:xfrm>
+          <a:prstGeom prst="rect">
+            <a:avLst/>
+          </a:prstGeom>
+          <a:noFill/>
+        </p:spPr>
+        <p:txBody>
+          <a:bodyPr wrap="square" anchor="t" lIns="0" rIns="0" tIns="0" bIns="0">
+            <a:spAutoFit/>
+          </a:bodyPr>
+          <a:lstStyle/>
+          <a:p>
+            <a:pPr algn="ctr">
               <a:lnSpc>
-                <a:spcPct val="105000"/>
+                <a:spcPct val="95000"/>
               </a:lnSpc>
-              <a:spcAft>
-                <a:spcPts val="1200"/>
-              </a:spcAft>
             </a:pPr>
             <a:r>
-              <a:rPr sz="1350" b="1">
-                <a:solidFill>
-                  <a:srgbClr val="C08A3E"/>
-                </a:solidFill>
-                <a:latin typeface="Calibri"/>
-              </a:rPr>
-              <a:t>—  </a:t>
-            </a:r>
-            <a:r>
-              <a:rPr sz="1350">
-                <a:solidFill>
-                  <a:srgbClr val="2A2724"/>
-                </a:solidFill>
-                <a:latin typeface="Calibri"/>
-              </a:rPr>
-              <a:t>Montaje rítmico y fundidos: ¿colonizó Francia un pueblo «sin cultura»?</a:t>
-            </a:r>
-          </a:p>
-        </p:txBody>
-      </p:sp>
-      <p:sp>
-        <p:nvSpPr>
-          <p:cNvPr id="11" name="Rectangle 10"/>
+              <a:rPr sz="950" b="0" i="1">
+                <a:solidFill>
+                  <a:srgbClr val="6B645C"/>
+                </a:solidFill>
+                <a:latin typeface="Calibri"/>
+              </a:rPr>
+              <a:t>Guerreros de Benín</a:t>
+            </a:r>
+          </a:p>
+        </p:txBody>
+      </p:sp>
+      <p:pic>
+        <p:nvPicPr>
+          <p:cNvPr id="16" name="Picture 15" descr="leopardos.jpeg"/>
+          <p:cNvPicPr>
+            <a:picLocks noChangeAspect="1"/>
+          </p:cNvPicPr>
+          <p:nvPr/>
+        </p:nvPicPr>
+        <p:blipFill>
+          <a:blip r:embed="rId5"/>
+          <a:stretch>
+            <a:fillRect/>
+          </a:stretch>
+        </p:blipFill>
+        <p:spPr>
+          <a:xfrm>
+            <a:off x="9002267" y="2642027"/>
+            <a:ext cx="2606040" cy="1263050"/>
+          </a:xfrm>
+          <a:prstGeom prst="rect">
+            <a:avLst/>
+          </a:prstGeom>
+          <a:ln w="9525">
+            <a:solidFill>
+              <a:srgbClr val="C08A3E"/>
+            </a:solidFill>
+          </a:ln>
+        </p:spPr>
+      </p:pic>
+      <p:sp>
+        <p:nvSpPr>
+          <p:cNvPr id="17" name="TextBox 16"/>
+          <p:cNvSpPr txBox="1"/>
+          <p:nvPr/>
+        </p:nvSpPr>
+        <p:spPr>
+          <a:xfrm>
+            <a:off x="9002267" y="3968496"/>
+            <a:ext cx="2606040" cy="292608"/>
+          </a:xfrm>
+          <a:prstGeom prst="rect">
+            <a:avLst/>
+          </a:prstGeom>
+          <a:noFill/>
+        </p:spPr>
+        <p:txBody>
+          <a:bodyPr wrap="square" anchor="t" lIns="0" rIns="0" tIns="0" bIns="0">
+            <a:spAutoFit/>
+          </a:bodyPr>
+          <a:lstStyle/>
+          <a:p>
+            <a:pPr algn="ctr">
+              <a:lnSpc>
+                <a:spcPct val="95000"/>
+              </a:lnSpc>
+            </a:pPr>
+            <a:r>
+              <a:rPr sz="950" b="0" i="1">
+                <a:solidFill>
+                  <a:srgbClr val="6B645C"/>
+                </a:solidFill>
+                <a:latin typeface="Calibri"/>
+              </a:rPr>
+              <a:t>Leopardos · Benín</a:t>
+            </a:r>
+          </a:p>
+        </p:txBody>
+      </p:sp>
+      <p:sp>
+        <p:nvSpPr>
+          <p:cNvPr id="18" name="Rectangle 17"/>
           <p:cNvSpPr/>
           <p:nvPr/>
         </p:nvSpPr>
         <p:spPr>
           <a:xfrm>
-            <a:off x="6400800" y="2670048"/>
-            <a:ext cx="5257800" cy="502920"/>
+            <a:off x="777240" y="4242816"/>
+            <a:ext cx="10881360" cy="347472"/>
           </a:xfrm>
           <a:prstGeom prst="rect">
             <a:avLst/>
@@ -4772,14 +5005,14 @@
       </p:sp>
       <p:sp>
         <p:nvSpPr>
-          <p:cNvPr id="12" name="TextBox 11"/>
+          <p:cNvPr id="19" name="TextBox 18"/>
           <p:cNvSpPr txBox="1"/>
           <p:nvPr/>
         </p:nvSpPr>
         <p:spPr>
           <a:xfrm>
-            <a:off x="6400800" y="2670048"/>
-            <a:ext cx="5257800" cy="502920"/>
+            <a:off x="960120" y="4242816"/>
+            <a:ext cx="10515600" cy="347472"/>
           </a:xfrm>
           <a:prstGeom prst="rect">
             <a:avLst/>
@@ -4792,29 +5025,58 @@
           </a:bodyPr>
           <a:lstStyle/>
           <a:p>
-            <a:pPr algn="ctr"/>
-            <a:r>
-              <a:rPr sz="1500" b="1" i="0">
+            <a:pPr algn="l"/>
+            <a:r>
+              <a:rPr sz="1300" b="1" i="0">
                 <a:solidFill>
                   <a:srgbClr val="FFFFFF"/>
                 </a:solidFill>
                 <a:latin typeface="Calibri"/>
               </a:rPr>
-              <a:t>Bloque II · Culto y ritual</a:t>
-            </a:r>
-          </a:p>
-        </p:txBody>
-      </p:sp>
-      <p:sp>
-        <p:nvSpPr>
-          <p:cNvPr id="13" name="TextBox 12"/>
+              <a:t>Bloque II · Culto, ritual y ancestros</a:t>
+            </a:r>
+          </a:p>
+        </p:txBody>
+      </p:sp>
+      <p:pic>
+        <p:nvPicPr>
+          <p:cNvPr id="20" name="Picture 19" descr="kota.jpeg"/>
+          <p:cNvPicPr>
+            <a:picLocks noChangeAspect="1"/>
+          </p:cNvPicPr>
+          <p:nvPr/>
+        </p:nvPicPr>
+        <p:blipFill>
+          <a:blip r:embed="rId6"/>
+          <a:stretch>
+            <a:fillRect/>
+          </a:stretch>
+        </p:blipFill>
+        <p:spPr>
+          <a:xfrm>
+            <a:off x="1602688" y="4645152"/>
+            <a:ext cx="1055725" cy="1353312"/>
+          </a:xfrm>
+          <a:prstGeom prst="rect">
+            <a:avLst/>
+          </a:prstGeom>
+          <a:ln w="9525">
+            <a:solidFill>
+              <a:srgbClr val="C08A3E"/>
+            </a:solidFill>
+          </a:ln>
+        </p:spPr>
+      </p:pic>
+      <p:sp>
+        <p:nvSpPr>
+          <p:cNvPr id="21" name="TextBox 20"/>
           <p:cNvSpPr txBox="1"/>
           <p:nvPr/>
         </p:nvSpPr>
         <p:spPr>
           <a:xfrm>
-            <a:off x="6583680" y="3310128"/>
-            <a:ext cx="4937760" cy="2560320"/>
+            <a:off x="827531" y="6016752"/>
+            <a:ext cx="2606040" cy="292608"/>
           </a:xfrm>
           <a:prstGeom prst="rect">
             <a:avLst/>
@@ -4822,99 +5084,235 @@
           <a:noFill/>
         </p:spPr>
         <p:txBody>
-          <a:bodyPr wrap="square" lIns="0" rIns="0" tIns="0" bIns="0">
+          <a:bodyPr wrap="square" anchor="t" lIns="0" rIns="0" tIns="0" bIns="0">
             <a:spAutoFit/>
           </a:bodyPr>
           <a:lstStyle/>
           <a:p>
-            <a:pPr>
+            <a:pPr algn="ctr">
               <a:lnSpc>
-                <a:spcPct val="105000"/>
+                <a:spcPct val="95000"/>
               </a:lnSpc>
-              <a:spcAft>
-                <a:spcPts val="1200"/>
-              </a:spcAft>
             </a:pPr>
             <a:r>
-              <a:rPr sz="1350" b="1">
-                <a:solidFill>
-                  <a:srgbClr val="C08A3E"/>
-                </a:solidFill>
-                <a:latin typeface="Calibri"/>
-              </a:rPr>
-              <a:t>—  </a:t>
-            </a:r>
-            <a:r>
-              <a:rPr sz="1350">
-                <a:solidFill>
-                  <a:srgbClr val="2A2724"/>
-                </a:solidFill>
-                <a:latin typeface="Calibri"/>
-              </a:rPr>
-              <a:t>Relicarios Kota (Gabón); tableros de adivinación Ifá, Yoruba (Nigeria).</a:t>
-            </a:r>
-          </a:p>
-          <a:p>
-            <a:pPr>
+              <a:rPr sz="950" b="0" i="1">
+                <a:solidFill>
+                  <a:srgbClr val="6B645C"/>
+                </a:solidFill>
+                <a:latin typeface="Calibri"/>
+              </a:rPr>
+              <a:t>Relicario Kota · Gabón</a:t>
+            </a:r>
+          </a:p>
+        </p:txBody>
+      </p:sp>
+      <p:pic>
+        <p:nvPicPr>
+          <p:cNvPr id="22" name="Picture 21" descr="ifa.jpeg"/>
+          <p:cNvPicPr>
+            <a:picLocks noChangeAspect="1"/>
+          </p:cNvPicPr>
+          <p:nvPr/>
+        </p:nvPicPr>
+        <p:blipFill>
+          <a:blip r:embed="rId7"/>
+          <a:stretch>
+            <a:fillRect/>
+          </a:stretch>
+        </p:blipFill>
+        <p:spPr>
+          <a:xfrm>
+            <a:off x="3962473" y="4645152"/>
+            <a:ext cx="1785981" cy="1353312"/>
+          </a:xfrm>
+          <a:prstGeom prst="rect">
+            <a:avLst/>
+          </a:prstGeom>
+          <a:ln w="9525">
+            <a:solidFill>
+              <a:srgbClr val="C08A3E"/>
+            </a:solidFill>
+          </a:ln>
+        </p:spPr>
+      </p:pic>
+      <p:sp>
+        <p:nvSpPr>
+          <p:cNvPr id="23" name="TextBox 22"/>
+          <p:cNvSpPr txBox="1"/>
+          <p:nvPr/>
+        </p:nvSpPr>
+        <p:spPr>
+          <a:xfrm>
+            <a:off x="3552444" y="6016752"/>
+            <a:ext cx="2606040" cy="292608"/>
+          </a:xfrm>
+          <a:prstGeom prst="rect">
+            <a:avLst/>
+          </a:prstGeom>
+          <a:noFill/>
+        </p:spPr>
+        <p:txBody>
+          <a:bodyPr wrap="square" anchor="t" lIns="0" rIns="0" tIns="0" bIns="0">
+            <a:spAutoFit/>
+          </a:bodyPr>
+          <a:lstStyle/>
+          <a:p>
+            <a:pPr algn="ctr">
               <a:lnSpc>
-                <a:spcPct val="105000"/>
+                <a:spcPct val="95000"/>
               </a:lnSpc>
-              <a:spcAft>
-                <a:spcPts val="1200"/>
-              </a:spcAft>
             </a:pPr>
             <a:r>
-              <a:rPr sz="1350" b="1">
-                <a:solidFill>
-                  <a:srgbClr val="C08A3E"/>
-                </a:solidFill>
-                <a:latin typeface="Calibri"/>
-              </a:rPr>
-              <a:t>—  </a:t>
-            </a:r>
-            <a:r>
-              <a:rPr sz="1350">
-                <a:solidFill>
-                  <a:srgbClr val="2A2724"/>
-                </a:solidFill>
-                <a:latin typeface="Calibri"/>
-              </a:rPr>
-              <a:t>Reposacabezas Pende (R. D. del Congo); máscaras Dan (Costa de Marfil).</a:t>
-            </a:r>
-          </a:p>
-          <a:p>
-            <a:pPr>
+              <a:rPr sz="950" b="0" i="1">
+                <a:solidFill>
+                  <a:srgbClr val="6B645C"/>
+                </a:solidFill>
+                <a:latin typeface="Calibri"/>
+              </a:rPr>
+              <a:t>Tablero Ifá · Yoruba</a:t>
+            </a:r>
+          </a:p>
+        </p:txBody>
+      </p:sp>
+      <p:pic>
+        <p:nvPicPr>
+          <p:cNvPr id="24" name="Picture 23" descr="pende.jpeg"/>
+          <p:cNvPicPr>
+            <a:picLocks noChangeAspect="1"/>
+          </p:cNvPicPr>
+          <p:nvPr/>
+        </p:nvPicPr>
+        <p:blipFill>
+          <a:blip r:embed="rId8"/>
+          <a:stretch>
+            <a:fillRect/>
+          </a:stretch>
+        </p:blipFill>
+        <p:spPr>
+          <a:xfrm>
+            <a:off x="6684182" y="4645152"/>
+            <a:ext cx="1792386" cy="1353312"/>
+          </a:xfrm>
+          <a:prstGeom prst="rect">
+            <a:avLst/>
+          </a:prstGeom>
+          <a:ln w="9525">
+            <a:solidFill>
+              <a:srgbClr val="C08A3E"/>
+            </a:solidFill>
+          </a:ln>
+        </p:spPr>
+      </p:pic>
+      <p:sp>
+        <p:nvSpPr>
+          <p:cNvPr id="25" name="TextBox 24"/>
+          <p:cNvSpPr txBox="1"/>
+          <p:nvPr/>
+        </p:nvSpPr>
+        <p:spPr>
+          <a:xfrm>
+            <a:off x="6277355" y="6016752"/>
+            <a:ext cx="2606040" cy="292608"/>
+          </a:xfrm>
+          <a:prstGeom prst="rect">
+            <a:avLst/>
+          </a:prstGeom>
+          <a:noFill/>
+        </p:spPr>
+        <p:txBody>
+          <a:bodyPr wrap="square" anchor="t" lIns="0" rIns="0" tIns="0" bIns="0">
+            <a:spAutoFit/>
+          </a:bodyPr>
+          <a:lstStyle/>
+          <a:p>
+            <a:pPr algn="ctr">
               <a:lnSpc>
-                <a:spcPct val="105000"/>
+                <a:spcPct val="95000"/>
               </a:lnSpc>
-              <a:spcAft>
-                <a:spcPts val="1200"/>
-              </a:spcAft>
             </a:pPr>
             <a:r>
-              <a:rPr sz="1350" b="1">
-                <a:solidFill>
-                  <a:srgbClr val="C08A3E"/>
-                </a:solidFill>
-                <a:latin typeface="Calibri"/>
-              </a:rPr>
-              <a:t>—  </a:t>
-            </a:r>
-            <a:r>
-              <a:rPr sz="1350">
-                <a:solidFill>
-                  <a:srgbClr val="2A2724"/>
-                </a:solidFill>
-                <a:latin typeface="Calibri"/>
-              </a:rPr>
-              <a:t>Culto animista y a los ancestros; piezas deliberadamente sin contexto.</a:t>
-            </a:r>
-          </a:p>
-        </p:txBody>
-      </p:sp>
-      <p:sp>
-        <p:nvSpPr>
-          <p:cNvPr id="14" name="Rectangle 13"/>
+              <a:rPr sz="950" b="0" i="1">
+                <a:solidFill>
+                  <a:srgbClr val="6B645C"/>
+                </a:solidFill>
+                <a:latin typeface="Calibri"/>
+              </a:rPr>
+              <a:t>Reposacabezas Pende</a:t>
+            </a:r>
+          </a:p>
+        </p:txBody>
+      </p:sp>
+      <p:pic>
+        <p:nvPicPr>
+          <p:cNvPr id="26" name="Picture 25" descr="dan.jpeg"/>
+          <p:cNvPicPr>
+            <a:picLocks noChangeAspect="1"/>
+          </p:cNvPicPr>
+          <p:nvPr/>
+        </p:nvPicPr>
+        <p:blipFill>
+          <a:blip r:embed="rId9"/>
+          <a:stretch>
+            <a:fillRect/>
+          </a:stretch>
+        </p:blipFill>
+        <p:spPr>
+          <a:xfrm>
+            <a:off x="9895313" y="4645152"/>
+            <a:ext cx="819947" cy="1353312"/>
+          </a:xfrm>
+          <a:prstGeom prst="rect">
+            <a:avLst/>
+          </a:prstGeom>
+          <a:ln w="9525">
+            <a:solidFill>
+              <a:srgbClr val="C08A3E"/>
+            </a:solidFill>
+          </a:ln>
+        </p:spPr>
+      </p:pic>
+      <p:sp>
+        <p:nvSpPr>
+          <p:cNvPr id="27" name="TextBox 26"/>
+          <p:cNvSpPr txBox="1"/>
+          <p:nvPr/>
+        </p:nvSpPr>
+        <p:spPr>
+          <a:xfrm>
+            <a:off x="9002267" y="6016752"/>
+            <a:ext cx="2606040" cy="292608"/>
+          </a:xfrm>
+          <a:prstGeom prst="rect">
+            <a:avLst/>
+          </a:prstGeom>
+          <a:noFill/>
+        </p:spPr>
+        <p:txBody>
+          <a:bodyPr wrap="square" anchor="t" lIns="0" rIns="0" tIns="0" bIns="0">
+            <a:spAutoFit/>
+          </a:bodyPr>
+          <a:lstStyle/>
+          <a:p>
+            <a:pPr algn="ctr">
+              <a:lnSpc>
+                <a:spcPct val="95000"/>
+              </a:lnSpc>
+            </a:pPr>
+            <a:r>
+              <a:rPr sz="950" b="0" i="1">
+                <a:solidFill>
+                  <a:srgbClr val="6B645C"/>
+                </a:solidFill>
+                <a:latin typeface="Calibri"/>
+              </a:rPr>
+              <a:t>Máscara Dan · C. de Marfil</a:t>
+            </a:r>
+          </a:p>
+        </p:txBody>
+      </p:sp>
+      <p:sp>
+        <p:nvSpPr>
+          <p:cNvPr id="28" name="Rectangle 27"/>
           <p:cNvSpPr/>
           <p:nvPr/>
         </p:nvSpPr>
@@ -4958,7 +5356,7 @@
       </p:sp>
       <p:sp>
         <p:nvSpPr>
-          <p:cNvPr id="15" name="TextBox 14"/>
+          <p:cNvPr id="29" name="TextBox 28"/>
           <p:cNvSpPr txBox="1"/>
           <p:nvPr/>
         </p:nvSpPr>
@@ -4993,7 +5391,7 @@
       </p:sp>
       <p:sp>
         <p:nvSpPr>
-          <p:cNvPr id="16" name="TextBox 15"/>
+          <p:cNvPr id="30" name="TextBox 29"/>
           <p:cNvSpPr txBox="1"/>
           <p:nvPr/>
         </p:nvSpPr>
@@ -12991,7 +13389,7 @@
         <p:spPr>
           <a:xfrm>
             <a:off x="978408" y="2487168"/>
-            <a:ext cx="3118104" cy="3291840"/>
+            <a:ext cx="3118104" cy="1554480"/>
           </a:xfrm>
           <a:prstGeom prst="rect">
             <a:avLst/>
@@ -13525,9 +13923,77 @@
           </a:p>
         </p:txBody>
       </p:sp>
-      <p:sp>
-        <p:nvSpPr>
-          <p:cNvPr id="18" name="Rectangle 17"/>
+      <p:pic>
+        <p:nvPicPr>
+          <p:cNvPr id="18" name="Picture 17" descr="berlin.jpeg"/>
+          <p:cNvPicPr>
+            <a:picLocks noChangeAspect="1"/>
+          </p:cNvPicPr>
+          <p:nvPr/>
+        </p:nvPicPr>
+        <p:blipFill>
+          <a:blip r:embed="rId2"/>
+          <a:stretch>
+            <a:fillRect/>
+          </a:stretch>
+        </p:blipFill>
+        <p:spPr>
+          <a:xfrm>
+            <a:off x="1651572" y="3931920"/>
+            <a:ext cx="1762631" cy="1627632"/>
+          </a:xfrm>
+          <a:prstGeom prst="rect">
+            <a:avLst/>
+          </a:prstGeom>
+          <a:ln w="9525">
+            <a:solidFill>
+              <a:srgbClr val="C08A3E"/>
+            </a:solidFill>
+          </a:ln>
+        </p:spPr>
+      </p:pic>
+      <p:sp>
+        <p:nvSpPr>
+          <p:cNvPr id="19" name="TextBox 18"/>
+          <p:cNvSpPr txBox="1"/>
+          <p:nvPr/>
+        </p:nvSpPr>
+        <p:spPr>
+          <a:xfrm>
+            <a:off x="886968" y="5614416"/>
+            <a:ext cx="3291840" cy="292608"/>
+          </a:xfrm>
+          <a:prstGeom prst="rect">
+            <a:avLst/>
+          </a:prstGeom>
+          <a:noFill/>
+        </p:spPr>
+        <p:txBody>
+          <a:bodyPr wrap="square" anchor="t" lIns="0" rIns="0" tIns="0" bIns="0">
+            <a:spAutoFit/>
+          </a:bodyPr>
+          <a:lstStyle/>
+          <a:p>
+            <a:pPr algn="ctr">
+              <a:lnSpc>
+                <a:spcPct val="95000"/>
+              </a:lnSpc>
+            </a:pPr>
+            <a:r>
+              <a:rPr sz="950" b="0" i="1">
+                <a:solidFill>
+                  <a:srgbClr val="6B645C"/>
+                </a:solidFill>
+                <a:latin typeface="Calibri"/>
+              </a:rPr>
+              <a:t>Caricatura del reparto de África (L'Illustration, 1885)</a:t>
+            </a:r>
+          </a:p>
+        </p:txBody>
+      </p:sp>
+      <p:sp>
+        <p:nvSpPr>
+          <p:cNvPr id="20" name="Rectangle 19"/>
           <p:cNvSpPr/>
           <p:nvPr/>
         </p:nvSpPr>
@@ -13571,7 +14037,7 @@
       </p:sp>
       <p:sp>
         <p:nvSpPr>
-          <p:cNvPr id="19" name="TextBox 18"/>
+          <p:cNvPr id="21" name="TextBox 20"/>
           <p:cNvSpPr txBox="1"/>
           <p:nvPr/>
         </p:nvSpPr>
@@ -13606,7 +14072,7 @@
       </p:sp>
       <p:sp>
         <p:nvSpPr>
-          <p:cNvPr id="20" name="TextBox 19"/>
+          <p:cNvPr id="22" name="TextBox 21"/>
           <p:cNvSpPr txBox="1"/>
           <p:nvPr/>
         </p:nvSpPr>
